--- a/Karun_Krishnan_BI_Case_Study.pptx
+++ b/Karun_Krishnan_BI_Case_Study.pptx
@@ -309,13 +309,20 @@
           </a:bodyPr>
           <a:lstStyle>
             <a:lvl1pPr lvl="0" marR="0" rtl="0" algn="l">
-              <a:spcBef>
-                <a:spcPts val="0"/>
-              </a:spcBef>
-              <a:spcAft>
-                <a:spcPts val="0"/>
-              </a:spcAft>
+              <a:lnSpc>
+                <a:spcPct val="100000"/>
+              </a:lnSpc>
+              <a:spcBef>
+                <a:spcPts val="0"/>
+              </a:spcBef>
+              <a:spcAft>
+                <a:spcPts val="0"/>
+              </a:spcAft>
+              <a:buClr>
+                <a:srgbClr val="000000"/>
+              </a:buClr>
               <a:buSzPts val="1400"/>
+              <a:buFont typeface="Arial"/>
               <a:buNone/>
               <a:defRPr b="0" i="0" sz="1200" u="none" cap="none" strike="noStrike">
                 <a:solidFill>
@@ -328,13 +335,20 @@
               </a:defRPr>
             </a:lvl1pPr>
             <a:lvl2pPr lvl="1" marR="0" rtl="0" algn="l">
-              <a:spcBef>
-                <a:spcPts val="0"/>
-              </a:spcBef>
-              <a:spcAft>
-                <a:spcPts val="0"/>
-              </a:spcAft>
+              <a:lnSpc>
+                <a:spcPct val="100000"/>
+              </a:lnSpc>
+              <a:spcBef>
+                <a:spcPts val="0"/>
+              </a:spcBef>
+              <a:spcAft>
+                <a:spcPts val="0"/>
+              </a:spcAft>
+              <a:buClr>
+                <a:srgbClr val="000000"/>
+              </a:buClr>
               <a:buSzPts val="1400"/>
+              <a:buFont typeface="Arial"/>
               <a:buNone/>
               <a:defRPr b="0" i="0" sz="1800" u="none" cap="none" strike="noStrike">
                 <a:solidFill>
@@ -347,13 +361,20 @@
               </a:defRPr>
             </a:lvl2pPr>
             <a:lvl3pPr lvl="2" marR="0" rtl="0" algn="l">
-              <a:spcBef>
-                <a:spcPts val="0"/>
-              </a:spcBef>
-              <a:spcAft>
-                <a:spcPts val="0"/>
-              </a:spcAft>
+              <a:lnSpc>
+                <a:spcPct val="100000"/>
+              </a:lnSpc>
+              <a:spcBef>
+                <a:spcPts val="0"/>
+              </a:spcBef>
+              <a:spcAft>
+                <a:spcPts val="0"/>
+              </a:spcAft>
+              <a:buClr>
+                <a:srgbClr val="000000"/>
+              </a:buClr>
               <a:buSzPts val="1400"/>
+              <a:buFont typeface="Arial"/>
               <a:buNone/>
               <a:defRPr b="0" i="0" sz="1800" u="none" cap="none" strike="noStrike">
                 <a:solidFill>
@@ -366,13 +387,20 @@
               </a:defRPr>
             </a:lvl3pPr>
             <a:lvl4pPr lvl="3" marR="0" rtl="0" algn="l">
-              <a:spcBef>
-                <a:spcPts val="0"/>
-              </a:spcBef>
-              <a:spcAft>
-                <a:spcPts val="0"/>
-              </a:spcAft>
+              <a:lnSpc>
+                <a:spcPct val="100000"/>
+              </a:lnSpc>
+              <a:spcBef>
+                <a:spcPts val="0"/>
+              </a:spcBef>
+              <a:spcAft>
+                <a:spcPts val="0"/>
+              </a:spcAft>
+              <a:buClr>
+                <a:srgbClr val="000000"/>
+              </a:buClr>
               <a:buSzPts val="1400"/>
+              <a:buFont typeface="Arial"/>
               <a:buNone/>
               <a:defRPr b="0" i="0" sz="1800" u="none" cap="none" strike="noStrike">
                 <a:solidFill>
@@ -385,13 +413,20 @@
               </a:defRPr>
             </a:lvl4pPr>
             <a:lvl5pPr lvl="4" marR="0" rtl="0" algn="l">
-              <a:spcBef>
-                <a:spcPts val="0"/>
-              </a:spcBef>
-              <a:spcAft>
-                <a:spcPts val="0"/>
-              </a:spcAft>
+              <a:lnSpc>
+                <a:spcPct val="100000"/>
+              </a:lnSpc>
+              <a:spcBef>
+                <a:spcPts val="0"/>
+              </a:spcBef>
+              <a:spcAft>
+                <a:spcPts val="0"/>
+              </a:spcAft>
+              <a:buClr>
+                <a:srgbClr val="000000"/>
+              </a:buClr>
               <a:buSzPts val="1400"/>
+              <a:buFont typeface="Arial"/>
               <a:buNone/>
               <a:defRPr b="0" i="0" sz="1800" u="none" cap="none" strike="noStrike">
                 <a:solidFill>
@@ -404,13 +439,20 @@
               </a:defRPr>
             </a:lvl5pPr>
             <a:lvl6pPr lvl="5" marR="0" rtl="0" algn="l">
-              <a:spcBef>
-                <a:spcPts val="0"/>
-              </a:spcBef>
-              <a:spcAft>
-                <a:spcPts val="0"/>
-              </a:spcAft>
+              <a:lnSpc>
+                <a:spcPct val="100000"/>
+              </a:lnSpc>
+              <a:spcBef>
+                <a:spcPts val="0"/>
+              </a:spcBef>
+              <a:spcAft>
+                <a:spcPts val="0"/>
+              </a:spcAft>
+              <a:buClr>
+                <a:srgbClr val="000000"/>
+              </a:buClr>
               <a:buSzPts val="1400"/>
+              <a:buFont typeface="Arial"/>
               <a:buNone/>
               <a:defRPr b="0" i="0" sz="1800" u="none" cap="none" strike="noStrike">
                 <a:solidFill>
@@ -423,13 +465,20 @@
               </a:defRPr>
             </a:lvl6pPr>
             <a:lvl7pPr lvl="6" marR="0" rtl="0" algn="l">
-              <a:spcBef>
-                <a:spcPts val="0"/>
-              </a:spcBef>
-              <a:spcAft>
-                <a:spcPts val="0"/>
-              </a:spcAft>
+              <a:lnSpc>
+                <a:spcPct val="100000"/>
+              </a:lnSpc>
+              <a:spcBef>
+                <a:spcPts val="0"/>
+              </a:spcBef>
+              <a:spcAft>
+                <a:spcPts val="0"/>
+              </a:spcAft>
+              <a:buClr>
+                <a:srgbClr val="000000"/>
+              </a:buClr>
               <a:buSzPts val="1400"/>
+              <a:buFont typeface="Arial"/>
               <a:buNone/>
               <a:defRPr b="0" i="0" sz="1800" u="none" cap="none" strike="noStrike">
                 <a:solidFill>
@@ -442,13 +491,20 @@
               </a:defRPr>
             </a:lvl7pPr>
             <a:lvl8pPr lvl="7" marR="0" rtl="0" algn="l">
-              <a:spcBef>
-                <a:spcPts val="0"/>
-              </a:spcBef>
-              <a:spcAft>
-                <a:spcPts val="0"/>
-              </a:spcAft>
+              <a:lnSpc>
+                <a:spcPct val="100000"/>
+              </a:lnSpc>
+              <a:spcBef>
+                <a:spcPts val="0"/>
+              </a:spcBef>
+              <a:spcAft>
+                <a:spcPts val="0"/>
+              </a:spcAft>
+              <a:buClr>
+                <a:srgbClr val="000000"/>
+              </a:buClr>
               <a:buSzPts val="1400"/>
+              <a:buFont typeface="Arial"/>
               <a:buNone/>
               <a:defRPr b="0" i="0" sz="1800" u="none" cap="none" strike="noStrike">
                 <a:solidFill>
@@ -461,13 +517,20 @@
               </a:defRPr>
             </a:lvl8pPr>
             <a:lvl9pPr lvl="8" marR="0" rtl="0" algn="l">
-              <a:spcBef>
-                <a:spcPts val="0"/>
-              </a:spcBef>
-              <a:spcAft>
-                <a:spcPts val="0"/>
-              </a:spcAft>
+              <a:lnSpc>
+                <a:spcPct val="100000"/>
+              </a:lnSpc>
+              <a:spcBef>
+                <a:spcPts val="0"/>
+              </a:spcBef>
+              <a:spcAft>
+                <a:spcPts val="0"/>
+              </a:spcAft>
+              <a:buClr>
+                <a:srgbClr val="000000"/>
+              </a:buClr>
               <a:buSzPts val="1400"/>
+              <a:buFont typeface="Arial"/>
               <a:buNone/>
               <a:defRPr b="0" i="0" sz="1800" u="none" cap="none" strike="noStrike">
                 <a:solidFill>
@@ -510,13 +573,20 @@
           </a:bodyPr>
           <a:lstStyle>
             <a:lvl1pPr lvl="0" marR="0" rtl="0" algn="r">
-              <a:spcBef>
-                <a:spcPts val="0"/>
-              </a:spcBef>
-              <a:spcAft>
-                <a:spcPts val="0"/>
-              </a:spcAft>
+              <a:lnSpc>
+                <a:spcPct val="100000"/>
+              </a:lnSpc>
+              <a:spcBef>
+                <a:spcPts val="0"/>
+              </a:spcBef>
+              <a:spcAft>
+                <a:spcPts val="0"/>
+              </a:spcAft>
+              <a:buClr>
+                <a:srgbClr val="000000"/>
+              </a:buClr>
               <a:buSzPts val="1400"/>
+              <a:buFont typeface="Arial"/>
               <a:buNone/>
               <a:defRPr b="0" i="0" sz="1200" u="none" cap="none" strike="noStrike">
                 <a:solidFill>
@@ -529,13 +599,20 @@
               </a:defRPr>
             </a:lvl1pPr>
             <a:lvl2pPr lvl="1" marR="0" rtl="0" algn="l">
-              <a:spcBef>
-                <a:spcPts val="0"/>
-              </a:spcBef>
-              <a:spcAft>
-                <a:spcPts val="0"/>
-              </a:spcAft>
+              <a:lnSpc>
+                <a:spcPct val="100000"/>
+              </a:lnSpc>
+              <a:spcBef>
+                <a:spcPts val="0"/>
+              </a:spcBef>
+              <a:spcAft>
+                <a:spcPts val="0"/>
+              </a:spcAft>
+              <a:buClr>
+                <a:srgbClr val="000000"/>
+              </a:buClr>
               <a:buSzPts val="1400"/>
+              <a:buFont typeface="Arial"/>
               <a:buNone/>
               <a:defRPr b="0" i="0" sz="1800" u="none" cap="none" strike="noStrike">
                 <a:solidFill>
@@ -548,13 +625,20 @@
               </a:defRPr>
             </a:lvl2pPr>
             <a:lvl3pPr lvl="2" marR="0" rtl="0" algn="l">
-              <a:spcBef>
-                <a:spcPts val="0"/>
-              </a:spcBef>
-              <a:spcAft>
-                <a:spcPts val="0"/>
-              </a:spcAft>
+              <a:lnSpc>
+                <a:spcPct val="100000"/>
+              </a:lnSpc>
+              <a:spcBef>
+                <a:spcPts val="0"/>
+              </a:spcBef>
+              <a:spcAft>
+                <a:spcPts val="0"/>
+              </a:spcAft>
+              <a:buClr>
+                <a:srgbClr val="000000"/>
+              </a:buClr>
               <a:buSzPts val="1400"/>
+              <a:buFont typeface="Arial"/>
               <a:buNone/>
               <a:defRPr b="0" i="0" sz="1800" u="none" cap="none" strike="noStrike">
                 <a:solidFill>
@@ -567,13 +651,20 @@
               </a:defRPr>
             </a:lvl3pPr>
             <a:lvl4pPr lvl="3" marR="0" rtl="0" algn="l">
-              <a:spcBef>
-                <a:spcPts val="0"/>
-              </a:spcBef>
-              <a:spcAft>
-                <a:spcPts val="0"/>
-              </a:spcAft>
+              <a:lnSpc>
+                <a:spcPct val="100000"/>
+              </a:lnSpc>
+              <a:spcBef>
+                <a:spcPts val="0"/>
+              </a:spcBef>
+              <a:spcAft>
+                <a:spcPts val="0"/>
+              </a:spcAft>
+              <a:buClr>
+                <a:srgbClr val="000000"/>
+              </a:buClr>
               <a:buSzPts val="1400"/>
+              <a:buFont typeface="Arial"/>
               <a:buNone/>
               <a:defRPr b="0" i="0" sz="1800" u="none" cap="none" strike="noStrike">
                 <a:solidFill>
@@ -586,13 +677,20 @@
               </a:defRPr>
             </a:lvl4pPr>
             <a:lvl5pPr lvl="4" marR="0" rtl="0" algn="l">
-              <a:spcBef>
-                <a:spcPts val="0"/>
-              </a:spcBef>
-              <a:spcAft>
-                <a:spcPts val="0"/>
-              </a:spcAft>
+              <a:lnSpc>
+                <a:spcPct val="100000"/>
+              </a:lnSpc>
+              <a:spcBef>
+                <a:spcPts val="0"/>
+              </a:spcBef>
+              <a:spcAft>
+                <a:spcPts val="0"/>
+              </a:spcAft>
+              <a:buClr>
+                <a:srgbClr val="000000"/>
+              </a:buClr>
               <a:buSzPts val="1400"/>
+              <a:buFont typeface="Arial"/>
               <a:buNone/>
               <a:defRPr b="0" i="0" sz="1800" u="none" cap="none" strike="noStrike">
                 <a:solidFill>
@@ -605,13 +703,20 @@
               </a:defRPr>
             </a:lvl5pPr>
             <a:lvl6pPr lvl="5" marR="0" rtl="0" algn="l">
-              <a:spcBef>
-                <a:spcPts val="0"/>
-              </a:spcBef>
-              <a:spcAft>
-                <a:spcPts val="0"/>
-              </a:spcAft>
+              <a:lnSpc>
+                <a:spcPct val="100000"/>
+              </a:lnSpc>
+              <a:spcBef>
+                <a:spcPts val="0"/>
+              </a:spcBef>
+              <a:spcAft>
+                <a:spcPts val="0"/>
+              </a:spcAft>
+              <a:buClr>
+                <a:srgbClr val="000000"/>
+              </a:buClr>
               <a:buSzPts val="1400"/>
+              <a:buFont typeface="Arial"/>
               <a:buNone/>
               <a:defRPr b="0" i="0" sz="1800" u="none" cap="none" strike="noStrike">
                 <a:solidFill>
@@ -624,13 +729,20 @@
               </a:defRPr>
             </a:lvl6pPr>
             <a:lvl7pPr lvl="6" marR="0" rtl="0" algn="l">
-              <a:spcBef>
-                <a:spcPts val="0"/>
-              </a:spcBef>
-              <a:spcAft>
-                <a:spcPts val="0"/>
-              </a:spcAft>
+              <a:lnSpc>
+                <a:spcPct val="100000"/>
+              </a:lnSpc>
+              <a:spcBef>
+                <a:spcPts val="0"/>
+              </a:spcBef>
+              <a:spcAft>
+                <a:spcPts val="0"/>
+              </a:spcAft>
+              <a:buClr>
+                <a:srgbClr val="000000"/>
+              </a:buClr>
               <a:buSzPts val="1400"/>
+              <a:buFont typeface="Arial"/>
               <a:buNone/>
               <a:defRPr b="0" i="0" sz="1800" u="none" cap="none" strike="noStrike">
                 <a:solidFill>
@@ -643,13 +755,20 @@
               </a:defRPr>
             </a:lvl7pPr>
             <a:lvl8pPr lvl="7" marR="0" rtl="0" algn="l">
-              <a:spcBef>
-                <a:spcPts val="0"/>
-              </a:spcBef>
-              <a:spcAft>
-                <a:spcPts val="0"/>
-              </a:spcAft>
+              <a:lnSpc>
+                <a:spcPct val="100000"/>
+              </a:lnSpc>
+              <a:spcBef>
+                <a:spcPts val="0"/>
+              </a:spcBef>
+              <a:spcAft>
+                <a:spcPts val="0"/>
+              </a:spcAft>
+              <a:buClr>
+                <a:srgbClr val="000000"/>
+              </a:buClr>
               <a:buSzPts val="1400"/>
+              <a:buFont typeface="Arial"/>
               <a:buNone/>
               <a:defRPr b="0" i="0" sz="1800" u="none" cap="none" strike="noStrike">
                 <a:solidFill>
@@ -662,13 +781,20 @@
               </a:defRPr>
             </a:lvl8pPr>
             <a:lvl9pPr lvl="8" marR="0" rtl="0" algn="l">
-              <a:spcBef>
-                <a:spcPts val="0"/>
-              </a:spcBef>
-              <a:spcAft>
-                <a:spcPts val="0"/>
-              </a:spcAft>
+              <a:lnSpc>
+                <a:spcPct val="100000"/>
+              </a:lnSpc>
+              <a:spcBef>
+                <a:spcPts val="0"/>
+              </a:spcBef>
+              <a:spcAft>
+                <a:spcPts val="0"/>
+              </a:spcAft>
+              <a:buClr>
+                <a:srgbClr val="000000"/>
+              </a:buClr>
               <a:buSzPts val="1400"/>
+              <a:buFont typeface="Arial"/>
               <a:buNone/>
               <a:defRPr b="0" i="0" sz="1800" u="none" cap="none" strike="noStrike">
                 <a:solidFill>
@@ -756,13 +882,20 @@
           </a:bodyPr>
           <a:lstStyle>
             <a:lvl1pPr indent="-228600" lvl="0" marL="457200" marR="0" rtl="0" algn="l">
-              <a:spcBef>
-                <a:spcPts val="0"/>
-              </a:spcBef>
-              <a:spcAft>
-                <a:spcPts val="0"/>
-              </a:spcAft>
+              <a:lnSpc>
+                <a:spcPct val="100000"/>
+              </a:lnSpc>
+              <a:spcBef>
+                <a:spcPts val="0"/>
+              </a:spcBef>
+              <a:spcAft>
+                <a:spcPts val="0"/>
+              </a:spcAft>
+              <a:buClr>
+                <a:srgbClr val="000000"/>
+              </a:buClr>
               <a:buSzPts val="1400"/>
+              <a:buFont typeface="Arial"/>
               <a:buNone/>
               <a:defRPr b="0" i="0" sz="1200" u="none" cap="none" strike="noStrike">
                 <a:solidFill>
@@ -775,13 +908,20 @@
               </a:defRPr>
             </a:lvl1pPr>
             <a:lvl2pPr indent="-228600" lvl="1" marL="914400" marR="0" rtl="0" algn="l">
-              <a:spcBef>
-                <a:spcPts val="0"/>
-              </a:spcBef>
-              <a:spcAft>
-                <a:spcPts val="0"/>
-              </a:spcAft>
+              <a:lnSpc>
+                <a:spcPct val="100000"/>
+              </a:lnSpc>
+              <a:spcBef>
+                <a:spcPts val="0"/>
+              </a:spcBef>
+              <a:spcAft>
+                <a:spcPts val="0"/>
+              </a:spcAft>
+              <a:buClr>
+                <a:srgbClr val="000000"/>
+              </a:buClr>
               <a:buSzPts val="1400"/>
+              <a:buFont typeface="Arial"/>
               <a:buNone/>
               <a:defRPr b="0" i="0" sz="1200" u="none" cap="none" strike="noStrike">
                 <a:solidFill>
@@ -794,13 +934,20 @@
               </a:defRPr>
             </a:lvl2pPr>
             <a:lvl3pPr indent="-228600" lvl="2" marL="1371600" marR="0" rtl="0" algn="l">
-              <a:spcBef>
-                <a:spcPts val="0"/>
-              </a:spcBef>
-              <a:spcAft>
-                <a:spcPts val="0"/>
-              </a:spcAft>
+              <a:lnSpc>
+                <a:spcPct val="100000"/>
+              </a:lnSpc>
+              <a:spcBef>
+                <a:spcPts val="0"/>
+              </a:spcBef>
+              <a:spcAft>
+                <a:spcPts val="0"/>
+              </a:spcAft>
+              <a:buClr>
+                <a:srgbClr val="000000"/>
+              </a:buClr>
               <a:buSzPts val="1400"/>
+              <a:buFont typeface="Arial"/>
               <a:buNone/>
               <a:defRPr b="0" i="0" sz="1200" u="none" cap="none" strike="noStrike">
                 <a:solidFill>
@@ -813,13 +960,20 @@
               </a:defRPr>
             </a:lvl3pPr>
             <a:lvl4pPr indent="-228600" lvl="3" marL="1828800" marR="0" rtl="0" algn="l">
-              <a:spcBef>
-                <a:spcPts val="0"/>
-              </a:spcBef>
-              <a:spcAft>
-                <a:spcPts val="0"/>
-              </a:spcAft>
+              <a:lnSpc>
+                <a:spcPct val="100000"/>
+              </a:lnSpc>
+              <a:spcBef>
+                <a:spcPts val="0"/>
+              </a:spcBef>
+              <a:spcAft>
+                <a:spcPts val="0"/>
+              </a:spcAft>
+              <a:buClr>
+                <a:srgbClr val="000000"/>
+              </a:buClr>
               <a:buSzPts val="1400"/>
+              <a:buFont typeface="Arial"/>
               <a:buNone/>
               <a:defRPr b="0" i="0" sz="1200" u="none" cap="none" strike="noStrike">
                 <a:solidFill>
@@ -832,13 +986,20 @@
               </a:defRPr>
             </a:lvl4pPr>
             <a:lvl5pPr indent="-228600" lvl="4" marL="2286000" marR="0" rtl="0" algn="l">
-              <a:spcBef>
-                <a:spcPts val="0"/>
-              </a:spcBef>
-              <a:spcAft>
-                <a:spcPts val="0"/>
-              </a:spcAft>
+              <a:lnSpc>
+                <a:spcPct val="100000"/>
+              </a:lnSpc>
+              <a:spcBef>
+                <a:spcPts val="0"/>
+              </a:spcBef>
+              <a:spcAft>
+                <a:spcPts val="0"/>
+              </a:spcAft>
+              <a:buClr>
+                <a:srgbClr val="000000"/>
+              </a:buClr>
               <a:buSzPts val="1400"/>
+              <a:buFont typeface="Arial"/>
               <a:buNone/>
               <a:defRPr b="0" i="0" sz="1200" u="none" cap="none" strike="noStrike">
                 <a:solidFill>
@@ -851,13 +1012,20 @@
               </a:defRPr>
             </a:lvl5pPr>
             <a:lvl6pPr indent="-228600" lvl="5" marL="2743200" marR="0" rtl="0" algn="l">
-              <a:spcBef>
-                <a:spcPts val="0"/>
-              </a:spcBef>
-              <a:spcAft>
-                <a:spcPts val="0"/>
-              </a:spcAft>
+              <a:lnSpc>
+                <a:spcPct val="100000"/>
+              </a:lnSpc>
+              <a:spcBef>
+                <a:spcPts val="0"/>
+              </a:spcBef>
+              <a:spcAft>
+                <a:spcPts val="0"/>
+              </a:spcAft>
+              <a:buClr>
+                <a:srgbClr val="000000"/>
+              </a:buClr>
               <a:buSzPts val="1400"/>
+              <a:buFont typeface="Arial"/>
               <a:buNone/>
               <a:defRPr b="0" i="0" sz="1200" u="none" cap="none" strike="noStrike">
                 <a:solidFill>
@@ -870,13 +1038,20 @@
               </a:defRPr>
             </a:lvl6pPr>
             <a:lvl7pPr indent="-228600" lvl="6" marL="3200400" marR="0" rtl="0" algn="l">
-              <a:spcBef>
-                <a:spcPts val="0"/>
-              </a:spcBef>
-              <a:spcAft>
-                <a:spcPts val="0"/>
-              </a:spcAft>
+              <a:lnSpc>
+                <a:spcPct val="100000"/>
+              </a:lnSpc>
+              <a:spcBef>
+                <a:spcPts val="0"/>
+              </a:spcBef>
+              <a:spcAft>
+                <a:spcPts val="0"/>
+              </a:spcAft>
+              <a:buClr>
+                <a:srgbClr val="000000"/>
+              </a:buClr>
               <a:buSzPts val="1400"/>
+              <a:buFont typeface="Arial"/>
               <a:buNone/>
               <a:defRPr b="0" i="0" sz="1200" u="none" cap="none" strike="noStrike">
                 <a:solidFill>
@@ -889,13 +1064,20 @@
               </a:defRPr>
             </a:lvl7pPr>
             <a:lvl8pPr indent="-228600" lvl="7" marL="3657600" marR="0" rtl="0" algn="l">
-              <a:spcBef>
-                <a:spcPts val="0"/>
-              </a:spcBef>
-              <a:spcAft>
-                <a:spcPts val="0"/>
-              </a:spcAft>
+              <a:lnSpc>
+                <a:spcPct val="100000"/>
+              </a:lnSpc>
+              <a:spcBef>
+                <a:spcPts val="0"/>
+              </a:spcBef>
+              <a:spcAft>
+                <a:spcPts val="0"/>
+              </a:spcAft>
+              <a:buClr>
+                <a:srgbClr val="000000"/>
+              </a:buClr>
               <a:buSzPts val="1400"/>
+              <a:buFont typeface="Arial"/>
               <a:buNone/>
               <a:defRPr b="0" i="0" sz="1200" u="none" cap="none" strike="noStrike">
                 <a:solidFill>
@@ -908,13 +1090,20 @@
               </a:defRPr>
             </a:lvl8pPr>
             <a:lvl9pPr indent="-228600" lvl="8" marL="4114800" marR="0" rtl="0" algn="l">
-              <a:spcBef>
-                <a:spcPts val="0"/>
-              </a:spcBef>
-              <a:spcAft>
-                <a:spcPts val="0"/>
-              </a:spcAft>
+              <a:lnSpc>
+                <a:spcPct val="100000"/>
+              </a:lnSpc>
+              <a:spcBef>
+                <a:spcPts val="0"/>
+              </a:spcBef>
+              <a:spcAft>
+                <a:spcPts val="0"/>
+              </a:spcAft>
+              <a:buClr>
+                <a:srgbClr val="000000"/>
+              </a:buClr>
               <a:buSzPts val="1400"/>
+              <a:buFont typeface="Arial"/>
               <a:buNone/>
               <a:defRPr b="0" i="0" sz="1200" u="none" cap="none" strike="noStrike">
                 <a:solidFill>
@@ -957,13 +1146,20 @@
           </a:bodyPr>
           <a:lstStyle>
             <a:lvl1pPr lvl="0" marR="0" rtl="0" algn="l">
-              <a:spcBef>
-                <a:spcPts val="0"/>
-              </a:spcBef>
-              <a:spcAft>
-                <a:spcPts val="0"/>
-              </a:spcAft>
+              <a:lnSpc>
+                <a:spcPct val="100000"/>
+              </a:lnSpc>
+              <a:spcBef>
+                <a:spcPts val="0"/>
+              </a:spcBef>
+              <a:spcAft>
+                <a:spcPts val="0"/>
+              </a:spcAft>
+              <a:buClr>
+                <a:srgbClr val="000000"/>
+              </a:buClr>
               <a:buSzPts val="1400"/>
+              <a:buFont typeface="Arial"/>
               <a:buNone/>
               <a:defRPr b="0" i="0" sz="1200" u="none" cap="none" strike="noStrike">
                 <a:solidFill>
@@ -976,13 +1172,20 @@
               </a:defRPr>
             </a:lvl1pPr>
             <a:lvl2pPr lvl="1" marR="0" rtl="0" algn="l">
-              <a:spcBef>
-                <a:spcPts val="0"/>
-              </a:spcBef>
-              <a:spcAft>
-                <a:spcPts val="0"/>
-              </a:spcAft>
+              <a:lnSpc>
+                <a:spcPct val="100000"/>
+              </a:lnSpc>
+              <a:spcBef>
+                <a:spcPts val="0"/>
+              </a:spcBef>
+              <a:spcAft>
+                <a:spcPts val="0"/>
+              </a:spcAft>
+              <a:buClr>
+                <a:srgbClr val="000000"/>
+              </a:buClr>
               <a:buSzPts val="1400"/>
+              <a:buFont typeface="Arial"/>
               <a:buNone/>
               <a:defRPr b="0" i="0" sz="1800" u="none" cap="none" strike="noStrike">
                 <a:solidFill>
@@ -995,13 +1198,20 @@
               </a:defRPr>
             </a:lvl2pPr>
             <a:lvl3pPr lvl="2" marR="0" rtl="0" algn="l">
-              <a:spcBef>
-                <a:spcPts val="0"/>
-              </a:spcBef>
-              <a:spcAft>
-                <a:spcPts val="0"/>
-              </a:spcAft>
+              <a:lnSpc>
+                <a:spcPct val="100000"/>
+              </a:lnSpc>
+              <a:spcBef>
+                <a:spcPts val="0"/>
+              </a:spcBef>
+              <a:spcAft>
+                <a:spcPts val="0"/>
+              </a:spcAft>
+              <a:buClr>
+                <a:srgbClr val="000000"/>
+              </a:buClr>
               <a:buSzPts val="1400"/>
+              <a:buFont typeface="Arial"/>
               <a:buNone/>
               <a:defRPr b="0" i="0" sz="1800" u="none" cap="none" strike="noStrike">
                 <a:solidFill>
@@ -1014,13 +1224,20 @@
               </a:defRPr>
             </a:lvl3pPr>
             <a:lvl4pPr lvl="3" marR="0" rtl="0" algn="l">
-              <a:spcBef>
-                <a:spcPts val="0"/>
-              </a:spcBef>
-              <a:spcAft>
-                <a:spcPts val="0"/>
-              </a:spcAft>
+              <a:lnSpc>
+                <a:spcPct val="100000"/>
+              </a:lnSpc>
+              <a:spcBef>
+                <a:spcPts val="0"/>
+              </a:spcBef>
+              <a:spcAft>
+                <a:spcPts val="0"/>
+              </a:spcAft>
+              <a:buClr>
+                <a:srgbClr val="000000"/>
+              </a:buClr>
               <a:buSzPts val="1400"/>
+              <a:buFont typeface="Arial"/>
               <a:buNone/>
               <a:defRPr b="0" i="0" sz="1800" u="none" cap="none" strike="noStrike">
                 <a:solidFill>
@@ -1033,13 +1250,20 @@
               </a:defRPr>
             </a:lvl4pPr>
             <a:lvl5pPr lvl="4" marR="0" rtl="0" algn="l">
-              <a:spcBef>
-                <a:spcPts val="0"/>
-              </a:spcBef>
-              <a:spcAft>
-                <a:spcPts val="0"/>
-              </a:spcAft>
+              <a:lnSpc>
+                <a:spcPct val="100000"/>
+              </a:lnSpc>
+              <a:spcBef>
+                <a:spcPts val="0"/>
+              </a:spcBef>
+              <a:spcAft>
+                <a:spcPts val="0"/>
+              </a:spcAft>
+              <a:buClr>
+                <a:srgbClr val="000000"/>
+              </a:buClr>
               <a:buSzPts val="1400"/>
+              <a:buFont typeface="Arial"/>
               <a:buNone/>
               <a:defRPr b="0" i="0" sz="1800" u="none" cap="none" strike="noStrike">
                 <a:solidFill>
@@ -1052,13 +1276,20 @@
               </a:defRPr>
             </a:lvl5pPr>
             <a:lvl6pPr lvl="5" marR="0" rtl="0" algn="l">
-              <a:spcBef>
-                <a:spcPts val="0"/>
-              </a:spcBef>
-              <a:spcAft>
-                <a:spcPts val="0"/>
-              </a:spcAft>
+              <a:lnSpc>
+                <a:spcPct val="100000"/>
+              </a:lnSpc>
+              <a:spcBef>
+                <a:spcPts val="0"/>
+              </a:spcBef>
+              <a:spcAft>
+                <a:spcPts val="0"/>
+              </a:spcAft>
+              <a:buClr>
+                <a:srgbClr val="000000"/>
+              </a:buClr>
               <a:buSzPts val="1400"/>
+              <a:buFont typeface="Arial"/>
               <a:buNone/>
               <a:defRPr b="0" i="0" sz="1800" u="none" cap="none" strike="noStrike">
                 <a:solidFill>
@@ -1071,13 +1302,20 @@
               </a:defRPr>
             </a:lvl6pPr>
             <a:lvl7pPr lvl="6" marR="0" rtl="0" algn="l">
-              <a:spcBef>
-                <a:spcPts val="0"/>
-              </a:spcBef>
-              <a:spcAft>
-                <a:spcPts val="0"/>
-              </a:spcAft>
+              <a:lnSpc>
+                <a:spcPct val="100000"/>
+              </a:lnSpc>
+              <a:spcBef>
+                <a:spcPts val="0"/>
+              </a:spcBef>
+              <a:spcAft>
+                <a:spcPts val="0"/>
+              </a:spcAft>
+              <a:buClr>
+                <a:srgbClr val="000000"/>
+              </a:buClr>
               <a:buSzPts val="1400"/>
+              <a:buFont typeface="Arial"/>
               <a:buNone/>
               <a:defRPr b="0" i="0" sz="1800" u="none" cap="none" strike="noStrike">
                 <a:solidFill>
@@ -1090,13 +1328,20 @@
               </a:defRPr>
             </a:lvl7pPr>
             <a:lvl8pPr lvl="7" marR="0" rtl="0" algn="l">
-              <a:spcBef>
-                <a:spcPts val="0"/>
-              </a:spcBef>
-              <a:spcAft>
-                <a:spcPts val="0"/>
-              </a:spcAft>
+              <a:lnSpc>
+                <a:spcPct val="100000"/>
+              </a:lnSpc>
+              <a:spcBef>
+                <a:spcPts val="0"/>
+              </a:spcBef>
+              <a:spcAft>
+                <a:spcPts val="0"/>
+              </a:spcAft>
+              <a:buClr>
+                <a:srgbClr val="000000"/>
+              </a:buClr>
               <a:buSzPts val="1400"/>
+              <a:buFont typeface="Arial"/>
               <a:buNone/>
               <a:defRPr b="0" i="0" sz="1800" u="none" cap="none" strike="noStrike">
                 <a:solidFill>
@@ -1109,13 +1354,20 @@
               </a:defRPr>
             </a:lvl8pPr>
             <a:lvl9pPr lvl="8" marR="0" rtl="0" algn="l">
-              <a:spcBef>
-                <a:spcPts val="0"/>
-              </a:spcBef>
-              <a:spcAft>
-                <a:spcPts val="0"/>
-              </a:spcAft>
+              <a:lnSpc>
+                <a:spcPct val="100000"/>
+              </a:lnSpc>
+              <a:spcBef>
+                <a:spcPts val="0"/>
+              </a:spcBef>
+              <a:spcAft>
+                <a:spcPts val="0"/>
+              </a:spcAft>
+              <a:buClr>
+                <a:srgbClr val="000000"/>
+              </a:buClr>
               <a:buSzPts val="1400"/>
+              <a:buFont typeface="Arial"/>
               <a:buNone/>
               <a:defRPr b="0" i="0" sz="1800" u="none" cap="none" strike="noStrike">
                 <a:solidFill>
@@ -1159,12 +1411,20 @@
           <a:lstStyle/>
           <a:p>
             <a:pPr indent="0" lvl="0" marL="0" marR="0" rtl="0" algn="r">
-              <a:spcBef>
-                <a:spcPts val="0"/>
-              </a:spcBef>
-              <a:spcAft>
-                <a:spcPts val="0"/>
-              </a:spcAft>
+              <a:lnSpc>
+                <a:spcPct val="100000"/>
+              </a:lnSpc>
+              <a:spcBef>
+                <a:spcPts val="0"/>
+              </a:spcBef>
+              <a:spcAft>
+                <a:spcPts val="0"/>
+              </a:spcAft>
+              <a:buClr>
+                <a:srgbClr val="000000"/>
+              </a:buClr>
+              <a:buSzPts val="1200"/>
+              <a:buFont typeface="Arial"/>
               <a:buNone/>
             </a:pPr>
             <a:fld id="{00000000-1234-1234-1234-123412341234}" type="slidenum">
@@ -1516,12 +1776,16 @@
           <a:lstStyle/>
           <a:p>
             <a:pPr indent="0" lvl="0" marL="0" rtl="0" algn="l">
-              <a:spcBef>
-                <a:spcPts val="0"/>
-              </a:spcBef>
-              <a:spcAft>
-                <a:spcPts val="0"/>
-              </a:spcAft>
+              <a:lnSpc>
+                <a:spcPct val="100000"/>
+              </a:lnSpc>
+              <a:spcBef>
+                <a:spcPts val="0"/>
+              </a:spcBef>
+              <a:spcAft>
+                <a:spcPts val="0"/>
+              </a:spcAft>
+              <a:buSzPts val="1400"/>
               <a:buNone/>
             </a:pPr>
             <a:r>
@@ -1559,12 +1823,16 @@
           <a:lstStyle/>
           <a:p>
             <a:pPr indent="0" lvl="0" marL="0" rtl="0" algn="r">
-              <a:spcBef>
-                <a:spcPts val="0"/>
-              </a:spcBef>
-              <a:spcAft>
-                <a:spcPts val="0"/>
-              </a:spcAft>
+              <a:lnSpc>
+                <a:spcPct val="100000"/>
+              </a:lnSpc>
+              <a:spcBef>
+                <a:spcPts val="0"/>
+              </a:spcBef>
+              <a:spcAft>
+                <a:spcPts val="0"/>
+              </a:spcAft>
+              <a:buSzPts val="1400"/>
               <a:buNone/>
             </a:pPr>
             <a:fld id="{00000000-1234-1234-1234-123412341234}" type="slidenum">
@@ -1673,12 +1941,16 @@
           <a:lstStyle/>
           <a:p>
             <a:pPr indent="0" lvl="0" marL="0" rtl="0" algn="l">
-              <a:spcBef>
-                <a:spcPts val="0"/>
-              </a:spcBef>
-              <a:spcAft>
-                <a:spcPts val="0"/>
-              </a:spcAft>
+              <a:lnSpc>
+                <a:spcPct val="100000"/>
+              </a:lnSpc>
+              <a:spcBef>
+                <a:spcPts val="0"/>
+              </a:spcBef>
+              <a:spcAft>
+                <a:spcPts val="0"/>
+              </a:spcAft>
+              <a:buSzPts val="1400"/>
               <a:buNone/>
             </a:pPr>
             <a:r>
@@ -1716,12 +1988,16 @@
           <a:lstStyle/>
           <a:p>
             <a:pPr indent="0" lvl="0" marL="0" rtl="0" algn="r">
-              <a:spcBef>
-                <a:spcPts val="0"/>
-              </a:spcBef>
-              <a:spcAft>
-                <a:spcPts val="0"/>
-              </a:spcAft>
+              <a:lnSpc>
+                <a:spcPct val="100000"/>
+              </a:lnSpc>
+              <a:spcBef>
+                <a:spcPts val="0"/>
+              </a:spcBef>
+              <a:spcAft>
+                <a:spcPts val="0"/>
+              </a:spcAft>
+              <a:buSzPts val="1400"/>
               <a:buNone/>
             </a:pPr>
             <a:fld id="{00000000-1234-1234-1234-123412341234}" type="slidenum">
@@ -1830,12 +2106,16 @@
           <a:lstStyle/>
           <a:p>
             <a:pPr indent="0" lvl="0" marL="0" rtl="0" algn="l">
-              <a:spcBef>
-                <a:spcPts val="0"/>
-              </a:spcBef>
-              <a:spcAft>
-                <a:spcPts val="0"/>
-              </a:spcAft>
+              <a:lnSpc>
+                <a:spcPct val="100000"/>
+              </a:lnSpc>
+              <a:spcBef>
+                <a:spcPts val="0"/>
+              </a:spcBef>
+              <a:spcAft>
+                <a:spcPts val="0"/>
+              </a:spcAft>
+              <a:buSzPts val="1400"/>
               <a:buNone/>
             </a:pPr>
             <a:r>
@@ -1873,12 +2153,16 @@
           <a:lstStyle/>
           <a:p>
             <a:pPr indent="0" lvl="0" marL="0" rtl="0" algn="r">
-              <a:spcBef>
-                <a:spcPts val="0"/>
-              </a:spcBef>
-              <a:spcAft>
-                <a:spcPts val="0"/>
-              </a:spcAft>
+              <a:lnSpc>
+                <a:spcPct val="100000"/>
+              </a:lnSpc>
+              <a:spcBef>
+                <a:spcPts val="0"/>
+              </a:spcBef>
+              <a:spcAft>
+                <a:spcPts val="0"/>
+              </a:spcAft>
+              <a:buSzPts val="1400"/>
               <a:buNone/>
             </a:pPr>
             <a:fld id="{00000000-1234-1234-1234-123412341234}" type="slidenum">
@@ -1987,12 +2271,16 @@
           <a:lstStyle/>
           <a:p>
             <a:pPr indent="0" lvl="0" marL="0" rtl="0" algn="l">
-              <a:spcBef>
-                <a:spcPts val="0"/>
-              </a:spcBef>
-              <a:spcAft>
-                <a:spcPts val="0"/>
-              </a:spcAft>
+              <a:lnSpc>
+                <a:spcPct val="100000"/>
+              </a:lnSpc>
+              <a:spcBef>
+                <a:spcPts val="0"/>
+              </a:spcBef>
+              <a:spcAft>
+                <a:spcPts val="0"/>
+              </a:spcAft>
+              <a:buSzPts val="1400"/>
               <a:buNone/>
             </a:pPr>
             <a:r>
@@ -2030,12 +2318,16 @@
           <a:lstStyle/>
           <a:p>
             <a:pPr indent="0" lvl="0" marL="0" rtl="0" algn="r">
-              <a:spcBef>
-                <a:spcPts val="0"/>
-              </a:spcBef>
-              <a:spcAft>
-                <a:spcPts val="0"/>
-              </a:spcAft>
+              <a:lnSpc>
+                <a:spcPct val="100000"/>
+              </a:lnSpc>
+              <a:spcBef>
+                <a:spcPts val="0"/>
+              </a:spcBef>
+              <a:spcAft>
+                <a:spcPts val="0"/>
+              </a:spcAft>
+              <a:buSzPts val="1400"/>
               <a:buNone/>
             </a:pPr>
             <a:fld id="{00000000-1234-1234-1234-123412341234}" type="slidenum">
@@ -2144,12 +2436,16 @@
           <a:lstStyle/>
           <a:p>
             <a:pPr indent="0" lvl="0" marL="0" rtl="0" algn="l">
-              <a:spcBef>
-                <a:spcPts val="0"/>
-              </a:spcBef>
-              <a:spcAft>
-                <a:spcPts val="0"/>
-              </a:spcAft>
+              <a:lnSpc>
+                <a:spcPct val="100000"/>
+              </a:lnSpc>
+              <a:spcBef>
+                <a:spcPts val="0"/>
+              </a:spcBef>
+              <a:spcAft>
+                <a:spcPts val="0"/>
+              </a:spcAft>
+              <a:buSzPts val="1400"/>
               <a:buNone/>
             </a:pPr>
             <a:r>
@@ -2187,12 +2483,16 @@
           <a:lstStyle/>
           <a:p>
             <a:pPr indent="0" lvl="0" marL="0" rtl="0" algn="r">
-              <a:spcBef>
-                <a:spcPts val="0"/>
-              </a:spcBef>
-              <a:spcAft>
-                <a:spcPts val="0"/>
-              </a:spcAft>
+              <a:lnSpc>
+                <a:spcPct val="100000"/>
+              </a:lnSpc>
+              <a:spcBef>
+                <a:spcPts val="0"/>
+              </a:spcBef>
+              <a:spcAft>
+                <a:spcPts val="0"/>
+              </a:spcAft>
+              <a:buSzPts val="1400"/>
               <a:buNone/>
             </a:pPr>
             <a:fld id="{00000000-1234-1234-1234-123412341234}" type="slidenum">
@@ -2301,12 +2601,16 @@
           <a:lstStyle/>
           <a:p>
             <a:pPr indent="0" lvl="0" marL="0" rtl="0" algn="l">
-              <a:spcBef>
-                <a:spcPts val="0"/>
-              </a:spcBef>
-              <a:spcAft>
-                <a:spcPts val="0"/>
-              </a:spcAft>
+              <a:lnSpc>
+                <a:spcPct val="100000"/>
+              </a:lnSpc>
+              <a:spcBef>
+                <a:spcPts val="0"/>
+              </a:spcBef>
+              <a:spcAft>
+                <a:spcPts val="0"/>
+              </a:spcAft>
+              <a:buSzPts val="1400"/>
               <a:buNone/>
             </a:pPr>
             <a:r>
@@ -2344,12 +2648,16 @@
           <a:lstStyle/>
           <a:p>
             <a:pPr indent="0" lvl="0" marL="0" rtl="0" algn="r">
-              <a:spcBef>
-                <a:spcPts val="0"/>
-              </a:spcBef>
-              <a:spcAft>
-                <a:spcPts val="0"/>
-              </a:spcAft>
+              <a:lnSpc>
+                <a:spcPct val="100000"/>
+              </a:lnSpc>
+              <a:spcBef>
+                <a:spcPts val="0"/>
+              </a:spcBef>
+              <a:spcAft>
+                <a:spcPts val="0"/>
+              </a:spcAft>
+              <a:buSzPts val="1400"/>
               <a:buNone/>
             </a:pPr>
             <a:fld id="{00000000-1234-1234-1234-123412341234}" type="slidenum">
@@ -2458,12 +2766,16 @@
           <a:lstStyle/>
           <a:p>
             <a:pPr indent="0" lvl="0" marL="0" rtl="0" algn="l">
-              <a:spcBef>
-                <a:spcPts val="0"/>
-              </a:spcBef>
-              <a:spcAft>
-                <a:spcPts val="0"/>
-              </a:spcAft>
+              <a:lnSpc>
+                <a:spcPct val="100000"/>
+              </a:lnSpc>
+              <a:spcBef>
+                <a:spcPts val="0"/>
+              </a:spcBef>
+              <a:spcAft>
+                <a:spcPts val="0"/>
+              </a:spcAft>
+              <a:buSzPts val="1400"/>
               <a:buNone/>
             </a:pPr>
             <a:r>
@@ -2501,12 +2813,16 @@
           <a:lstStyle/>
           <a:p>
             <a:pPr indent="0" lvl="0" marL="0" rtl="0" algn="r">
-              <a:spcBef>
-                <a:spcPts val="0"/>
-              </a:spcBef>
-              <a:spcAft>
-                <a:spcPts val="0"/>
-              </a:spcAft>
+              <a:lnSpc>
+                <a:spcPct val="100000"/>
+              </a:lnSpc>
+              <a:spcBef>
+                <a:spcPts val="0"/>
+              </a:spcBef>
+              <a:spcAft>
+                <a:spcPts val="0"/>
+              </a:spcAft>
+              <a:buSzPts val="1400"/>
               <a:buNone/>
             </a:pPr>
             <a:fld id="{00000000-1234-1234-1234-123412341234}" type="slidenum">
@@ -2615,12 +2931,16 @@
           <a:lstStyle/>
           <a:p>
             <a:pPr indent="0" lvl="0" marL="0" rtl="0" algn="l">
-              <a:spcBef>
-                <a:spcPts val="0"/>
-              </a:spcBef>
-              <a:spcAft>
-                <a:spcPts val="0"/>
-              </a:spcAft>
+              <a:lnSpc>
+                <a:spcPct val="100000"/>
+              </a:lnSpc>
+              <a:spcBef>
+                <a:spcPts val="0"/>
+              </a:spcBef>
+              <a:spcAft>
+                <a:spcPts val="0"/>
+              </a:spcAft>
+              <a:buSzPts val="1400"/>
               <a:buNone/>
             </a:pPr>
             <a:r>
@@ -2658,12 +2978,16 @@
           <a:lstStyle/>
           <a:p>
             <a:pPr indent="0" lvl="0" marL="0" rtl="0" algn="r">
-              <a:spcBef>
-                <a:spcPts val="0"/>
-              </a:spcBef>
-              <a:spcAft>
-                <a:spcPts val="0"/>
-              </a:spcAft>
+              <a:lnSpc>
+                <a:spcPct val="100000"/>
+              </a:lnSpc>
+              <a:spcBef>
+                <a:spcPts val="0"/>
+              </a:spcBef>
+              <a:spcAft>
+                <a:spcPts val="0"/>
+              </a:spcAft>
+              <a:buSzPts val="1400"/>
               <a:buNone/>
             </a:pPr>
             <a:fld id="{00000000-1234-1234-1234-123412341234}" type="slidenum">
@@ -2772,12 +3096,16 @@
           <a:lstStyle/>
           <a:p>
             <a:pPr indent="0" lvl="0" marL="0" rtl="0" algn="l">
-              <a:spcBef>
-                <a:spcPts val="0"/>
-              </a:spcBef>
-              <a:spcAft>
-                <a:spcPts val="0"/>
-              </a:spcAft>
+              <a:lnSpc>
+                <a:spcPct val="100000"/>
+              </a:lnSpc>
+              <a:spcBef>
+                <a:spcPts val="0"/>
+              </a:spcBef>
+              <a:spcAft>
+                <a:spcPts val="0"/>
+              </a:spcAft>
+              <a:buSzPts val="1400"/>
               <a:buNone/>
             </a:pPr>
             <a:r>
@@ -2815,12 +3143,16 @@
           <a:lstStyle/>
           <a:p>
             <a:pPr indent="0" lvl="0" marL="0" rtl="0" algn="r">
-              <a:spcBef>
-                <a:spcPts val="0"/>
-              </a:spcBef>
-              <a:spcAft>
-                <a:spcPts val="0"/>
-              </a:spcAft>
+              <a:lnSpc>
+                <a:spcPct val="100000"/>
+              </a:lnSpc>
+              <a:spcBef>
+                <a:spcPts val="0"/>
+              </a:spcBef>
+              <a:spcAft>
+                <a:spcPts val="0"/>
+              </a:spcAft>
+              <a:buSzPts val="1400"/>
               <a:buNone/>
             </a:pPr>
             <a:fld id="{00000000-1234-1234-1234-123412341234}" type="slidenum">
@@ -2929,12 +3261,16 @@
           <a:lstStyle/>
           <a:p>
             <a:pPr indent="0" lvl="0" marL="0" rtl="0" algn="l">
-              <a:spcBef>
-                <a:spcPts val="0"/>
-              </a:spcBef>
-              <a:spcAft>
-                <a:spcPts val="0"/>
-              </a:spcAft>
+              <a:lnSpc>
+                <a:spcPct val="100000"/>
+              </a:lnSpc>
+              <a:spcBef>
+                <a:spcPts val="0"/>
+              </a:spcBef>
+              <a:spcAft>
+                <a:spcPts val="0"/>
+              </a:spcAft>
+              <a:buSzPts val="1400"/>
               <a:buNone/>
             </a:pPr>
             <a:r>
@@ -2972,12 +3308,16 @@
           <a:lstStyle/>
           <a:p>
             <a:pPr indent="0" lvl="0" marL="0" rtl="0" algn="r">
-              <a:spcBef>
-                <a:spcPts val="0"/>
-              </a:spcBef>
-              <a:spcAft>
-                <a:spcPts val="0"/>
-              </a:spcAft>
+              <a:lnSpc>
+                <a:spcPct val="100000"/>
+              </a:lnSpc>
+              <a:spcBef>
+                <a:spcPts val="0"/>
+              </a:spcBef>
+              <a:spcAft>
+                <a:spcPts val="0"/>
+              </a:spcAft>
+              <a:buSzPts val="1400"/>
               <a:buNone/>
             </a:pPr>
             <a:fld id="{00000000-1234-1234-1234-123412341234}" type="slidenum">
@@ -3086,12 +3426,16 @@
           <a:lstStyle/>
           <a:p>
             <a:pPr indent="0" lvl="0" marL="0" rtl="0" algn="l">
-              <a:spcBef>
-                <a:spcPts val="0"/>
-              </a:spcBef>
-              <a:spcAft>
-                <a:spcPts val="0"/>
-              </a:spcAft>
+              <a:lnSpc>
+                <a:spcPct val="100000"/>
+              </a:lnSpc>
+              <a:spcBef>
+                <a:spcPts val="0"/>
+              </a:spcBef>
+              <a:spcAft>
+                <a:spcPts val="0"/>
+              </a:spcAft>
+              <a:buSzPts val="1400"/>
               <a:buNone/>
             </a:pPr>
             <a:r>
@@ -3129,12 +3473,16 @@
           <a:lstStyle/>
           <a:p>
             <a:pPr indent="0" lvl="0" marL="0" rtl="0" algn="r">
-              <a:spcBef>
-                <a:spcPts val="0"/>
-              </a:spcBef>
-              <a:spcAft>
-                <a:spcPts val="0"/>
-              </a:spcAft>
+              <a:lnSpc>
+                <a:spcPct val="100000"/>
+              </a:lnSpc>
+              <a:spcBef>
+                <a:spcPts val="0"/>
+              </a:spcBef>
+              <a:spcAft>
+                <a:spcPts val="0"/>
+              </a:spcAft>
+              <a:buSzPts val="1400"/>
               <a:buNone/>
             </a:pPr>
             <a:fld id="{00000000-1234-1234-1234-123412341234}" type="slidenum">
@@ -3243,12 +3591,16 @@
           <a:lstStyle/>
           <a:p>
             <a:pPr indent="0" lvl="0" marL="0" rtl="0" algn="l">
-              <a:spcBef>
-                <a:spcPts val="0"/>
-              </a:spcBef>
-              <a:spcAft>
-                <a:spcPts val="0"/>
-              </a:spcAft>
+              <a:lnSpc>
+                <a:spcPct val="100000"/>
+              </a:lnSpc>
+              <a:spcBef>
+                <a:spcPts val="0"/>
+              </a:spcBef>
+              <a:spcAft>
+                <a:spcPts val="0"/>
+              </a:spcAft>
+              <a:buSzPts val="1400"/>
               <a:buNone/>
             </a:pPr>
             <a:r>
@@ -3286,12 +3638,16 @@
           <a:lstStyle/>
           <a:p>
             <a:pPr indent="0" lvl="0" marL="0" rtl="0" algn="r">
-              <a:spcBef>
-                <a:spcPts val="0"/>
-              </a:spcBef>
-              <a:spcAft>
-                <a:spcPts val="0"/>
-              </a:spcAft>
+              <a:lnSpc>
+                <a:spcPct val="100000"/>
+              </a:lnSpc>
+              <a:spcBef>
+                <a:spcPts val="0"/>
+              </a:spcBef>
+              <a:spcAft>
+                <a:spcPts val="0"/>
+              </a:spcAft>
+              <a:buSzPts val="1400"/>
               <a:buNone/>
             </a:pPr>
             <a:fld id="{00000000-1234-1234-1234-123412341234}" type="slidenum">
@@ -3400,12 +3756,16 @@
           <a:lstStyle/>
           <a:p>
             <a:pPr indent="0" lvl="0" marL="0" rtl="0" algn="l">
-              <a:spcBef>
-                <a:spcPts val="0"/>
-              </a:spcBef>
-              <a:spcAft>
-                <a:spcPts val="0"/>
-              </a:spcAft>
+              <a:lnSpc>
+                <a:spcPct val="100000"/>
+              </a:lnSpc>
+              <a:spcBef>
+                <a:spcPts val="0"/>
+              </a:spcBef>
+              <a:spcAft>
+                <a:spcPts val="0"/>
+              </a:spcAft>
+              <a:buSzPts val="1400"/>
               <a:buNone/>
             </a:pPr>
             <a:r>
@@ -3443,12 +3803,16 @@
           <a:lstStyle/>
           <a:p>
             <a:pPr indent="0" lvl="0" marL="0" rtl="0" algn="r">
-              <a:spcBef>
-                <a:spcPts val="0"/>
-              </a:spcBef>
-              <a:spcAft>
-                <a:spcPts val="0"/>
-              </a:spcAft>
+              <a:lnSpc>
+                <a:spcPct val="100000"/>
+              </a:lnSpc>
+              <a:spcBef>
+                <a:spcPts val="0"/>
+              </a:spcBef>
+              <a:spcAft>
+                <a:spcPts val="0"/>
+              </a:spcAft>
+              <a:buSzPts val="1400"/>
               <a:buNone/>
             </a:pPr>
             <a:fld id="{00000000-1234-1234-1234-123412341234}" type="slidenum">
@@ -3557,12 +3921,16 @@
           <a:lstStyle/>
           <a:p>
             <a:pPr indent="0" lvl="0" marL="0" rtl="0" algn="l">
-              <a:spcBef>
-                <a:spcPts val="0"/>
-              </a:spcBef>
-              <a:spcAft>
-                <a:spcPts val="0"/>
-              </a:spcAft>
+              <a:lnSpc>
+                <a:spcPct val="100000"/>
+              </a:lnSpc>
+              <a:spcBef>
+                <a:spcPts val="0"/>
+              </a:spcBef>
+              <a:spcAft>
+                <a:spcPts val="0"/>
+              </a:spcAft>
+              <a:buSzPts val="1400"/>
               <a:buNone/>
             </a:pPr>
             <a:r>
@@ -3600,12 +3968,16 @@
           <a:lstStyle/>
           <a:p>
             <a:pPr indent="0" lvl="0" marL="0" rtl="0" algn="r">
-              <a:spcBef>
-                <a:spcPts val="0"/>
-              </a:spcBef>
-              <a:spcAft>
-                <a:spcPts val="0"/>
-              </a:spcAft>
+              <a:lnSpc>
+                <a:spcPct val="100000"/>
+              </a:lnSpc>
+              <a:spcBef>
+                <a:spcPts val="0"/>
+              </a:spcBef>
+              <a:spcAft>
+                <a:spcPts val="0"/>
+              </a:spcAft>
+              <a:buSzPts val="1400"/>
               <a:buNone/>
             </a:pPr>
             <a:fld id="{00000000-1234-1234-1234-123412341234}" type="slidenum">
@@ -3714,12 +4086,16 @@
           <a:lstStyle/>
           <a:p>
             <a:pPr indent="0" lvl="0" marL="0" rtl="0" algn="l">
-              <a:spcBef>
-                <a:spcPts val="0"/>
-              </a:spcBef>
-              <a:spcAft>
-                <a:spcPts val="0"/>
-              </a:spcAft>
+              <a:lnSpc>
+                <a:spcPct val="100000"/>
+              </a:lnSpc>
+              <a:spcBef>
+                <a:spcPts val="0"/>
+              </a:spcBef>
+              <a:spcAft>
+                <a:spcPts val="0"/>
+              </a:spcAft>
+              <a:buSzPts val="1400"/>
               <a:buNone/>
             </a:pPr>
             <a:r>
@@ -3757,12 +4133,16 @@
           <a:lstStyle/>
           <a:p>
             <a:pPr indent="0" lvl="0" marL="0" rtl="0" algn="r">
-              <a:spcBef>
-                <a:spcPts val="0"/>
-              </a:spcBef>
-              <a:spcAft>
-                <a:spcPts val="0"/>
-              </a:spcAft>
+              <a:lnSpc>
+                <a:spcPct val="100000"/>
+              </a:lnSpc>
+              <a:spcBef>
+                <a:spcPts val="0"/>
+              </a:spcBef>
+              <a:spcAft>
+                <a:spcPts val="0"/>
+              </a:spcAft>
+              <a:buSzPts val="1400"/>
               <a:buNone/>
             </a:pPr>
             <a:fld id="{00000000-1234-1234-1234-123412341234}" type="slidenum">
@@ -4586,19 +4966,35 @@
           </a:bodyPr>
           <a:lstStyle/>
           <a:p>
-            <a:pPr indent="0" lvl="0" marL="0" rtl="0" algn="l">
-              <a:spcBef>
-                <a:spcPts val="0"/>
-              </a:spcBef>
-              <a:spcAft>
-                <a:spcPts val="0"/>
-              </a:spcAft>
+            <a:pPr indent="0" lvl="0" marL="0" marR="0" rtl="0" algn="l">
+              <a:lnSpc>
+                <a:spcPct val="100000"/>
+              </a:lnSpc>
+              <a:spcBef>
+                <a:spcPts val="0"/>
+              </a:spcBef>
+              <a:spcAft>
+                <a:spcPts val="0"/>
+              </a:spcAft>
+              <a:buClr>
+                <a:srgbClr val="000000"/>
+              </a:buClr>
+              <a:buSzPts val="1400"/>
+              <a:buFont typeface="Arial"/>
               <a:buNone/>
             </a:pPr>
             <a:r>
               <a:t/>
             </a:r>
-            <a:endParaRPr/>
+            <a:endParaRPr b="0" i="0" sz="1400" u="none" cap="none" strike="noStrike">
+              <a:solidFill>
+                <a:srgbClr val="000000"/>
+              </a:solidFill>
+              <a:latin typeface="Arial"/>
+              <a:ea typeface="Arial"/>
+              <a:cs typeface="Arial"/>
+              <a:sym typeface="Arial"/>
+            </a:endParaRPr>
           </a:p>
         </p:txBody>
       </p:sp>
@@ -4628,6 +5024,9 @@
           <a:lstStyle/>
           <a:p>
             <a:pPr indent="0" lvl="0" marL="0" marR="0" rtl="0" algn="r">
+              <a:lnSpc>
+                <a:spcPct val="100000"/>
+              </a:lnSpc>
               <a:spcBef>
                 <a:spcPts val="0"/>
               </a:spcBef>
@@ -4698,19 +5097,35 @@
           </a:bodyPr>
           <a:lstStyle/>
           <a:p>
-            <a:pPr indent="0" lvl="0" marL="0" rtl="0" algn="l">
-              <a:spcBef>
-                <a:spcPts val="0"/>
-              </a:spcBef>
-              <a:spcAft>
-                <a:spcPts val="0"/>
-              </a:spcAft>
+            <a:pPr indent="0" lvl="0" marL="0" marR="0" rtl="0" algn="l">
+              <a:lnSpc>
+                <a:spcPct val="100000"/>
+              </a:lnSpc>
+              <a:spcBef>
+                <a:spcPts val="0"/>
+              </a:spcBef>
+              <a:spcAft>
+                <a:spcPts val="0"/>
+              </a:spcAft>
+              <a:buClr>
+                <a:srgbClr val="000000"/>
+              </a:buClr>
+              <a:buSzPts val="1400"/>
+              <a:buFont typeface="Arial"/>
               <a:buNone/>
             </a:pPr>
             <a:r>
               <a:t/>
             </a:r>
-            <a:endParaRPr/>
+            <a:endParaRPr b="0" i="0" sz="1400" u="none" cap="none" strike="noStrike">
+              <a:solidFill>
+                <a:srgbClr val="000000"/>
+              </a:solidFill>
+              <a:latin typeface="Arial"/>
+              <a:ea typeface="Arial"/>
+              <a:cs typeface="Arial"/>
+              <a:sym typeface="Arial"/>
+            </a:endParaRPr>
           </a:p>
         </p:txBody>
       </p:sp>
@@ -4740,6 +5155,9 @@
           <a:lstStyle/>
           <a:p>
             <a:pPr indent="0" lvl="0" marL="0" marR="0" rtl="0" algn="l">
+              <a:lnSpc>
+                <a:spcPct val="100000"/>
+              </a:lnSpc>
               <a:spcBef>
                 <a:spcPts val="0"/>
               </a:spcBef>
@@ -4803,6 +5221,9 @@
           <a:lstStyle/>
           <a:p>
             <a:pPr indent="0" lvl="0" marL="0" marR="0" rtl="0" algn="l">
+              <a:lnSpc>
+                <a:spcPct val="100000"/>
+              </a:lnSpc>
               <a:spcBef>
                 <a:spcPts val="0"/>
               </a:spcBef>
@@ -4866,6 +5287,9 @@
           <a:lstStyle/>
           <a:p>
             <a:pPr indent="0" lvl="0" marL="0" marR="0" rtl="0" algn="l">
+              <a:lnSpc>
+                <a:spcPct val="100000"/>
+              </a:lnSpc>
               <a:spcBef>
                 <a:spcPts val="0"/>
               </a:spcBef>
@@ -4943,19 +5367,35 @@
           </a:bodyPr>
           <a:lstStyle/>
           <a:p>
-            <a:pPr indent="0" lvl="0" marL="0" rtl="0" algn="l">
-              <a:spcBef>
-                <a:spcPts val="0"/>
-              </a:spcBef>
-              <a:spcAft>
-                <a:spcPts val="0"/>
-              </a:spcAft>
+            <a:pPr indent="0" lvl="0" marL="0" marR="0" rtl="0" algn="l">
+              <a:lnSpc>
+                <a:spcPct val="100000"/>
+              </a:lnSpc>
+              <a:spcBef>
+                <a:spcPts val="0"/>
+              </a:spcBef>
+              <a:spcAft>
+                <a:spcPts val="0"/>
+              </a:spcAft>
+              <a:buClr>
+                <a:srgbClr val="000000"/>
+              </a:buClr>
+              <a:buSzPts val="1400"/>
+              <a:buFont typeface="Arial"/>
               <a:buNone/>
             </a:pPr>
             <a:r>
               <a:t/>
             </a:r>
-            <a:endParaRPr/>
+            <a:endParaRPr b="0" i="0" sz="1400" u="none" cap="none" strike="noStrike">
+              <a:solidFill>
+                <a:srgbClr val="000000"/>
+              </a:solidFill>
+              <a:latin typeface="Arial"/>
+              <a:ea typeface="Arial"/>
+              <a:cs typeface="Arial"/>
+              <a:sym typeface="Arial"/>
+            </a:endParaRPr>
           </a:p>
         </p:txBody>
       </p:sp>
@@ -4985,6 +5425,9 @@
           <a:lstStyle/>
           <a:p>
             <a:pPr indent="0" lvl="0" marL="0" marR="0" rtl="0" algn="ctr">
+              <a:lnSpc>
+                <a:spcPct val="100000"/>
+              </a:lnSpc>
               <a:spcBef>
                 <a:spcPts val="0"/>
               </a:spcBef>
@@ -5062,19 +5505,35 @@
           </a:bodyPr>
           <a:lstStyle/>
           <a:p>
-            <a:pPr indent="0" lvl="0" marL="0" rtl="0" algn="l">
-              <a:spcBef>
-                <a:spcPts val="0"/>
-              </a:spcBef>
-              <a:spcAft>
-                <a:spcPts val="0"/>
-              </a:spcAft>
+            <a:pPr indent="0" lvl="0" marL="0" marR="0" rtl="0" algn="l">
+              <a:lnSpc>
+                <a:spcPct val="100000"/>
+              </a:lnSpc>
+              <a:spcBef>
+                <a:spcPts val="0"/>
+              </a:spcBef>
+              <a:spcAft>
+                <a:spcPts val="0"/>
+              </a:spcAft>
+              <a:buClr>
+                <a:srgbClr val="000000"/>
+              </a:buClr>
+              <a:buSzPts val="1400"/>
+              <a:buFont typeface="Arial"/>
               <a:buNone/>
             </a:pPr>
             <a:r>
               <a:t/>
             </a:r>
-            <a:endParaRPr/>
+            <a:endParaRPr b="0" i="0" sz="1400" u="none" cap="none" strike="noStrike">
+              <a:solidFill>
+                <a:srgbClr val="000000"/>
+              </a:solidFill>
+              <a:latin typeface="Arial"/>
+              <a:ea typeface="Arial"/>
+              <a:cs typeface="Arial"/>
+              <a:sym typeface="Arial"/>
+            </a:endParaRPr>
           </a:p>
         </p:txBody>
       </p:sp>
@@ -5104,6 +5563,9 @@
           <a:lstStyle/>
           <a:p>
             <a:pPr indent="0" lvl="0" marL="0" marR="0" rtl="0" algn="ctr">
+              <a:lnSpc>
+                <a:spcPct val="100000"/>
+              </a:lnSpc>
               <a:spcBef>
                 <a:spcPts val="0"/>
               </a:spcBef>
@@ -5181,19 +5643,35 @@
           </a:bodyPr>
           <a:lstStyle/>
           <a:p>
-            <a:pPr indent="0" lvl="0" marL="0" rtl="0" algn="l">
-              <a:spcBef>
-                <a:spcPts val="0"/>
-              </a:spcBef>
-              <a:spcAft>
-                <a:spcPts val="0"/>
-              </a:spcAft>
+            <a:pPr indent="0" lvl="0" marL="0" marR="0" rtl="0" algn="l">
+              <a:lnSpc>
+                <a:spcPct val="100000"/>
+              </a:lnSpc>
+              <a:spcBef>
+                <a:spcPts val="0"/>
+              </a:spcBef>
+              <a:spcAft>
+                <a:spcPts val="0"/>
+              </a:spcAft>
+              <a:buClr>
+                <a:srgbClr val="000000"/>
+              </a:buClr>
+              <a:buSzPts val="1400"/>
+              <a:buFont typeface="Arial"/>
               <a:buNone/>
             </a:pPr>
             <a:r>
               <a:t/>
             </a:r>
-            <a:endParaRPr/>
+            <a:endParaRPr b="0" i="0" sz="1400" u="none" cap="none" strike="noStrike">
+              <a:solidFill>
+                <a:srgbClr val="000000"/>
+              </a:solidFill>
+              <a:latin typeface="Arial"/>
+              <a:ea typeface="Arial"/>
+              <a:cs typeface="Arial"/>
+              <a:sym typeface="Arial"/>
+            </a:endParaRPr>
           </a:p>
         </p:txBody>
       </p:sp>
@@ -5223,6 +5701,9 @@
           <a:lstStyle/>
           <a:p>
             <a:pPr indent="0" lvl="0" marL="0" marR="0" rtl="0" algn="ctr">
+              <a:lnSpc>
+                <a:spcPct val="100000"/>
+              </a:lnSpc>
               <a:spcBef>
                 <a:spcPts val="0"/>
               </a:spcBef>
@@ -5293,19 +5774,35 @@
           </a:bodyPr>
           <a:lstStyle/>
           <a:p>
-            <a:pPr indent="0" lvl="0" marL="0" rtl="0" algn="l">
-              <a:spcBef>
-                <a:spcPts val="0"/>
-              </a:spcBef>
-              <a:spcAft>
-                <a:spcPts val="0"/>
-              </a:spcAft>
+            <a:pPr indent="0" lvl="0" marL="0" marR="0" rtl="0" algn="l">
+              <a:lnSpc>
+                <a:spcPct val="100000"/>
+              </a:lnSpc>
+              <a:spcBef>
+                <a:spcPts val="0"/>
+              </a:spcBef>
+              <a:spcAft>
+                <a:spcPts val="0"/>
+              </a:spcAft>
+              <a:buClr>
+                <a:srgbClr val="000000"/>
+              </a:buClr>
+              <a:buSzPts val="1400"/>
+              <a:buFont typeface="Arial"/>
               <a:buNone/>
             </a:pPr>
             <a:r>
               <a:t/>
             </a:r>
-            <a:endParaRPr/>
+            <a:endParaRPr b="0" i="0" sz="1400" u="none" cap="none" strike="noStrike">
+              <a:solidFill>
+                <a:srgbClr val="000000"/>
+              </a:solidFill>
+              <a:latin typeface="Arial"/>
+              <a:ea typeface="Arial"/>
+              <a:cs typeface="Arial"/>
+              <a:sym typeface="Arial"/>
+            </a:endParaRPr>
           </a:p>
         </p:txBody>
       </p:sp>
@@ -5335,6 +5832,9 @@
           <a:lstStyle/>
           <a:p>
             <a:pPr indent="0" lvl="0" marL="0" marR="0" rtl="0" algn="l">
+              <a:lnSpc>
+                <a:spcPct val="100000"/>
+              </a:lnSpc>
               <a:spcBef>
                 <a:spcPts val="0"/>
               </a:spcBef>
@@ -5358,31 +5858,7 @@
                 <a:cs typeface="Calibri"/>
                 <a:sym typeface="Calibri"/>
               </a:rPr>
-              <a:t>Prepared by  Karun K</a:t>
-            </a:r>
-            <a:r>
-              <a:rPr lang="en-US" sz="1000">
-                <a:solidFill>
-                  <a:srgbClr val="94A3B8"/>
-                </a:solidFill>
-                <a:latin typeface="Calibri"/>
-                <a:ea typeface="Calibri"/>
-                <a:cs typeface="Calibri"/>
-                <a:sym typeface="Calibri"/>
-              </a:rPr>
-              <a:t>rishnan</a:t>
-            </a:r>
-            <a:r>
-              <a:rPr b="0" i="0" lang="en-US" sz="1000" u="none" cap="none" strike="noStrike">
-                <a:solidFill>
-                  <a:srgbClr val="94A3B8"/>
-                </a:solidFill>
-                <a:latin typeface="Calibri"/>
-                <a:ea typeface="Calibri"/>
-                <a:cs typeface="Calibri"/>
-                <a:sym typeface="Calibri"/>
-              </a:rPr>
-              <a:t>  |   Student Support – Business Intelligence Team Interview   |   Olist Brazilian E-Commerce Dataset</a:t>
+              <a:t>Prepared by  Karun Krishnan  |   Student Support – Business Intelligence Team Interview   |   Olist Brazilian E-Commerce Dataset</a:t>
             </a:r>
             <a:endParaRPr b="0" i="0" sz="1000" u="none" cap="none" strike="noStrike">
               <a:solidFill>
@@ -5461,19 +5937,35 @@
           </a:bodyPr>
           <a:lstStyle/>
           <a:p>
-            <a:pPr indent="0" lvl="0" marL="0" rtl="0" algn="l">
-              <a:spcBef>
-                <a:spcPts val="0"/>
-              </a:spcBef>
-              <a:spcAft>
-                <a:spcPts val="0"/>
-              </a:spcAft>
+            <a:pPr indent="0" lvl="0" marL="0" marR="0" rtl="0" algn="l">
+              <a:lnSpc>
+                <a:spcPct val="100000"/>
+              </a:lnSpc>
+              <a:spcBef>
+                <a:spcPts val="0"/>
+              </a:spcBef>
+              <a:spcAft>
+                <a:spcPts val="0"/>
+              </a:spcAft>
+              <a:buClr>
+                <a:srgbClr val="000000"/>
+              </a:buClr>
+              <a:buSzPts val="1400"/>
+              <a:buFont typeface="Arial"/>
               <a:buNone/>
             </a:pPr>
             <a:r>
               <a:t/>
             </a:r>
-            <a:endParaRPr/>
+            <a:endParaRPr b="0" i="0" sz="1400" u="none" cap="none" strike="noStrike">
+              <a:solidFill>
+                <a:srgbClr val="000000"/>
+              </a:solidFill>
+              <a:latin typeface="Arial"/>
+              <a:ea typeface="Arial"/>
+              <a:cs typeface="Arial"/>
+              <a:sym typeface="Arial"/>
+            </a:endParaRPr>
           </a:p>
         </p:txBody>
       </p:sp>
@@ -5503,6 +5995,9 @@
           <a:lstStyle/>
           <a:p>
             <a:pPr indent="0" lvl="0" marL="0" marR="0" rtl="0" algn="l">
+              <a:lnSpc>
+                <a:spcPct val="100000"/>
+              </a:lnSpc>
               <a:spcBef>
                 <a:spcPts val="0"/>
               </a:spcBef>
@@ -5566,6 +6061,9 @@
           <a:lstStyle/>
           <a:p>
             <a:pPr indent="0" lvl="0" marL="0" marR="0" rtl="0" algn="l">
+              <a:lnSpc>
+                <a:spcPct val="100000"/>
+              </a:lnSpc>
               <a:spcBef>
                 <a:spcPts val="0"/>
               </a:spcBef>
@@ -5629,6 +6127,9 @@
           <a:lstStyle/>
           <a:p>
             <a:pPr indent="0" lvl="0" marL="0" marR="0" rtl="0" algn="l">
+              <a:lnSpc>
+                <a:spcPct val="100000"/>
+              </a:lnSpc>
               <a:spcBef>
                 <a:spcPts val="0"/>
               </a:spcBef>
@@ -5733,19 +6234,35 @@
           </a:bodyPr>
           <a:lstStyle/>
           <a:p>
-            <a:pPr indent="0" lvl="0" marL="0" rtl="0" algn="l">
-              <a:spcBef>
-                <a:spcPts val="0"/>
-              </a:spcBef>
-              <a:spcAft>
-                <a:spcPts val="0"/>
-              </a:spcAft>
+            <a:pPr indent="0" lvl="0" marL="0" marR="0" rtl="0" algn="l">
+              <a:lnSpc>
+                <a:spcPct val="100000"/>
+              </a:lnSpc>
+              <a:spcBef>
+                <a:spcPts val="0"/>
+              </a:spcBef>
+              <a:spcAft>
+                <a:spcPts val="0"/>
+              </a:spcAft>
+              <a:buClr>
+                <a:srgbClr val="000000"/>
+              </a:buClr>
+              <a:buSzPts val="1400"/>
+              <a:buFont typeface="Arial"/>
               <a:buNone/>
             </a:pPr>
             <a:r>
               <a:t/>
             </a:r>
-            <a:endParaRPr/>
+            <a:endParaRPr b="0" i="0" sz="1400" u="none" cap="none" strike="noStrike">
+              <a:solidFill>
+                <a:srgbClr val="000000"/>
+              </a:solidFill>
+              <a:latin typeface="Arial"/>
+              <a:ea typeface="Arial"/>
+              <a:cs typeface="Arial"/>
+              <a:sym typeface="Arial"/>
+            </a:endParaRPr>
           </a:p>
         </p:txBody>
       </p:sp>
@@ -5802,6 +6319,9 @@
           <a:lstStyle/>
           <a:p>
             <a:pPr indent="0" lvl="0" marL="0" marR="0" rtl="0" algn="l">
+              <a:lnSpc>
+                <a:spcPct val="100000"/>
+              </a:lnSpc>
               <a:spcBef>
                 <a:spcPts val="0"/>
               </a:spcBef>
@@ -5865,6 +6385,9 @@
           <a:lstStyle/>
           <a:p>
             <a:pPr indent="0" lvl="0" marL="0" marR="0" rtl="0" algn="l">
+              <a:lnSpc>
+                <a:spcPct val="100000"/>
+              </a:lnSpc>
               <a:spcBef>
                 <a:spcPts val="0"/>
               </a:spcBef>
@@ -5942,19 +6465,35 @@
           </a:bodyPr>
           <a:lstStyle/>
           <a:p>
-            <a:pPr indent="0" lvl="0" marL="0" rtl="0" algn="l">
-              <a:spcBef>
-                <a:spcPts val="0"/>
-              </a:spcBef>
-              <a:spcAft>
-                <a:spcPts val="0"/>
-              </a:spcAft>
+            <a:pPr indent="0" lvl="0" marL="0" marR="0" rtl="0" algn="l">
+              <a:lnSpc>
+                <a:spcPct val="100000"/>
+              </a:lnSpc>
+              <a:spcBef>
+                <a:spcPts val="0"/>
+              </a:spcBef>
+              <a:spcAft>
+                <a:spcPts val="0"/>
+              </a:spcAft>
+              <a:buClr>
+                <a:srgbClr val="000000"/>
+              </a:buClr>
+              <a:buSzPts val="1400"/>
+              <a:buFont typeface="Arial"/>
               <a:buNone/>
             </a:pPr>
             <a:r>
               <a:t/>
             </a:r>
-            <a:endParaRPr/>
+            <a:endParaRPr b="0" i="0" sz="1400" u="none" cap="none" strike="noStrike">
+              <a:solidFill>
+                <a:srgbClr val="000000"/>
+              </a:solidFill>
+              <a:latin typeface="Arial"/>
+              <a:ea typeface="Arial"/>
+              <a:cs typeface="Arial"/>
+              <a:sym typeface="Arial"/>
+            </a:endParaRPr>
           </a:p>
         </p:txBody>
       </p:sp>
@@ -6011,6 +6550,9 @@
           <a:lstStyle/>
           <a:p>
             <a:pPr indent="0" lvl="0" marL="0" marR="0" rtl="0" algn="l">
+              <a:lnSpc>
+                <a:spcPct val="100000"/>
+              </a:lnSpc>
               <a:spcBef>
                 <a:spcPts val="0"/>
               </a:spcBef>
@@ -6074,6 +6616,9 @@
           <a:lstStyle/>
           <a:p>
             <a:pPr indent="0" lvl="0" marL="0" marR="0" rtl="0" algn="l">
+              <a:lnSpc>
+                <a:spcPct val="100000"/>
+              </a:lnSpc>
               <a:spcBef>
                 <a:spcPts val="0"/>
               </a:spcBef>
@@ -6151,19 +6696,35 @@
           </a:bodyPr>
           <a:lstStyle/>
           <a:p>
-            <a:pPr indent="0" lvl="0" marL="0" rtl="0" algn="l">
-              <a:spcBef>
-                <a:spcPts val="0"/>
-              </a:spcBef>
-              <a:spcAft>
-                <a:spcPts val="0"/>
-              </a:spcAft>
+            <a:pPr indent="0" lvl="0" marL="0" marR="0" rtl="0" algn="l">
+              <a:lnSpc>
+                <a:spcPct val="100000"/>
+              </a:lnSpc>
+              <a:spcBef>
+                <a:spcPts val="0"/>
+              </a:spcBef>
+              <a:spcAft>
+                <a:spcPts val="0"/>
+              </a:spcAft>
+              <a:buClr>
+                <a:srgbClr val="000000"/>
+              </a:buClr>
+              <a:buSzPts val="1400"/>
+              <a:buFont typeface="Arial"/>
               <a:buNone/>
             </a:pPr>
             <a:r>
               <a:t/>
             </a:r>
-            <a:endParaRPr/>
+            <a:endParaRPr b="0" i="0" sz="1400" u="none" cap="none" strike="noStrike">
+              <a:solidFill>
+                <a:srgbClr val="000000"/>
+              </a:solidFill>
+              <a:latin typeface="Arial"/>
+              <a:ea typeface="Arial"/>
+              <a:cs typeface="Arial"/>
+              <a:sym typeface="Arial"/>
+            </a:endParaRPr>
           </a:p>
         </p:txBody>
       </p:sp>
@@ -6220,6 +6781,9 @@
           <a:lstStyle/>
           <a:p>
             <a:pPr indent="0" lvl="0" marL="0" marR="0" rtl="0" algn="l">
+              <a:lnSpc>
+                <a:spcPct val="100000"/>
+              </a:lnSpc>
               <a:spcBef>
                 <a:spcPts val="0"/>
               </a:spcBef>
@@ -6283,6 +6847,9 @@
           <a:lstStyle/>
           <a:p>
             <a:pPr indent="0" lvl="0" marL="0" marR="0" rtl="0" algn="l">
+              <a:lnSpc>
+                <a:spcPct val="100000"/>
+              </a:lnSpc>
               <a:spcBef>
                 <a:spcPts val="0"/>
               </a:spcBef>
@@ -6360,19 +6927,35 @@
           </a:bodyPr>
           <a:lstStyle/>
           <a:p>
-            <a:pPr indent="0" lvl="0" marL="0" rtl="0" algn="l">
-              <a:spcBef>
-                <a:spcPts val="0"/>
-              </a:spcBef>
-              <a:spcAft>
-                <a:spcPts val="0"/>
-              </a:spcAft>
+            <a:pPr indent="0" lvl="0" marL="0" marR="0" rtl="0" algn="l">
+              <a:lnSpc>
+                <a:spcPct val="100000"/>
+              </a:lnSpc>
+              <a:spcBef>
+                <a:spcPts val="0"/>
+              </a:spcBef>
+              <a:spcAft>
+                <a:spcPts val="0"/>
+              </a:spcAft>
+              <a:buClr>
+                <a:srgbClr val="000000"/>
+              </a:buClr>
+              <a:buSzPts val="1400"/>
+              <a:buFont typeface="Arial"/>
               <a:buNone/>
             </a:pPr>
             <a:r>
               <a:t/>
             </a:r>
-            <a:endParaRPr/>
+            <a:endParaRPr b="0" i="0" sz="1400" u="none" cap="none" strike="noStrike">
+              <a:solidFill>
+                <a:srgbClr val="000000"/>
+              </a:solidFill>
+              <a:latin typeface="Arial"/>
+              <a:ea typeface="Arial"/>
+              <a:cs typeface="Arial"/>
+              <a:sym typeface="Arial"/>
+            </a:endParaRPr>
           </a:p>
         </p:txBody>
       </p:sp>
@@ -6402,6 +6985,9 @@
           <a:lstStyle/>
           <a:p>
             <a:pPr indent="0" lvl="0" marL="0" marR="0" rtl="0" algn="l">
+              <a:lnSpc>
+                <a:spcPct val="100000"/>
+              </a:lnSpc>
               <a:spcBef>
                 <a:spcPts val="0"/>
               </a:spcBef>
@@ -6465,6 +7051,9 @@
           <a:lstStyle/>
           <a:p>
             <a:pPr indent="0" lvl="0" marL="0" marR="0" rtl="0" algn="l">
+              <a:lnSpc>
+                <a:spcPct val="100000"/>
+              </a:lnSpc>
               <a:spcBef>
                 <a:spcPts val="0"/>
               </a:spcBef>
@@ -6567,19 +7156,35 @@
           </a:bodyPr>
           <a:lstStyle/>
           <a:p>
-            <a:pPr indent="0" lvl="0" marL="0" rtl="0" algn="l">
-              <a:spcBef>
-                <a:spcPts val="0"/>
-              </a:spcBef>
-              <a:spcAft>
-                <a:spcPts val="0"/>
-              </a:spcAft>
+            <a:pPr indent="0" lvl="0" marL="0" marR="0" rtl="0" algn="l">
+              <a:lnSpc>
+                <a:spcPct val="100000"/>
+              </a:lnSpc>
+              <a:spcBef>
+                <a:spcPts val="0"/>
+              </a:spcBef>
+              <a:spcAft>
+                <a:spcPts val="0"/>
+              </a:spcAft>
+              <a:buClr>
+                <a:srgbClr val="000000"/>
+              </a:buClr>
+              <a:buSzPts val="1400"/>
+              <a:buFont typeface="Arial"/>
               <a:buNone/>
             </a:pPr>
             <a:r>
               <a:t/>
             </a:r>
-            <a:endParaRPr/>
+            <a:endParaRPr b="0" i="0" sz="1400" u="none" cap="none" strike="noStrike">
+              <a:solidFill>
+                <a:srgbClr val="000000"/>
+              </a:solidFill>
+              <a:latin typeface="Arial"/>
+              <a:ea typeface="Arial"/>
+              <a:cs typeface="Arial"/>
+              <a:sym typeface="Arial"/>
+            </a:endParaRPr>
           </a:p>
         </p:txBody>
       </p:sp>
@@ -6609,6 +7214,9 @@
           <a:lstStyle/>
           <a:p>
             <a:pPr indent="0" lvl="0" marL="0" marR="0" rtl="0" algn="l">
+              <a:lnSpc>
+                <a:spcPct val="100000"/>
+              </a:lnSpc>
               <a:spcBef>
                 <a:spcPts val="0"/>
               </a:spcBef>
@@ -6672,6 +7280,9 @@
           <a:lstStyle/>
           <a:p>
             <a:pPr indent="0" lvl="0" marL="0" marR="0" rtl="0" algn="l">
+              <a:lnSpc>
+                <a:spcPct val="100000"/>
+              </a:lnSpc>
               <a:spcBef>
                 <a:spcPts val="0"/>
               </a:spcBef>
@@ -6735,6 +7346,9 @@
           <a:lstStyle/>
           <a:p>
             <a:pPr indent="0" lvl="0" marL="0" marR="0" rtl="0" algn="l">
+              <a:lnSpc>
+                <a:spcPct val="100000"/>
+              </a:lnSpc>
               <a:spcBef>
                 <a:spcPts val="0"/>
               </a:spcBef>
@@ -6839,19 +7453,35 @@
           </a:bodyPr>
           <a:lstStyle/>
           <a:p>
-            <a:pPr indent="0" lvl="0" marL="0" rtl="0" algn="l">
-              <a:spcBef>
-                <a:spcPts val="0"/>
-              </a:spcBef>
-              <a:spcAft>
-                <a:spcPts val="0"/>
-              </a:spcAft>
+            <a:pPr indent="0" lvl="0" marL="0" marR="0" rtl="0" algn="l">
+              <a:lnSpc>
+                <a:spcPct val="100000"/>
+              </a:lnSpc>
+              <a:spcBef>
+                <a:spcPts val="0"/>
+              </a:spcBef>
+              <a:spcAft>
+                <a:spcPts val="0"/>
+              </a:spcAft>
+              <a:buClr>
+                <a:srgbClr val="000000"/>
+              </a:buClr>
+              <a:buSzPts val="1400"/>
+              <a:buFont typeface="Arial"/>
               <a:buNone/>
             </a:pPr>
             <a:r>
               <a:t/>
             </a:r>
-            <a:endParaRPr/>
+            <a:endParaRPr b="0" i="0" sz="1400" u="none" cap="none" strike="noStrike">
+              <a:solidFill>
+                <a:srgbClr val="000000"/>
+              </a:solidFill>
+              <a:latin typeface="Arial"/>
+              <a:ea typeface="Arial"/>
+              <a:cs typeface="Arial"/>
+              <a:sym typeface="Arial"/>
+            </a:endParaRPr>
           </a:p>
         </p:txBody>
       </p:sp>
@@ -6881,6 +7511,9 @@
           <a:lstStyle/>
           <a:p>
             <a:pPr indent="0" lvl="0" marL="0" marR="0" rtl="0" algn="l">
+              <a:lnSpc>
+                <a:spcPct val="100000"/>
+              </a:lnSpc>
               <a:spcBef>
                 <a:spcPts val="0"/>
               </a:spcBef>
@@ -6944,6 +7577,9 @@
           <a:lstStyle/>
           <a:p>
             <a:pPr indent="0" lvl="0" marL="0" marR="0" rtl="0" algn="l">
+              <a:lnSpc>
+                <a:spcPct val="100000"/>
+              </a:lnSpc>
               <a:spcBef>
                 <a:spcPts val="0"/>
               </a:spcBef>
@@ -6981,6 +7617,9 @@
           </a:p>
           <a:p>
             <a:pPr indent="0" lvl="0" marL="0" marR="0" rtl="0" algn="l">
+              <a:lnSpc>
+                <a:spcPct val="100000"/>
+              </a:lnSpc>
               <a:spcBef>
                 <a:spcPts val="0"/>
               </a:spcBef>
@@ -7009,6 +7648,9 @@
           </a:p>
           <a:p>
             <a:pPr indent="0" lvl="0" marL="0" marR="0" rtl="0" algn="l">
+              <a:lnSpc>
+                <a:spcPct val="100000"/>
+              </a:lnSpc>
               <a:spcBef>
                 <a:spcPts val="0"/>
               </a:spcBef>
@@ -7046,6 +7688,9 @@
           </a:p>
           <a:p>
             <a:pPr indent="0" lvl="0" marL="0" marR="0" rtl="0" algn="l">
+              <a:lnSpc>
+                <a:spcPct val="100000"/>
+              </a:lnSpc>
               <a:spcBef>
                 <a:spcPts val="0"/>
               </a:spcBef>
@@ -7074,6 +7719,9 @@
           </a:p>
           <a:p>
             <a:pPr indent="0" lvl="0" marL="0" marR="0" rtl="0" algn="l">
+              <a:lnSpc>
+                <a:spcPct val="100000"/>
+              </a:lnSpc>
               <a:spcBef>
                 <a:spcPts val="0"/>
               </a:spcBef>
@@ -7111,6 +7759,9 @@
           </a:p>
           <a:p>
             <a:pPr indent="0" lvl="0" marL="0" marR="0" rtl="0" algn="l">
+              <a:lnSpc>
+                <a:spcPct val="100000"/>
+              </a:lnSpc>
               <a:spcBef>
                 <a:spcPts val="0"/>
               </a:spcBef>
@@ -7148,6 +7799,9 @@
           </a:p>
           <a:p>
             <a:pPr indent="0" lvl="0" marL="0" marR="0" rtl="0" algn="l">
+              <a:lnSpc>
+                <a:spcPct val="100000"/>
+              </a:lnSpc>
               <a:spcBef>
                 <a:spcPts val="0"/>
               </a:spcBef>
@@ -7185,6 +7839,9 @@
           </a:p>
           <a:p>
             <a:pPr indent="0" lvl="0" marL="0" marR="0" rtl="0" algn="l">
+              <a:lnSpc>
+                <a:spcPct val="100000"/>
+              </a:lnSpc>
               <a:spcBef>
                 <a:spcPts val="0"/>
               </a:spcBef>
@@ -7222,6 +7879,9 @@
           </a:p>
           <a:p>
             <a:pPr indent="0" lvl="0" marL="0" marR="0" rtl="0" algn="l">
+              <a:lnSpc>
+                <a:spcPct val="100000"/>
+              </a:lnSpc>
               <a:spcBef>
                 <a:spcPts val="0"/>
               </a:spcBef>
@@ -7324,19 +7984,35 @@
           </a:bodyPr>
           <a:lstStyle/>
           <a:p>
-            <a:pPr indent="0" lvl="0" marL="0" rtl="0" algn="l">
-              <a:spcBef>
-                <a:spcPts val="0"/>
-              </a:spcBef>
-              <a:spcAft>
-                <a:spcPts val="0"/>
-              </a:spcAft>
+            <a:pPr indent="0" lvl="0" marL="0" marR="0" rtl="0" algn="l">
+              <a:lnSpc>
+                <a:spcPct val="100000"/>
+              </a:lnSpc>
+              <a:spcBef>
+                <a:spcPts val="0"/>
+              </a:spcBef>
+              <a:spcAft>
+                <a:spcPts val="0"/>
+              </a:spcAft>
+              <a:buClr>
+                <a:srgbClr val="000000"/>
+              </a:buClr>
+              <a:buSzPts val="1400"/>
+              <a:buFont typeface="Arial"/>
               <a:buNone/>
             </a:pPr>
             <a:r>
               <a:t/>
             </a:r>
-            <a:endParaRPr/>
+            <a:endParaRPr b="0" i="0" sz="1400" u="none" cap="none" strike="noStrike">
+              <a:solidFill>
+                <a:srgbClr val="000000"/>
+              </a:solidFill>
+              <a:latin typeface="Arial"/>
+              <a:ea typeface="Arial"/>
+              <a:cs typeface="Arial"/>
+              <a:sym typeface="Arial"/>
+            </a:endParaRPr>
           </a:p>
         </p:txBody>
       </p:sp>
@@ -7366,6 +8042,9 @@
           <a:lstStyle/>
           <a:p>
             <a:pPr indent="0" lvl="0" marL="0" marR="0" rtl="0" algn="l">
+              <a:lnSpc>
+                <a:spcPct val="100000"/>
+              </a:lnSpc>
               <a:spcBef>
                 <a:spcPts val="0"/>
               </a:spcBef>
@@ -7429,6 +8108,9 @@
           <a:lstStyle/>
           <a:p>
             <a:pPr indent="0" lvl="0" marL="0" marR="0" rtl="0" algn="l">
+              <a:lnSpc>
+                <a:spcPct val="100000"/>
+              </a:lnSpc>
               <a:spcBef>
                 <a:spcPts val="0"/>
               </a:spcBef>
@@ -7506,19 +8188,35 @@
           </a:bodyPr>
           <a:lstStyle/>
           <a:p>
-            <a:pPr indent="0" lvl="0" marL="0" rtl="0" algn="l">
-              <a:spcBef>
-                <a:spcPts val="0"/>
-              </a:spcBef>
-              <a:spcAft>
-                <a:spcPts val="0"/>
-              </a:spcAft>
+            <a:pPr indent="0" lvl="0" marL="0" marR="0" rtl="0" algn="l">
+              <a:lnSpc>
+                <a:spcPct val="100000"/>
+              </a:lnSpc>
+              <a:spcBef>
+                <a:spcPts val="0"/>
+              </a:spcBef>
+              <a:spcAft>
+                <a:spcPts val="0"/>
+              </a:spcAft>
+              <a:buClr>
+                <a:srgbClr val="000000"/>
+              </a:buClr>
+              <a:buSzPts val="1400"/>
+              <a:buFont typeface="Arial"/>
               <a:buNone/>
             </a:pPr>
             <a:r>
               <a:t/>
             </a:r>
-            <a:endParaRPr/>
+            <a:endParaRPr b="0" i="0" sz="1400" u="none" cap="none" strike="noStrike">
+              <a:solidFill>
+                <a:srgbClr val="000000"/>
+              </a:solidFill>
+              <a:latin typeface="Arial"/>
+              <a:ea typeface="Arial"/>
+              <a:cs typeface="Arial"/>
+              <a:sym typeface="Arial"/>
+            </a:endParaRPr>
           </a:p>
         </p:txBody>
       </p:sp>
@@ -7555,19 +8253,35 @@
           </a:bodyPr>
           <a:lstStyle/>
           <a:p>
-            <a:pPr indent="0" lvl="0" marL="0" rtl="0" algn="l">
-              <a:spcBef>
-                <a:spcPts val="0"/>
-              </a:spcBef>
-              <a:spcAft>
-                <a:spcPts val="0"/>
-              </a:spcAft>
+            <a:pPr indent="0" lvl="0" marL="0" marR="0" rtl="0" algn="l">
+              <a:lnSpc>
+                <a:spcPct val="100000"/>
+              </a:lnSpc>
+              <a:spcBef>
+                <a:spcPts val="0"/>
+              </a:spcBef>
+              <a:spcAft>
+                <a:spcPts val="0"/>
+              </a:spcAft>
+              <a:buClr>
+                <a:srgbClr val="000000"/>
+              </a:buClr>
+              <a:buSzPts val="1400"/>
+              <a:buFont typeface="Arial"/>
               <a:buNone/>
             </a:pPr>
             <a:r>
               <a:t/>
             </a:r>
-            <a:endParaRPr/>
+            <a:endParaRPr b="0" i="0" sz="1400" u="none" cap="none" strike="noStrike">
+              <a:solidFill>
+                <a:srgbClr val="000000"/>
+              </a:solidFill>
+              <a:latin typeface="Arial"/>
+              <a:ea typeface="Arial"/>
+              <a:cs typeface="Arial"/>
+              <a:sym typeface="Arial"/>
+            </a:endParaRPr>
           </a:p>
         </p:txBody>
       </p:sp>
@@ -7597,6 +8311,9 @@
           <a:lstStyle/>
           <a:p>
             <a:pPr indent="0" lvl="0" marL="0" marR="0" rtl="0" algn="l">
+              <a:lnSpc>
+                <a:spcPct val="100000"/>
+              </a:lnSpc>
               <a:spcBef>
                 <a:spcPts val="0"/>
               </a:spcBef>
@@ -7660,6 +8377,9 @@
           <a:lstStyle/>
           <a:p>
             <a:pPr indent="0" lvl="0" marL="0" marR="0" rtl="0" algn="l">
+              <a:lnSpc>
+                <a:spcPct val="100000"/>
+              </a:lnSpc>
               <a:spcBef>
                 <a:spcPts val="0"/>
               </a:spcBef>
@@ -7737,19 +8457,35 @@
           </a:bodyPr>
           <a:lstStyle/>
           <a:p>
-            <a:pPr indent="0" lvl="0" marL="0" rtl="0" algn="l">
-              <a:spcBef>
-                <a:spcPts val="0"/>
-              </a:spcBef>
-              <a:spcAft>
-                <a:spcPts val="0"/>
-              </a:spcAft>
+            <a:pPr indent="0" lvl="0" marL="0" marR="0" rtl="0" algn="l">
+              <a:lnSpc>
+                <a:spcPct val="100000"/>
+              </a:lnSpc>
+              <a:spcBef>
+                <a:spcPts val="0"/>
+              </a:spcBef>
+              <a:spcAft>
+                <a:spcPts val="0"/>
+              </a:spcAft>
+              <a:buClr>
+                <a:srgbClr val="000000"/>
+              </a:buClr>
+              <a:buSzPts val="1400"/>
+              <a:buFont typeface="Arial"/>
               <a:buNone/>
             </a:pPr>
             <a:r>
               <a:t/>
             </a:r>
-            <a:endParaRPr/>
+            <a:endParaRPr b="0" i="0" sz="1400" u="none" cap="none" strike="noStrike">
+              <a:solidFill>
+                <a:srgbClr val="000000"/>
+              </a:solidFill>
+              <a:latin typeface="Arial"/>
+              <a:ea typeface="Arial"/>
+              <a:cs typeface="Arial"/>
+              <a:sym typeface="Arial"/>
+            </a:endParaRPr>
           </a:p>
         </p:txBody>
       </p:sp>
@@ -7786,19 +8522,35 @@
           </a:bodyPr>
           <a:lstStyle/>
           <a:p>
-            <a:pPr indent="0" lvl="0" marL="0" rtl="0" algn="l">
-              <a:spcBef>
-                <a:spcPts val="0"/>
-              </a:spcBef>
-              <a:spcAft>
-                <a:spcPts val="0"/>
-              </a:spcAft>
+            <a:pPr indent="0" lvl="0" marL="0" marR="0" rtl="0" algn="l">
+              <a:lnSpc>
+                <a:spcPct val="100000"/>
+              </a:lnSpc>
+              <a:spcBef>
+                <a:spcPts val="0"/>
+              </a:spcBef>
+              <a:spcAft>
+                <a:spcPts val="0"/>
+              </a:spcAft>
+              <a:buClr>
+                <a:srgbClr val="000000"/>
+              </a:buClr>
+              <a:buSzPts val="1400"/>
+              <a:buFont typeface="Arial"/>
               <a:buNone/>
             </a:pPr>
             <a:r>
               <a:t/>
             </a:r>
-            <a:endParaRPr/>
+            <a:endParaRPr b="0" i="0" sz="1400" u="none" cap="none" strike="noStrike">
+              <a:solidFill>
+                <a:srgbClr val="000000"/>
+              </a:solidFill>
+              <a:latin typeface="Arial"/>
+              <a:ea typeface="Arial"/>
+              <a:cs typeface="Arial"/>
+              <a:sym typeface="Arial"/>
+            </a:endParaRPr>
           </a:p>
         </p:txBody>
       </p:sp>
@@ -7828,6 +8580,9 @@
           <a:lstStyle/>
           <a:p>
             <a:pPr indent="0" lvl="0" marL="0" marR="0" rtl="0" algn="l">
+              <a:lnSpc>
+                <a:spcPct val="100000"/>
+              </a:lnSpc>
               <a:spcBef>
                 <a:spcPts val="0"/>
               </a:spcBef>
@@ -7891,6 +8646,9 @@
           <a:lstStyle/>
           <a:p>
             <a:pPr indent="0" lvl="0" marL="0" marR="0" rtl="0" algn="l">
+              <a:lnSpc>
+                <a:spcPct val="100000"/>
+              </a:lnSpc>
               <a:spcBef>
                 <a:spcPts val="0"/>
               </a:spcBef>
@@ -7968,19 +8726,35 @@
           </a:bodyPr>
           <a:lstStyle/>
           <a:p>
-            <a:pPr indent="0" lvl="0" marL="0" rtl="0" algn="l">
-              <a:spcBef>
-                <a:spcPts val="0"/>
-              </a:spcBef>
-              <a:spcAft>
-                <a:spcPts val="0"/>
-              </a:spcAft>
+            <a:pPr indent="0" lvl="0" marL="0" marR="0" rtl="0" algn="l">
+              <a:lnSpc>
+                <a:spcPct val="100000"/>
+              </a:lnSpc>
+              <a:spcBef>
+                <a:spcPts val="0"/>
+              </a:spcBef>
+              <a:spcAft>
+                <a:spcPts val="0"/>
+              </a:spcAft>
+              <a:buClr>
+                <a:srgbClr val="000000"/>
+              </a:buClr>
+              <a:buSzPts val="1400"/>
+              <a:buFont typeface="Arial"/>
               <a:buNone/>
             </a:pPr>
             <a:r>
               <a:t/>
             </a:r>
-            <a:endParaRPr/>
+            <a:endParaRPr b="0" i="0" sz="1400" u="none" cap="none" strike="noStrike">
+              <a:solidFill>
+                <a:srgbClr val="000000"/>
+              </a:solidFill>
+              <a:latin typeface="Arial"/>
+              <a:ea typeface="Arial"/>
+              <a:cs typeface="Arial"/>
+              <a:sym typeface="Arial"/>
+            </a:endParaRPr>
           </a:p>
         </p:txBody>
       </p:sp>
@@ -8017,19 +8791,35 @@
           </a:bodyPr>
           <a:lstStyle/>
           <a:p>
-            <a:pPr indent="0" lvl="0" marL="0" rtl="0" algn="l">
-              <a:spcBef>
-                <a:spcPts val="0"/>
-              </a:spcBef>
-              <a:spcAft>
-                <a:spcPts val="0"/>
-              </a:spcAft>
+            <a:pPr indent="0" lvl="0" marL="0" marR="0" rtl="0" algn="l">
+              <a:lnSpc>
+                <a:spcPct val="100000"/>
+              </a:lnSpc>
+              <a:spcBef>
+                <a:spcPts val="0"/>
+              </a:spcBef>
+              <a:spcAft>
+                <a:spcPts val="0"/>
+              </a:spcAft>
+              <a:buClr>
+                <a:srgbClr val="000000"/>
+              </a:buClr>
+              <a:buSzPts val="1400"/>
+              <a:buFont typeface="Arial"/>
               <a:buNone/>
             </a:pPr>
             <a:r>
               <a:t/>
             </a:r>
-            <a:endParaRPr/>
+            <a:endParaRPr b="0" i="0" sz="1400" u="none" cap="none" strike="noStrike">
+              <a:solidFill>
+                <a:srgbClr val="000000"/>
+              </a:solidFill>
+              <a:latin typeface="Arial"/>
+              <a:ea typeface="Arial"/>
+              <a:cs typeface="Arial"/>
+              <a:sym typeface="Arial"/>
+            </a:endParaRPr>
           </a:p>
         </p:txBody>
       </p:sp>
@@ -8059,6 +8849,9 @@
           <a:lstStyle/>
           <a:p>
             <a:pPr indent="0" lvl="0" marL="0" marR="0" rtl="0" algn="l">
+              <a:lnSpc>
+                <a:spcPct val="100000"/>
+              </a:lnSpc>
               <a:spcBef>
                 <a:spcPts val="0"/>
               </a:spcBef>
@@ -8122,6 +8915,9 @@
           <a:lstStyle/>
           <a:p>
             <a:pPr indent="0" lvl="0" marL="0" marR="0" rtl="0" algn="l">
+              <a:lnSpc>
+                <a:spcPct val="100000"/>
+              </a:lnSpc>
               <a:spcBef>
                 <a:spcPts val="0"/>
               </a:spcBef>
@@ -8199,19 +8995,35 @@
           </a:bodyPr>
           <a:lstStyle/>
           <a:p>
-            <a:pPr indent="0" lvl="0" marL="0" rtl="0" algn="l">
-              <a:spcBef>
-                <a:spcPts val="0"/>
-              </a:spcBef>
-              <a:spcAft>
-                <a:spcPts val="0"/>
-              </a:spcAft>
+            <a:pPr indent="0" lvl="0" marL="0" marR="0" rtl="0" algn="l">
+              <a:lnSpc>
+                <a:spcPct val="100000"/>
+              </a:lnSpc>
+              <a:spcBef>
+                <a:spcPts val="0"/>
+              </a:spcBef>
+              <a:spcAft>
+                <a:spcPts val="0"/>
+              </a:spcAft>
+              <a:buClr>
+                <a:srgbClr val="000000"/>
+              </a:buClr>
+              <a:buSzPts val="1400"/>
+              <a:buFont typeface="Arial"/>
               <a:buNone/>
             </a:pPr>
             <a:r>
               <a:t/>
             </a:r>
-            <a:endParaRPr/>
+            <a:endParaRPr b="0" i="0" sz="1400" u="none" cap="none" strike="noStrike">
+              <a:solidFill>
+                <a:srgbClr val="000000"/>
+              </a:solidFill>
+              <a:latin typeface="Arial"/>
+              <a:ea typeface="Arial"/>
+              <a:cs typeface="Arial"/>
+              <a:sym typeface="Arial"/>
+            </a:endParaRPr>
           </a:p>
         </p:txBody>
       </p:sp>
@@ -8248,19 +9060,35 @@
           </a:bodyPr>
           <a:lstStyle/>
           <a:p>
-            <a:pPr indent="0" lvl="0" marL="0" rtl="0" algn="l">
-              <a:spcBef>
-                <a:spcPts val="0"/>
-              </a:spcBef>
-              <a:spcAft>
-                <a:spcPts val="0"/>
-              </a:spcAft>
+            <a:pPr indent="0" lvl="0" marL="0" marR="0" rtl="0" algn="l">
+              <a:lnSpc>
+                <a:spcPct val="100000"/>
+              </a:lnSpc>
+              <a:spcBef>
+                <a:spcPts val="0"/>
+              </a:spcBef>
+              <a:spcAft>
+                <a:spcPts val="0"/>
+              </a:spcAft>
+              <a:buClr>
+                <a:srgbClr val="000000"/>
+              </a:buClr>
+              <a:buSzPts val="1400"/>
+              <a:buFont typeface="Arial"/>
               <a:buNone/>
             </a:pPr>
             <a:r>
               <a:t/>
             </a:r>
-            <a:endParaRPr/>
+            <a:endParaRPr b="0" i="0" sz="1400" u="none" cap="none" strike="noStrike">
+              <a:solidFill>
+                <a:srgbClr val="000000"/>
+              </a:solidFill>
+              <a:latin typeface="Arial"/>
+              <a:ea typeface="Arial"/>
+              <a:cs typeface="Arial"/>
+              <a:sym typeface="Arial"/>
+            </a:endParaRPr>
           </a:p>
         </p:txBody>
       </p:sp>
@@ -8290,6 +9118,9 @@
           <a:lstStyle/>
           <a:p>
             <a:pPr indent="0" lvl="0" marL="0" marR="0" rtl="0" algn="l">
+              <a:lnSpc>
+                <a:spcPct val="100000"/>
+              </a:lnSpc>
               <a:spcBef>
                 <a:spcPts val="0"/>
               </a:spcBef>
@@ -8353,6 +9184,9 @@
           <a:lstStyle/>
           <a:p>
             <a:pPr indent="0" lvl="0" marL="0" marR="0" rtl="0" algn="l">
+              <a:lnSpc>
+                <a:spcPct val="100000"/>
+              </a:lnSpc>
               <a:spcBef>
                 <a:spcPts val="0"/>
               </a:spcBef>
@@ -8430,19 +9264,35 @@
           </a:bodyPr>
           <a:lstStyle/>
           <a:p>
-            <a:pPr indent="0" lvl="0" marL="0" rtl="0" algn="l">
-              <a:spcBef>
-                <a:spcPts val="0"/>
-              </a:spcBef>
-              <a:spcAft>
-                <a:spcPts val="0"/>
-              </a:spcAft>
+            <a:pPr indent="0" lvl="0" marL="0" marR="0" rtl="0" algn="l">
+              <a:lnSpc>
+                <a:spcPct val="100000"/>
+              </a:lnSpc>
+              <a:spcBef>
+                <a:spcPts val="0"/>
+              </a:spcBef>
+              <a:spcAft>
+                <a:spcPts val="0"/>
+              </a:spcAft>
+              <a:buClr>
+                <a:srgbClr val="000000"/>
+              </a:buClr>
+              <a:buSzPts val="1400"/>
+              <a:buFont typeface="Arial"/>
               <a:buNone/>
             </a:pPr>
             <a:r>
               <a:t/>
             </a:r>
-            <a:endParaRPr/>
+            <a:endParaRPr b="0" i="0" sz="1400" u="none" cap="none" strike="noStrike">
+              <a:solidFill>
+                <a:srgbClr val="000000"/>
+              </a:solidFill>
+              <a:latin typeface="Arial"/>
+              <a:ea typeface="Arial"/>
+              <a:cs typeface="Arial"/>
+              <a:sym typeface="Arial"/>
+            </a:endParaRPr>
           </a:p>
         </p:txBody>
       </p:sp>
@@ -8479,19 +9329,35 @@
           </a:bodyPr>
           <a:lstStyle/>
           <a:p>
-            <a:pPr indent="0" lvl="0" marL="0" rtl="0" algn="l">
-              <a:spcBef>
-                <a:spcPts val="0"/>
-              </a:spcBef>
-              <a:spcAft>
-                <a:spcPts val="0"/>
-              </a:spcAft>
+            <a:pPr indent="0" lvl="0" marL="0" marR="0" rtl="0" algn="l">
+              <a:lnSpc>
+                <a:spcPct val="100000"/>
+              </a:lnSpc>
+              <a:spcBef>
+                <a:spcPts val="0"/>
+              </a:spcBef>
+              <a:spcAft>
+                <a:spcPts val="0"/>
+              </a:spcAft>
+              <a:buClr>
+                <a:srgbClr val="000000"/>
+              </a:buClr>
+              <a:buSzPts val="1400"/>
+              <a:buFont typeface="Arial"/>
               <a:buNone/>
             </a:pPr>
             <a:r>
               <a:t/>
             </a:r>
-            <a:endParaRPr/>
+            <a:endParaRPr b="0" i="0" sz="1400" u="none" cap="none" strike="noStrike">
+              <a:solidFill>
+                <a:srgbClr val="000000"/>
+              </a:solidFill>
+              <a:latin typeface="Arial"/>
+              <a:ea typeface="Arial"/>
+              <a:cs typeface="Arial"/>
+              <a:sym typeface="Arial"/>
+            </a:endParaRPr>
           </a:p>
         </p:txBody>
       </p:sp>
@@ -8521,6 +9387,9 @@
           <a:lstStyle/>
           <a:p>
             <a:pPr indent="0" lvl="0" marL="0" marR="0" rtl="0" algn="l">
+              <a:lnSpc>
+                <a:spcPct val="100000"/>
+              </a:lnSpc>
               <a:spcBef>
                 <a:spcPts val="0"/>
               </a:spcBef>
@@ -8584,6 +9453,9 @@
           <a:lstStyle/>
           <a:p>
             <a:pPr indent="0" lvl="0" marL="0" marR="0" rtl="0" algn="l">
+              <a:lnSpc>
+                <a:spcPct val="100000"/>
+              </a:lnSpc>
               <a:spcBef>
                 <a:spcPts val="0"/>
               </a:spcBef>
@@ -8686,19 +9558,35 @@
           </a:bodyPr>
           <a:lstStyle/>
           <a:p>
-            <a:pPr indent="0" lvl="0" marL="0" rtl="0" algn="l">
-              <a:spcBef>
-                <a:spcPts val="0"/>
-              </a:spcBef>
-              <a:spcAft>
-                <a:spcPts val="0"/>
-              </a:spcAft>
+            <a:pPr indent="0" lvl="0" marL="0" marR="0" rtl="0" algn="l">
+              <a:lnSpc>
+                <a:spcPct val="100000"/>
+              </a:lnSpc>
+              <a:spcBef>
+                <a:spcPts val="0"/>
+              </a:spcBef>
+              <a:spcAft>
+                <a:spcPts val="0"/>
+              </a:spcAft>
+              <a:buClr>
+                <a:srgbClr val="000000"/>
+              </a:buClr>
+              <a:buSzPts val="1400"/>
+              <a:buFont typeface="Arial"/>
               <a:buNone/>
             </a:pPr>
             <a:r>
               <a:t/>
             </a:r>
-            <a:endParaRPr/>
+            <a:endParaRPr b="0" i="0" sz="1400" u="none" cap="none" strike="noStrike">
+              <a:solidFill>
+                <a:srgbClr val="000000"/>
+              </a:solidFill>
+              <a:latin typeface="Arial"/>
+              <a:ea typeface="Arial"/>
+              <a:cs typeface="Arial"/>
+              <a:sym typeface="Arial"/>
+            </a:endParaRPr>
           </a:p>
         </p:txBody>
       </p:sp>
@@ -8728,6 +9616,9 @@
           <a:lstStyle/>
           <a:p>
             <a:pPr indent="0" lvl="0" marL="0" marR="0" rtl="0" algn="l">
+              <a:lnSpc>
+                <a:spcPct val="100000"/>
+              </a:lnSpc>
               <a:spcBef>
                 <a:spcPts val="0"/>
               </a:spcBef>
@@ -8791,6 +9682,9 @@
           <a:lstStyle/>
           <a:p>
             <a:pPr indent="0" lvl="0" marL="0" marR="0" rtl="0" algn="l">
+              <a:lnSpc>
+                <a:spcPct val="100000"/>
+              </a:lnSpc>
               <a:spcBef>
                 <a:spcPts val="0"/>
               </a:spcBef>
@@ -8854,6 +9748,9 @@
           <a:lstStyle/>
           <a:p>
             <a:pPr indent="0" lvl="0" marL="0" marR="0" rtl="0" algn="l">
+              <a:lnSpc>
+                <a:spcPct val="100000"/>
+              </a:lnSpc>
               <a:spcBef>
                 <a:spcPts val="0"/>
               </a:spcBef>
@@ -8931,19 +9828,35 @@
           </a:bodyPr>
           <a:lstStyle/>
           <a:p>
-            <a:pPr indent="0" lvl="0" marL="0" rtl="0" algn="l">
-              <a:spcBef>
-                <a:spcPts val="0"/>
-              </a:spcBef>
-              <a:spcAft>
-                <a:spcPts val="0"/>
-              </a:spcAft>
+            <a:pPr indent="0" lvl="0" marL="0" marR="0" rtl="0" algn="l">
+              <a:lnSpc>
+                <a:spcPct val="100000"/>
+              </a:lnSpc>
+              <a:spcBef>
+                <a:spcPts val="0"/>
+              </a:spcBef>
+              <a:spcAft>
+                <a:spcPts val="0"/>
+              </a:spcAft>
+              <a:buClr>
+                <a:srgbClr val="000000"/>
+              </a:buClr>
+              <a:buSzPts val="1400"/>
+              <a:buFont typeface="Arial"/>
               <a:buNone/>
             </a:pPr>
             <a:r>
               <a:t/>
             </a:r>
-            <a:endParaRPr/>
+            <a:endParaRPr b="0" i="0" sz="1400" u="none" cap="none" strike="noStrike">
+              <a:solidFill>
+                <a:srgbClr val="000000"/>
+              </a:solidFill>
+              <a:latin typeface="Arial"/>
+              <a:ea typeface="Arial"/>
+              <a:cs typeface="Arial"/>
+              <a:sym typeface="Arial"/>
+            </a:endParaRPr>
           </a:p>
         </p:txBody>
       </p:sp>
@@ -8980,19 +9893,35 @@
           </a:bodyPr>
           <a:lstStyle/>
           <a:p>
-            <a:pPr indent="0" lvl="0" marL="0" rtl="0" algn="l">
-              <a:spcBef>
-                <a:spcPts val="0"/>
-              </a:spcBef>
-              <a:spcAft>
-                <a:spcPts val="0"/>
-              </a:spcAft>
+            <a:pPr indent="0" lvl="0" marL="0" marR="0" rtl="0" algn="l">
+              <a:lnSpc>
+                <a:spcPct val="100000"/>
+              </a:lnSpc>
+              <a:spcBef>
+                <a:spcPts val="0"/>
+              </a:spcBef>
+              <a:spcAft>
+                <a:spcPts val="0"/>
+              </a:spcAft>
+              <a:buClr>
+                <a:srgbClr val="000000"/>
+              </a:buClr>
+              <a:buSzPts val="1400"/>
+              <a:buFont typeface="Arial"/>
               <a:buNone/>
             </a:pPr>
             <a:r>
               <a:t/>
             </a:r>
-            <a:endParaRPr/>
+            <a:endParaRPr b="0" i="0" sz="1400" u="none" cap="none" strike="noStrike">
+              <a:solidFill>
+                <a:srgbClr val="000000"/>
+              </a:solidFill>
+              <a:latin typeface="Arial"/>
+              <a:ea typeface="Arial"/>
+              <a:cs typeface="Arial"/>
+              <a:sym typeface="Arial"/>
+            </a:endParaRPr>
           </a:p>
         </p:txBody>
       </p:sp>
@@ -9022,6 +9951,9 @@
           <a:lstStyle/>
           <a:p>
             <a:pPr indent="0" lvl="0" marL="0" marR="0" rtl="0" algn="ctr">
+              <a:lnSpc>
+                <a:spcPct val="100000"/>
+              </a:lnSpc>
               <a:spcBef>
                 <a:spcPts val="0"/>
               </a:spcBef>
@@ -9085,6 +10017,9 @@
           <a:lstStyle/>
           <a:p>
             <a:pPr indent="0" lvl="0" marL="0" marR="0" rtl="0" algn="l">
+              <a:lnSpc>
+                <a:spcPct val="100000"/>
+              </a:lnSpc>
               <a:spcBef>
                 <a:spcPts val="0"/>
               </a:spcBef>
@@ -9148,6 +10083,9 @@
           <a:lstStyle/>
           <a:p>
             <a:pPr indent="0" lvl="0" marL="0" marR="0" rtl="0" algn="l">
+              <a:lnSpc>
+                <a:spcPct val="100000"/>
+              </a:lnSpc>
               <a:spcBef>
                 <a:spcPts val="0"/>
               </a:spcBef>
@@ -9225,19 +10163,35 @@
           </a:bodyPr>
           <a:lstStyle/>
           <a:p>
-            <a:pPr indent="0" lvl="0" marL="0" rtl="0" algn="l">
-              <a:spcBef>
-                <a:spcPts val="0"/>
-              </a:spcBef>
-              <a:spcAft>
-                <a:spcPts val="0"/>
-              </a:spcAft>
+            <a:pPr indent="0" lvl="0" marL="0" marR="0" rtl="0" algn="l">
+              <a:lnSpc>
+                <a:spcPct val="100000"/>
+              </a:lnSpc>
+              <a:spcBef>
+                <a:spcPts val="0"/>
+              </a:spcBef>
+              <a:spcAft>
+                <a:spcPts val="0"/>
+              </a:spcAft>
+              <a:buClr>
+                <a:srgbClr val="000000"/>
+              </a:buClr>
+              <a:buSzPts val="1400"/>
+              <a:buFont typeface="Arial"/>
               <a:buNone/>
             </a:pPr>
             <a:r>
               <a:t/>
             </a:r>
-            <a:endParaRPr/>
+            <a:endParaRPr b="0" i="0" sz="1400" u="none" cap="none" strike="noStrike">
+              <a:solidFill>
+                <a:srgbClr val="000000"/>
+              </a:solidFill>
+              <a:latin typeface="Arial"/>
+              <a:ea typeface="Arial"/>
+              <a:cs typeface="Arial"/>
+              <a:sym typeface="Arial"/>
+            </a:endParaRPr>
           </a:p>
         </p:txBody>
       </p:sp>
@@ -9274,19 +10228,35 @@
           </a:bodyPr>
           <a:lstStyle/>
           <a:p>
-            <a:pPr indent="0" lvl="0" marL="0" rtl="0" algn="l">
-              <a:spcBef>
-                <a:spcPts val="0"/>
-              </a:spcBef>
-              <a:spcAft>
-                <a:spcPts val="0"/>
-              </a:spcAft>
+            <a:pPr indent="0" lvl="0" marL="0" marR="0" rtl="0" algn="l">
+              <a:lnSpc>
+                <a:spcPct val="100000"/>
+              </a:lnSpc>
+              <a:spcBef>
+                <a:spcPts val="0"/>
+              </a:spcBef>
+              <a:spcAft>
+                <a:spcPts val="0"/>
+              </a:spcAft>
+              <a:buClr>
+                <a:srgbClr val="000000"/>
+              </a:buClr>
+              <a:buSzPts val="1400"/>
+              <a:buFont typeface="Arial"/>
               <a:buNone/>
             </a:pPr>
             <a:r>
               <a:t/>
             </a:r>
-            <a:endParaRPr/>
+            <a:endParaRPr b="0" i="0" sz="1400" u="none" cap="none" strike="noStrike">
+              <a:solidFill>
+                <a:srgbClr val="000000"/>
+              </a:solidFill>
+              <a:latin typeface="Arial"/>
+              <a:ea typeface="Arial"/>
+              <a:cs typeface="Arial"/>
+              <a:sym typeface="Arial"/>
+            </a:endParaRPr>
           </a:p>
         </p:txBody>
       </p:sp>
@@ -9316,6 +10286,9 @@
           <a:lstStyle/>
           <a:p>
             <a:pPr indent="0" lvl="0" marL="0" marR="0" rtl="0" algn="ctr">
+              <a:lnSpc>
+                <a:spcPct val="100000"/>
+              </a:lnSpc>
               <a:spcBef>
                 <a:spcPts val="0"/>
               </a:spcBef>
@@ -9379,6 +10352,9 @@
           <a:lstStyle/>
           <a:p>
             <a:pPr indent="0" lvl="0" marL="0" marR="0" rtl="0" algn="l">
+              <a:lnSpc>
+                <a:spcPct val="100000"/>
+              </a:lnSpc>
               <a:spcBef>
                 <a:spcPts val="0"/>
               </a:spcBef>
@@ -9442,6 +10418,9 @@
           <a:lstStyle/>
           <a:p>
             <a:pPr indent="0" lvl="0" marL="0" marR="0" rtl="0" algn="l">
+              <a:lnSpc>
+                <a:spcPct val="100000"/>
+              </a:lnSpc>
               <a:spcBef>
                 <a:spcPts val="0"/>
               </a:spcBef>
@@ -9519,19 +10498,35 @@
           </a:bodyPr>
           <a:lstStyle/>
           <a:p>
-            <a:pPr indent="0" lvl="0" marL="0" rtl="0" algn="l">
-              <a:spcBef>
-                <a:spcPts val="0"/>
-              </a:spcBef>
-              <a:spcAft>
-                <a:spcPts val="0"/>
-              </a:spcAft>
+            <a:pPr indent="0" lvl="0" marL="0" marR="0" rtl="0" algn="l">
+              <a:lnSpc>
+                <a:spcPct val="100000"/>
+              </a:lnSpc>
+              <a:spcBef>
+                <a:spcPts val="0"/>
+              </a:spcBef>
+              <a:spcAft>
+                <a:spcPts val="0"/>
+              </a:spcAft>
+              <a:buClr>
+                <a:srgbClr val="000000"/>
+              </a:buClr>
+              <a:buSzPts val="1400"/>
+              <a:buFont typeface="Arial"/>
               <a:buNone/>
             </a:pPr>
             <a:r>
               <a:t/>
             </a:r>
-            <a:endParaRPr/>
+            <a:endParaRPr b="0" i="0" sz="1400" u="none" cap="none" strike="noStrike">
+              <a:solidFill>
+                <a:srgbClr val="000000"/>
+              </a:solidFill>
+              <a:latin typeface="Arial"/>
+              <a:ea typeface="Arial"/>
+              <a:cs typeface="Arial"/>
+              <a:sym typeface="Arial"/>
+            </a:endParaRPr>
           </a:p>
         </p:txBody>
       </p:sp>
@@ -9568,19 +10563,35 @@
           </a:bodyPr>
           <a:lstStyle/>
           <a:p>
-            <a:pPr indent="0" lvl="0" marL="0" rtl="0" algn="l">
-              <a:spcBef>
-                <a:spcPts val="0"/>
-              </a:spcBef>
-              <a:spcAft>
-                <a:spcPts val="0"/>
-              </a:spcAft>
+            <a:pPr indent="0" lvl="0" marL="0" marR="0" rtl="0" algn="l">
+              <a:lnSpc>
+                <a:spcPct val="100000"/>
+              </a:lnSpc>
+              <a:spcBef>
+                <a:spcPts val="0"/>
+              </a:spcBef>
+              <a:spcAft>
+                <a:spcPts val="0"/>
+              </a:spcAft>
+              <a:buClr>
+                <a:srgbClr val="000000"/>
+              </a:buClr>
+              <a:buSzPts val="1400"/>
+              <a:buFont typeface="Arial"/>
               <a:buNone/>
             </a:pPr>
             <a:r>
               <a:t/>
             </a:r>
-            <a:endParaRPr/>
+            <a:endParaRPr b="0" i="0" sz="1400" u="none" cap="none" strike="noStrike">
+              <a:solidFill>
+                <a:srgbClr val="000000"/>
+              </a:solidFill>
+              <a:latin typeface="Arial"/>
+              <a:ea typeface="Arial"/>
+              <a:cs typeface="Arial"/>
+              <a:sym typeface="Arial"/>
+            </a:endParaRPr>
           </a:p>
         </p:txBody>
       </p:sp>
@@ -9610,6 +10621,9 @@
           <a:lstStyle/>
           <a:p>
             <a:pPr indent="0" lvl="0" marL="0" marR="0" rtl="0" algn="ctr">
+              <a:lnSpc>
+                <a:spcPct val="100000"/>
+              </a:lnSpc>
               <a:spcBef>
                 <a:spcPts val="0"/>
               </a:spcBef>
@@ -9673,6 +10687,9 @@
           <a:lstStyle/>
           <a:p>
             <a:pPr indent="0" lvl="0" marL="0" marR="0" rtl="0" algn="l">
+              <a:lnSpc>
+                <a:spcPct val="100000"/>
+              </a:lnSpc>
               <a:spcBef>
                 <a:spcPts val="0"/>
               </a:spcBef>
@@ -9736,6 +10753,9 @@
           <a:lstStyle/>
           <a:p>
             <a:pPr indent="0" lvl="0" marL="0" marR="0" rtl="0" algn="l">
+              <a:lnSpc>
+                <a:spcPct val="100000"/>
+              </a:lnSpc>
               <a:spcBef>
                 <a:spcPts val="0"/>
               </a:spcBef>
@@ -9813,19 +10833,35 @@
           </a:bodyPr>
           <a:lstStyle/>
           <a:p>
-            <a:pPr indent="0" lvl="0" marL="0" rtl="0" algn="l">
-              <a:spcBef>
-                <a:spcPts val="0"/>
-              </a:spcBef>
-              <a:spcAft>
-                <a:spcPts val="0"/>
-              </a:spcAft>
+            <a:pPr indent="0" lvl="0" marL="0" marR="0" rtl="0" algn="l">
+              <a:lnSpc>
+                <a:spcPct val="100000"/>
+              </a:lnSpc>
+              <a:spcBef>
+                <a:spcPts val="0"/>
+              </a:spcBef>
+              <a:spcAft>
+                <a:spcPts val="0"/>
+              </a:spcAft>
+              <a:buClr>
+                <a:srgbClr val="000000"/>
+              </a:buClr>
+              <a:buSzPts val="1400"/>
+              <a:buFont typeface="Arial"/>
               <a:buNone/>
             </a:pPr>
             <a:r>
               <a:t/>
             </a:r>
-            <a:endParaRPr/>
+            <a:endParaRPr b="0" i="0" sz="1400" u="none" cap="none" strike="noStrike">
+              <a:solidFill>
+                <a:srgbClr val="000000"/>
+              </a:solidFill>
+              <a:latin typeface="Arial"/>
+              <a:ea typeface="Arial"/>
+              <a:cs typeface="Arial"/>
+              <a:sym typeface="Arial"/>
+            </a:endParaRPr>
           </a:p>
         </p:txBody>
       </p:sp>
@@ -9862,19 +10898,35 @@
           </a:bodyPr>
           <a:lstStyle/>
           <a:p>
-            <a:pPr indent="0" lvl="0" marL="0" rtl="0" algn="l">
-              <a:spcBef>
-                <a:spcPts val="0"/>
-              </a:spcBef>
-              <a:spcAft>
-                <a:spcPts val="0"/>
-              </a:spcAft>
+            <a:pPr indent="0" lvl="0" marL="0" marR="0" rtl="0" algn="l">
+              <a:lnSpc>
+                <a:spcPct val="100000"/>
+              </a:lnSpc>
+              <a:spcBef>
+                <a:spcPts val="0"/>
+              </a:spcBef>
+              <a:spcAft>
+                <a:spcPts val="0"/>
+              </a:spcAft>
+              <a:buClr>
+                <a:srgbClr val="000000"/>
+              </a:buClr>
+              <a:buSzPts val="1400"/>
+              <a:buFont typeface="Arial"/>
               <a:buNone/>
             </a:pPr>
             <a:r>
               <a:t/>
             </a:r>
-            <a:endParaRPr/>
+            <a:endParaRPr b="0" i="0" sz="1400" u="none" cap="none" strike="noStrike">
+              <a:solidFill>
+                <a:srgbClr val="000000"/>
+              </a:solidFill>
+              <a:latin typeface="Arial"/>
+              <a:ea typeface="Arial"/>
+              <a:cs typeface="Arial"/>
+              <a:sym typeface="Arial"/>
+            </a:endParaRPr>
           </a:p>
         </p:txBody>
       </p:sp>
@@ -9904,6 +10956,9 @@
           <a:lstStyle/>
           <a:p>
             <a:pPr indent="0" lvl="0" marL="0" marR="0" rtl="0" algn="ctr">
+              <a:lnSpc>
+                <a:spcPct val="100000"/>
+              </a:lnSpc>
               <a:spcBef>
                 <a:spcPts val="0"/>
               </a:spcBef>
@@ -9967,6 +11022,9 @@
           <a:lstStyle/>
           <a:p>
             <a:pPr indent="0" lvl="0" marL="0" marR="0" rtl="0" algn="l">
+              <a:lnSpc>
+                <a:spcPct val="100000"/>
+              </a:lnSpc>
               <a:spcBef>
                 <a:spcPts val="0"/>
               </a:spcBef>
@@ -10030,6 +11088,9 @@
           <a:lstStyle/>
           <a:p>
             <a:pPr indent="0" lvl="0" marL="0" marR="0" rtl="0" algn="l">
+              <a:lnSpc>
+                <a:spcPct val="100000"/>
+              </a:lnSpc>
               <a:spcBef>
                 <a:spcPts val="0"/>
               </a:spcBef>
@@ -10107,19 +11168,35 @@
           </a:bodyPr>
           <a:lstStyle/>
           <a:p>
-            <a:pPr indent="0" lvl="0" marL="0" rtl="0" algn="l">
-              <a:spcBef>
-                <a:spcPts val="0"/>
-              </a:spcBef>
-              <a:spcAft>
-                <a:spcPts val="0"/>
-              </a:spcAft>
+            <a:pPr indent="0" lvl="0" marL="0" marR="0" rtl="0" algn="l">
+              <a:lnSpc>
+                <a:spcPct val="100000"/>
+              </a:lnSpc>
+              <a:spcBef>
+                <a:spcPts val="0"/>
+              </a:spcBef>
+              <a:spcAft>
+                <a:spcPts val="0"/>
+              </a:spcAft>
+              <a:buClr>
+                <a:srgbClr val="000000"/>
+              </a:buClr>
+              <a:buSzPts val="1400"/>
+              <a:buFont typeface="Arial"/>
               <a:buNone/>
             </a:pPr>
             <a:r>
               <a:t/>
             </a:r>
-            <a:endParaRPr/>
+            <a:endParaRPr b="0" i="0" sz="1400" u="none" cap="none" strike="noStrike">
+              <a:solidFill>
+                <a:srgbClr val="000000"/>
+              </a:solidFill>
+              <a:latin typeface="Arial"/>
+              <a:ea typeface="Arial"/>
+              <a:cs typeface="Arial"/>
+              <a:sym typeface="Arial"/>
+            </a:endParaRPr>
           </a:p>
         </p:txBody>
       </p:sp>
@@ -10156,19 +11233,35 @@
           </a:bodyPr>
           <a:lstStyle/>
           <a:p>
-            <a:pPr indent="0" lvl="0" marL="0" rtl="0" algn="l">
-              <a:spcBef>
-                <a:spcPts val="0"/>
-              </a:spcBef>
-              <a:spcAft>
-                <a:spcPts val="0"/>
-              </a:spcAft>
+            <a:pPr indent="0" lvl="0" marL="0" marR="0" rtl="0" algn="l">
+              <a:lnSpc>
+                <a:spcPct val="100000"/>
+              </a:lnSpc>
+              <a:spcBef>
+                <a:spcPts val="0"/>
+              </a:spcBef>
+              <a:spcAft>
+                <a:spcPts val="0"/>
+              </a:spcAft>
+              <a:buClr>
+                <a:srgbClr val="000000"/>
+              </a:buClr>
+              <a:buSzPts val="1400"/>
+              <a:buFont typeface="Arial"/>
               <a:buNone/>
             </a:pPr>
             <a:r>
               <a:t/>
             </a:r>
-            <a:endParaRPr/>
+            <a:endParaRPr b="0" i="0" sz="1400" u="none" cap="none" strike="noStrike">
+              <a:solidFill>
+                <a:srgbClr val="000000"/>
+              </a:solidFill>
+              <a:latin typeface="Arial"/>
+              <a:ea typeface="Arial"/>
+              <a:cs typeface="Arial"/>
+              <a:sym typeface="Arial"/>
+            </a:endParaRPr>
           </a:p>
         </p:txBody>
       </p:sp>
@@ -10198,6 +11291,9 @@
           <a:lstStyle/>
           <a:p>
             <a:pPr indent="0" lvl="0" marL="0" marR="0" rtl="0" algn="ctr">
+              <a:lnSpc>
+                <a:spcPct val="100000"/>
+              </a:lnSpc>
               <a:spcBef>
                 <a:spcPts val="0"/>
               </a:spcBef>
@@ -10261,6 +11357,9 @@
           <a:lstStyle/>
           <a:p>
             <a:pPr indent="0" lvl="0" marL="0" marR="0" rtl="0" algn="l">
+              <a:lnSpc>
+                <a:spcPct val="100000"/>
+              </a:lnSpc>
               <a:spcBef>
                 <a:spcPts val="0"/>
               </a:spcBef>
@@ -10324,6 +11423,9 @@
           <a:lstStyle/>
           <a:p>
             <a:pPr indent="0" lvl="0" marL="0" marR="0" rtl="0" algn="l">
+              <a:lnSpc>
+                <a:spcPct val="100000"/>
+              </a:lnSpc>
               <a:spcBef>
                 <a:spcPts val="0"/>
               </a:spcBef>
@@ -10426,19 +11528,35 @@
           </a:bodyPr>
           <a:lstStyle/>
           <a:p>
-            <a:pPr indent="0" lvl="0" marL="0" rtl="0" algn="l">
-              <a:spcBef>
-                <a:spcPts val="0"/>
-              </a:spcBef>
-              <a:spcAft>
-                <a:spcPts val="0"/>
-              </a:spcAft>
+            <a:pPr indent="0" lvl="0" marL="0" marR="0" rtl="0" algn="l">
+              <a:lnSpc>
+                <a:spcPct val="100000"/>
+              </a:lnSpc>
+              <a:spcBef>
+                <a:spcPts val="0"/>
+              </a:spcBef>
+              <a:spcAft>
+                <a:spcPts val="0"/>
+              </a:spcAft>
+              <a:buClr>
+                <a:srgbClr val="000000"/>
+              </a:buClr>
+              <a:buSzPts val="1400"/>
+              <a:buFont typeface="Arial"/>
               <a:buNone/>
             </a:pPr>
             <a:r>
               <a:t/>
             </a:r>
-            <a:endParaRPr/>
+            <a:endParaRPr b="0" i="0" sz="1400" u="none" cap="none" strike="noStrike">
+              <a:solidFill>
+                <a:srgbClr val="000000"/>
+              </a:solidFill>
+              <a:latin typeface="Arial"/>
+              <a:ea typeface="Arial"/>
+              <a:cs typeface="Arial"/>
+              <a:sym typeface="Arial"/>
+            </a:endParaRPr>
           </a:p>
         </p:txBody>
       </p:sp>
@@ -10468,6 +11586,9 @@
           <a:lstStyle/>
           <a:p>
             <a:pPr indent="0" lvl="0" marL="0" marR="0" rtl="0" algn="l">
+              <a:lnSpc>
+                <a:spcPct val="100000"/>
+              </a:lnSpc>
               <a:spcBef>
                 <a:spcPts val="0"/>
               </a:spcBef>
@@ -10531,6 +11652,9 @@
           <a:lstStyle/>
           <a:p>
             <a:pPr indent="0" lvl="0" marL="0" marR="0" rtl="0" algn="l">
+              <a:lnSpc>
+                <a:spcPct val="100000"/>
+              </a:lnSpc>
               <a:spcBef>
                 <a:spcPts val="0"/>
               </a:spcBef>
@@ -10594,6 +11718,9 @@
           <a:lstStyle/>
           <a:p>
             <a:pPr indent="0" lvl="0" marL="0" marR="0" rtl="0" algn="l">
+              <a:lnSpc>
+                <a:spcPct val="100000"/>
+              </a:lnSpc>
               <a:spcBef>
                 <a:spcPts val="0"/>
               </a:spcBef>
@@ -10671,19 +11798,35 @@
           </a:bodyPr>
           <a:lstStyle/>
           <a:p>
-            <a:pPr indent="0" lvl="0" marL="0" rtl="0" algn="l">
-              <a:spcBef>
-                <a:spcPts val="0"/>
-              </a:spcBef>
-              <a:spcAft>
-                <a:spcPts val="0"/>
-              </a:spcAft>
+            <a:pPr indent="0" lvl="0" marL="0" marR="0" rtl="0" algn="l">
+              <a:lnSpc>
+                <a:spcPct val="100000"/>
+              </a:lnSpc>
+              <a:spcBef>
+                <a:spcPts val="0"/>
+              </a:spcBef>
+              <a:spcAft>
+                <a:spcPts val="0"/>
+              </a:spcAft>
+              <a:buClr>
+                <a:srgbClr val="000000"/>
+              </a:buClr>
+              <a:buSzPts val="1400"/>
+              <a:buFont typeface="Arial"/>
               <a:buNone/>
             </a:pPr>
             <a:r>
               <a:t/>
             </a:r>
-            <a:endParaRPr/>
+            <a:endParaRPr b="0" i="0" sz="1400" u="none" cap="none" strike="noStrike">
+              <a:solidFill>
+                <a:srgbClr val="000000"/>
+              </a:solidFill>
+              <a:latin typeface="Arial"/>
+              <a:ea typeface="Arial"/>
+              <a:cs typeface="Arial"/>
+              <a:sym typeface="Arial"/>
+            </a:endParaRPr>
           </a:p>
         </p:txBody>
       </p:sp>
@@ -10720,19 +11863,35 @@
           </a:bodyPr>
           <a:lstStyle/>
           <a:p>
-            <a:pPr indent="0" lvl="0" marL="0" rtl="0" algn="l">
-              <a:spcBef>
-                <a:spcPts val="0"/>
-              </a:spcBef>
-              <a:spcAft>
-                <a:spcPts val="0"/>
-              </a:spcAft>
+            <a:pPr indent="0" lvl="0" marL="0" marR="0" rtl="0" algn="l">
+              <a:lnSpc>
+                <a:spcPct val="100000"/>
+              </a:lnSpc>
+              <a:spcBef>
+                <a:spcPts val="0"/>
+              </a:spcBef>
+              <a:spcAft>
+                <a:spcPts val="0"/>
+              </a:spcAft>
+              <a:buClr>
+                <a:srgbClr val="000000"/>
+              </a:buClr>
+              <a:buSzPts val="1400"/>
+              <a:buFont typeface="Arial"/>
               <a:buNone/>
             </a:pPr>
             <a:r>
               <a:t/>
             </a:r>
-            <a:endParaRPr/>
+            <a:endParaRPr b="0" i="0" sz="1400" u="none" cap="none" strike="noStrike">
+              <a:solidFill>
+                <a:srgbClr val="000000"/>
+              </a:solidFill>
+              <a:latin typeface="Arial"/>
+              <a:ea typeface="Arial"/>
+              <a:cs typeface="Arial"/>
+              <a:sym typeface="Arial"/>
+            </a:endParaRPr>
           </a:p>
         </p:txBody>
       </p:sp>
@@ -10789,6 +11948,9 @@
           <a:lstStyle/>
           <a:p>
             <a:pPr indent="0" lvl="0" marL="0" marR="0" rtl="0" algn="ctr">
+              <a:lnSpc>
+                <a:spcPct val="100000"/>
+              </a:lnSpc>
               <a:spcBef>
                 <a:spcPts val="0"/>
               </a:spcBef>
@@ -10852,6 +12014,9 @@
           <a:lstStyle/>
           <a:p>
             <a:pPr indent="0" lvl="0" marL="0" marR="0" rtl="0" algn="l">
+              <a:lnSpc>
+                <a:spcPct val="100000"/>
+              </a:lnSpc>
               <a:spcBef>
                 <a:spcPts val="0"/>
               </a:spcBef>
@@ -10929,19 +12094,35 @@
           </a:bodyPr>
           <a:lstStyle/>
           <a:p>
-            <a:pPr indent="0" lvl="0" marL="0" rtl="0" algn="l">
-              <a:spcBef>
-                <a:spcPts val="0"/>
-              </a:spcBef>
-              <a:spcAft>
-                <a:spcPts val="0"/>
-              </a:spcAft>
+            <a:pPr indent="0" lvl="0" marL="0" marR="0" rtl="0" algn="l">
+              <a:lnSpc>
+                <a:spcPct val="100000"/>
+              </a:lnSpc>
+              <a:spcBef>
+                <a:spcPts val="0"/>
+              </a:spcBef>
+              <a:spcAft>
+                <a:spcPts val="0"/>
+              </a:spcAft>
+              <a:buClr>
+                <a:srgbClr val="000000"/>
+              </a:buClr>
+              <a:buSzPts val="1400"/>
+              <a:buFont typeface="Arial"/>
               <a:buNone/>
             </a:pPr>
             <a:r>
               <a:t/>
             </a:r>
-            <a:endParaRPr/>
+            <a:endParaRPr b="0" i="0" sz="1400" u="none" cap="none" strike="noStrike">
+              <a:solidFill>
+                <a:srgbClr val="000000"/>
+              </a:solidFill>
+              <a:latin typeface="Arial"/>
+              <a:ea typeface="Arial"/>
+              <a:cs typeface="Arial"/>
+              <a:sym typeface="Arial"/>
+            </a:endParaRPr>
           </a:p>
         </p:txBody>
       </p:sp>
@@ -10978,19 +12159,35 @@
           </a:bodyPr>
           <a:lstStyle/>
           <a:p>
-            <a:pPr indent="0" lvl="0" marL="0" rtl="0" algn="l">
-              <a:spcBef>
-                <a:spcPts val="0"/>
-              </a:spcBef>
-              <a:spcAft>
-                <a:spcPts val="0"/>
-              </a:spcAft>
+            <a:pPr indent="0" lvl="0" marL="0" marR="0" rtl="0" algn="l">
+              <a:lnSpc>
+                <a:spcPct val="100000"/>
+              </a:lnSpc>
+              <a:spcBef>
+                <a:spcPts val="0"/>
+              </a:spcBef>
+              <a:spcAft>
+                <a:spcPts val="0"/>
+              </a:spcAft>
+              <a:buClr>
+                <a:srgbClr val="000000"/>
+              </a:buClr>
+              <a:buSzPts val="1400"/>
+              <a:buFont typeface="Arial"/>
               <a:buNone/>
             </a:pPr>
             <a:r>
               <a:t/>
             </a:r>
-            <a:endParaRPr/>
+            <a:endParaRPr b="0" i="0" sz="1400" u="none" cap="none" strike="noStrike">
+              <a:solidFill>
+                <a:srgbClr val="000000"/>
+              </a:solidFill>
+              <a:latin typeface="Arial"/>
+              <a:ea typeface="Arial"/>
+              <a:cs typeface="Arial"/>
+              <a:sym typeface="Arial"/>
+            </a:endParaRPr>
           </a:p>
         </p:txBody>
       </p:sp>
@@ -11047,6 +12244,9 @@
           <a:lstStyle/>
           <a:p>
             <a:pPr indent="0" lvl="0" marL="0" marR="0" rtl="0" algn="ctr">
+              <a:lnSpc>
+                <a:spcPct val="100000"/>
+              </a:lnSpc>
               <a:spcBef>
                 <a:spcPts val="0"/>
               </a:spcBef>
@@ -11110,6 +12310,9 @@
           <a:lstStyle/>
           <a:p>
             <a:pPr indent="0" lvl="0" marL="0" marR="0" rtl="0" algn="l">
+              <a:lnSpc>
+                <a:spcPct val="100000"/>
+              </a:lnSpc>
               <a:spcBef>
                 <a:spcPts val="0"/>
               </a:spcBef>
@@ -11187,19 +12390,35 @@
           </a:bodyPr>
           <a:lstStyle/>
           <a:p>
-            <a:pPr indent="0" lvl="0" marL="0" rtl="0" algn="l">
-              <a:spcBef>
-                <a:spcPts val="0"/>
-              </a:spcBef>
-              <a:spcAft>
-                <a:spcPts val="0"/>
-              </a:spcAft>
+            <a:pPr indent="0" lvl="0" marL="0" marR="0" rtl="0" algn="l">
+              <a:lnSpc>
+                <a:spcPct val="100000"/>
+              </a:lnSpc>
+              <a:spcBef>
+                <a:spcPts val="0"/>
+              </a:spcBef>
+              <a:spcAft>
+                <a:spcPts val="0"/>
+              </a:spcAft>
+              <a:buClr>
+                <a:srgbClr val="000000"/>
+              </a:buClr>
+              <a:buSzPts val="1400"/>
+              <a:buFont typeface="Arial"/>
               <a:buNone/>
             </a:pPr>
             <a:r>
               <a:t/>
             </a:r>
-            <a:endParaRPr/>
+            <a:endParaRPr b="0" i="0" sz="1400" u="none" cap="none" strike="noStrike">
+              <a:solidFill>
+                <a:srgbClr val="000000"/>
+              </a:solidFill>
+              <a:latin typeface="Arial"/>
+              <a:ea typeface="Arial"/>
+              <a:cs typeface="Arial"/>
+              <a:sym typeface="Arial"/>
+            </a:endParaRPr>
           </a:p>
         </p:txBody>
       </p:sp>
@@ -11236,19 +12455,35 @@
           </a:bodyPr>
           <a:lstStyle/>
           <a:p>
-            <a:pPr indent="0" lvl="0" marL="0" rtl="0" algn="l">
-              <a:spcBef>
-                <a:spcPts val="0"/>
-              </a:spcBef>
-              <a:spcAft>
-                <a:spcPts val="0"/>
-              </a:spcAft>
+            <a:pPr indent="0" lvl="0" marL="0" marR="0" rtl="0" algn="l">
+              <a:lnSpc>
+                <a:spcPct val="100000"/>
+              </a:lnSpc>
+              <a:spcBef>
+                <a:spcPts val="0"/>
+              </a:spcBef>
+              <a:spcAft>
+                <a:spcPts val="0"/>
+              </a:spcAft>
+              <a:buClr>
+                <a:srgbClr val="000000"/>
+              </a:buClr>
+              <a:buSzPts val="1400"/>
+              <a:buFont typeface="Arial"/>
               <a:buNone/>
             </a:pPr>
             <a:r>
               <a:t/>
             </a:r>
-            <a:endParaRPr/>
+            <a:endParaRPr b="0" i="0" sz="1400" u="none" cap="none" strike="noStrike">
+              <a:solidFill>
+                <a:srgbClr val="000000"/>
+              </a:solidFill>
+              <a:latin typeface="Arial"/>
+              <a:ea typeface="Arial"/>
+              <a:cs typeface="Arial"/>
+              <a:sym typeface="Arial"/>
+            </a:endParaRPr>
           </a:p>
         </p:txBody>
       </p:sp>
@@ -11305,6 +12540,9 @@
           <a:lstStyle/>
           <a:p>
             <a:pPr indent="0" lvl="0" marL="0" marR="0" rtl="0" algn="ctr">
+              <a:lnSpc>
+                <a:spcPct val="100000"/>
+              </a:lnSpc>
               <a:spcBef>
                 <a:spcPts val="0"/>
               </a:spcBef>
@@ -11368,6 +12606,9 @@
           <a:lstStyle/>
           <a:p>
             <a:pPr indent="0" lvl="0" marL="0" marR="0" rtl="0" algn="l">
+              <a:lnSpc>
+                <a:spcPct val="100000"/>
+              </a:lnSpc>
               <a:spcBef>
                 <a:spcPts val="0"/>
               </a:spcBef>
@@ -11445,19 +12686,35 @@
           </a:bodyPr>
           <a:lstStyle/>
           <a:p>
-            <a:pPr indent="0" lvl="0" marL="0" rtl="0" algn="l">
-              <a:spcBef>
-                <a:spcPts val="0"/>
-              </a:spcBef>
-              <a:spcAft>
-                <a:spcPts val="0"/>
-              </a:spcAft>
+            <a:pPr indent="0" lvl="0" marL="0" marR="0" rtl="0" algn="l">
+              <a:lnSpc>
+                <a:spcPct val="100000"/>
+              </a:lnSpc>
+              <a:spcBef>
+                <a:spcPts val="0"/>
+              </a:spcBef>
+              <a:spcAft>
+                <a:spcPts val="0"/>
+              </a:spcAft>
+              <a:buClr>
+                <a:srgbClr val="000000"/>
+              </a:buClr>
+              <a:buSzPts val="1400"/>
+              <a:buFont typeface="Arial"/>
               <a:buNone/>
             </a:pPr>
             <a:r>
               <a:t/>
             </a:r>
-            <a:endParaRPr/>
+            <a:endParaRPr b="0" i="0" sz="1400" u="none" cap="none" strike="noStrike">
+              <a:solidFill>
+                <a:srgbClr val="000000"/>
+              </a:solidFill>
+              <a:latin typeface="Arial"/>
+              <a:ea typeface="Arial"/>
+              <a:cs typeface="Arial"/>
+              <a:sym typeface="Arial"/>
+            </a:endParaRPr>
           </a:p>
         </p:txBody>
       </p:sp>
@@ -11494,19 +12751,35 @@
           </a:bodyPr>
           <a:lstStyle/>
           <a:p>
-            <a:pPr indent="0" lvl="0" marL="0" rtl="0" algn="l">
-              <a:spcBef>
-                <a:spcPts val="0"/>
-              </a:spcBef>
-              <a:spcAft>
-                <a:spcPts val="0"/>
-              </a:spcAft>
+            <a:pPr indent="0" lvl="0" marL="0" marR="0" rtl="0" algn="l">
+              <a:lnSpc>
+                <a:spcPct val="100000"/>
+              </a:lnSpc>
+              <a:spcBef>
+                <a:spcPts val="0"/>
+              </a:spcBef>
+              <a:spcAft>
+                <a:spcPts val="0"/>
+              </a:spcAft>
+              <a:buClr>
+                <a:srgbClr val="000000"/>
+              </a:buClr>
+              <a:buSzPts val="1400"/>
+              <a:buFont typeface="Arial"/>
               <a:buNone/>
             </a:pPr>
             <a:r>
               <a:t/>
             </a:r>
-            <a:endParaRPr/>
+            <a:endParaRPr b="0" i="0" sz="1400" u="none" cap="none" strike="noStrike">
+              <a:solidFill>
+                <a:srgbClr val="000000"/>
+              </a:solidFill>
+              <a:latin typeface="Arial"/>
+              <a:ea typeface="Arial"/>
+              <a:cs typeface="Arial"/>
+              <a:sym typeface="Arial"/>
+            </a:endParaRPr>
           </a:p>
         </p:txBody>
       </p:sp>
@@ -11563,6 +12836,9 @@
           <a:lstStyle/>
           <a:p>
             <a:pPr indent="0" lvl="0" marL="0" marR="0" rtl="0" algn="ctr">
+              <a:lnSpc>
+                <a:spcPct val="100000"/>
+              </a:lnSpc>
               <a:spcBef>
                 <a:spcPts val="0"/>
               </a:spcBef>
@@ -11626,6 +12902,9 @@
           <a:lstStyle/>
           <a:p>
             <a:pPr indent="0" lvl="0" marL="0" marR="0" rtl="0" algn="l">
+              <a:lnSpc>
+                <a:spcPct val="100000"/>
+              </a:lnSpc>
               <a:spcBef>
                 <a:spcPts val="0"/>
               </a:spcBef>
@@ -11703,19 +12982,35 @@
           </a:bodyPr>
           <a:lstStyle/>
           <a:p>
-            <a:pPr indent="0" lvl="0" marL="0" rtl="0" algn="l">
-              <a:spcBef>
-                <a:spcPts val="0"/>
-              </a:spcBef>
-              <a:spcAft>
-                <a:spcPts val="0"/>
-              </a:spcAft>
+            <a:pPr indent="0" lvl="0" marL="0" marR="0" rtl="0" algn="l">
+              <a:lnSpc>
+                <a:spcPct val="100000"/>
+              </a:lnSpc>
+              <a:spcBef>
+                <a:spcPts val="0"/>
+              </a:spcBef>
+              <a:spcAft>
+                <a:spcPts val="0"/>
+              </a:spcAft>
+              <a:buClr>
+                <a:srgbClr val="000000"/>
+              </a:buClr>
+              <a:buSzPts val="1400"/>
+              <a:buFont typeface="Arial"/>
               <a:buNone/>
             </a:pPr>
             <a:r>
               <a:t/>
             </a:r>
-            <a:endParaRPr/>
+            <a:endParaRPr b="0" i="0" sz="1400" u="none" cap="none" strike="noStrike">
+              <a:solidFill>
+                <a:srgbClr val="000000"/>
+              </a:solidFill>
+              <a:latin typeface="Arial"/>
+              <a:ea typeface="Arial"/>
+              <a:cs typeface="Arial"/>
+              <a:sym typeface="Arial"/>
+            </a:endParaRPr>
           </a:p>
         </p:txBody>
       </p:sp>
@@ -11752,19 +13047,35 @@
           </a:bodyPr>
           <a:lstStyle/>
           <a:p>
-            <a:pPr indent="0" lvl="0" marL="0" rtl="0" algn="l">
-              <a:spcBef>
-                <a:spcPts val="0"/>
-              </a:spcBef>
-              <a:spcAft>
-                <a:spcPts val="0"/>
-              </a:spcAft>
+            <a:pPr indent="0" lvl="0" marL="0" marR="0" rtl="0" algn="l">
+              <a:lnSpc>
+                <a:spcPct val="100000"/>
+              </a:lnSpc>
+              <a:spcBef>
+                <a:spcPts val="0"/>
+              </a:spcBef>
+              <a:spcAft>
+                <a:spcPts val="0"/>
+              </a:spcAft>
+              <a:buClr>
+                <a:srgbClr val="000000"/>
+              </a:buClr>
+              <a:buSzPts val="1400"/>
+              <a:buFont typeface="Arial"/>
               <a:buNone/>
             </a:pPr>
             <a:r>
               <a:t/>
             </a:r>
-            <a:endParaRPr/>
+            <a:endParaRPr b="0" i="0" sz="1400" u="none" cap="none" strike="noStrike">
+              <a:solidFill>
+                <a:srgbClr val="000000"/>
+              </a:solidFill>
+              <a:latin typeface="Arial"/>
+              <a:ea typeface="Arial"/>
+              <a:cs typeface="Arial"/>
+              <a:sym typeface="Arial"/>
+            </a:endParaRPr>
           </a:p>
         </p:txBody>
       </p:sp>
@@ -11821,6 +13132,9 @@
           <a:lstStyle/>
           <a:p>
             <a:pPr indent="0" lvl="0" marL="0" marR="0" rtl="0" algn="ctr">
+              <a:lnSpc>
+                <a:spcPct val="100000"/>
+              </a:lnSpc>
               <a:spcBef>
                 <a:spcPts val="0"/>
               </a:spcBef>
@@ -11884,6 +13198,9 @@
           <a:lstStyle/>
           <a:p>
             <a:pPr indent="0" lvl="0" marL="0" marR="0" rtl="0" algn="l">
+              <a:lnSpc>
+                <a:spcPct val="100000"/>
+              </a:lnSpc>
               <a:spcBef>
                 <a:spcPts val="0"/>
               </a:spcBef>
@@ -11986,19 +13303,35 @@
           </a:bodyPr>
           <a:lstStyle/>
           <a:p>
-            <a:pPr indent="0" lvl="0" marL="0" rtl="0" algn="l">
-              <a:spcBef>
-                <a:spcPts val="0"/>
-              </a:spcBef>
-              <a:spcAft>
-                <a:spcPts val="0"/>
-              </a:spcAft>
+            <a:pPr indent="0" lvl="0" marL="0" marR="0" rtl="0" algn="l">
+              <a:lnSpc>
+                <a:spcPct val="100000"/>
+              </a:lnSpc>
+              <a:spcBef>
+                <a:spcPts val="0"/>
+              </a:spcBef>
+              <a:spcAft>
+                <a:spcPts val="0"/>
+              </a:spcAft>
+              <a:buClr>
+                <a:srgbClr val="000000"/>
+              </a:buClr>
+              <a:buSzPts val="1400"/>
+              <a:buFont typeface="Arial"/>
               <a:buNone/>
             </a:pPr>
             <a:r>
               <a:t/>
             </a:r>
-            <a:endParaRPr/>
+            <a:endParaRPr b="0" i="0" sz="1400" u="none" cap="none" strike="noStrike">
+              <a:solidFill>
+                <a:srgbClr val="000000"/>
+              </a:solidFill>
+              <a:latin typeface="Arial"/>
+              <a:ea typeface="Arial"/>
+              <a:cs typeface="Arial"/>
+              <a:sym typeface="Arial"/>
+            </a:endParaRPr>
           </a:p>
         </p:txBody>
       </p:sp>
@@ -12035,19 +13368,35 @@
           </a:bodyPr>
           <a:lstStyle/>
           <a:p>
-            <a:pPr indent="0" lvl="0" marL="0" rtl="0" algn="l">
-              <a:spcBef>
-                <a:spcPts val="0"/>
-              </a:spcBef>
-              <a:spcAft>
-                <a:spcPts val="0"/>
-              </a:spcAft>
+            <a:pPr indent="0" lvl="0" marL="0" marR="0" rtl="0" algn="l">
+              <a:lnSpc>
+                <a:spcPct val="100000"/>
+              </a:lnSpc>
+              <a:spcBef>
+                <a:spcPts val="0"/>
+              </a:spcBef>
+              <a:spcAft>
+                <a:spcPts val="0"/>
+              </a:spcAft>
+              <a:buClr>
+                <a:srgbClr val="000000"/>
+              </a:buClr>
+              <a:buSzPts val="1400"/>
+              <a:buFont typeface="Arial"/>
               <a:buNone/>
             </a:pPr>
             <a:r>
               <a:t/>
             </a:r>
-            <a:endParaRPr/>
+            <a:endParaRPr b="0" i="0" sz="1400" u="none" cap="none" strike="noStrike">
+              <a:solidFill>
+                <a:srgbClr val="000000"/>
+              </a:solidFill>
+              <a:latin typeface="Arial"/>
+              <a:ea typeface="Arial"/>
+              <a:cs typeface="Arial"/>
+              <a:sym typeface="Arial"/>
+            </a:endParaRPr>
           </a:p>
         </p:txBody>
       </p:sp>
@@ -12077,6 +13426,9 @@
           <a:lstStyle/>
           <a:p>
             <a:pPr indent="0" lvl="0" marL="0" marR="0" rtl="0" algn="ctr">
+              <a:lnSpc>
+                <a:spcPct val="100000"/>
+              </a:lnSpc>
               <a:spcBef>
                 <a:spcPts val="0"/>
               </a:spcBef>
@@ -12147,19 +13499,35 @@
           </a:bodyPr>
           <a:lstStyle/>
           <a:p>
-            <a:pPr indent="0" lvl="0" marL="0" rtl="0" algn="l">
-              <a:spcBef>
-                <a:spcPts val="0"/>
-              </a:spcBef>
-              <a:spcAft>
-                <a:spcPts val="0"/>
-              </a:spcAft>
+            <a:pPr indent="0" lvl="0" marL="0" marR="0" rtl="0" algn="l">
+              <a:lnSpc>
+                <a:spcPct val="100000"/>
+              </a:lnSpc>
+              <a:spcBef>
+                <a:spcPts val="0"/>
+              </a:spcBef>
+              <a:spcAft>
+                <a:spcPts val="0"/>
+              </a:spcAft>
+              <a:buClr>
+                <a:srgbClr val="000000"/>
+              </a:buClr>
+              <a:buSzPts val="1400"/>
+              <a:buFont typeface="Arial"/>
               <a:buNone/>
             </a:pPr>
             <a:r>
               <a:t/>
             </a:r>
-            <a:endParaRPr/>
+            <a:endParaRPr b="0" i="0" sz="1400" u="none" cap="none" strike="noStrike">
+              <a:solidFill>
+                <a:srgbClr val="000000"/>
+              </a:solidFill>
+              <a:latin typeface="Arial"/>
+              <a:ea typeface="Arial"/>
+              <a:cs typeface="Arial"/>
+              <a:sym typeface="Arial"/>
+            </a:endParaRPr>
           </a:p>
         </p:txBody>
       </p:sp>
@@ -12189,6 +13557,9 @@
           <a:lstStyle/>
           <a:p>
             <a:pPr indent="0" lvl="0" marL="0" marR="0" rtl="0" algn="ctr">
+              <a:lnSpc>
+                <a:spcPct val="100000"/>
+              </a:lnSpc>
               <a:spcBef>
                 <a:spcPts val="0"/>
               </a:spcBef>
@@ -12252,6 +13623,9 @@
           <a:lstStyle/>
           <a:p>
             <a:pPr indent="0" lvl="0" marL="0" marR="0" rtl="0" algn="ctr">
+              <a:lnSpc>
+                <a:spcPct val="100000"/>
+              </a:lnSpc>
               <a:spcBef>
                 <a:spcPts val="0"/>
               </a:spcBef>
@@ -12322,19 +13696,35 @@
           </a:bodyPr>
           <a:lstStyle/>
           <a:p>
-            <a:pPr indent="0" lvl="0" marL="0" rtl="0" algn="l">
-              <a:spcBef>
-                <a:spcPts val="0"/>
-              </a:spcBef>
-              <a:spcAft>
-                <a:spcPts val="0"/>
-              </a:spcAft>
+            <a:pPr indent="0" lvl="0" marL="0" marR="0" rtl="0" algn="l">
+              <a:lnSpc>
+                <a:spcPct val="100000"/>
+              </a:lnSpc>
+              <a:spcBef>
+                <a:spcPts val="0"/>
+              </a:spcBef>
+              <a:spcAft>
+                <a:spcPts val="0"/>
+              </a:spcAft>
+              <a:buClr>
+                <a:srgbClr val="000000"/>
+              </a:buClr>
+              <a:buSzPts val="1400"/>
+              <a:buFont typeface="Arial"/>
               <a:buNone/>
             </a:pPr>
             <a:r>
               <a:t/>
             </a:r>
-            <a:endParaRPr/>
+            <a:endParaRPr b="0" i="0" sz="1400" u="none" cap="none" strike="noStrike">
+              <a:solidFill>
+                <a:srgbClr val="000000"/>
+              </a:solidFill>
+              <a:latin typeface="Arial"/>
+              <a:ea typeface="Arial"/>
+              <a:cs typeface="Arial"/>
+              <a:sym typeface="Arial"/>
+            </a:endParaRPr>
           </a:p>
         </p:txBody>
       </p:sp>
@@ -12364,6 +13754,9 @@
           <a:lstStyle/>
           <a:p>
             <a:pPr indent="0" lvl="0" marL="0" marR="0" rtl="0" algn="ctr">
+              <a:lnSpc>
+                <a:spcPct val="100000"/>
+              </a:lnSpc>
               <a:spcBef>
                 <a:spcPts val="0"/>
               </a:spcBef>
@@ -12434,19 +13827,35 @@
           </a:bodyPr>
           <a:lstStyle/>
           <a:p>
-            <a:pPr indent="0" lvl="0" marL="0" rtl="0" algn="l">
-              <a:spcBef>
-                <a:spcPts val="0"/>
-              </a:spcBef>
-              <a:spcAft>
-                <a:spcPts val="0"/>
-              </a:spcAft>
+            <a:pPr indent="0" lvl="0" marL="0" marR="0" rtl="0" algn="l">
+              <a:lnSpc>
+                <a:spcPct val="100000"/>
+              </a:lnSpc>
+              <a:spcBef>
+                <a:spcPts val="0"/>
+              </a:spcBef>
+              <a:spcAft>
+                <a:spcPts val="0"/>
+              </a:spcAft>
+              <a:buClr>
+                <a:srgbClr val="000000"/>
+              </a:buClr>
+              <a:buSzPts val="1400"/>
+              <a:buFont typeface="Arial"/>
               <a:buNone/>
             </a:pPr>
             <a:r>
               <a:t/>
             </a:r>
-            <a:endParaRPr/>
+            <a:endParaRPr b="0" i="0" sz="1400" u="none" cap="none" strike="noStrike">
+              <a:solidFill>
+                <a:srgbClr val="000000"/>
+              </a:solidFill>
+              <a:latin typeface="Arial"/>
+              <a:ea typeface="Arial"/>
+              <a:cs typeface="Arial"/>
+              <a:sym typeface="Arial"/>
+            </a:endParaRPr>
           </a:p>
         </p:txBody>
       </p:sp>
@@ -12476,6 +13885,9 @@
           <a:lstStyle/>
           <a:p>
             <a:pPr indent="0" lvl="0" marL="0" marR="0" rtl="0" algn="ctr">
+              <a:lnSpc>
+                <a:spcPct val="100000"/>
+              </a:lnSpc>
               <a:spcBef>
                 <a:spcPts val="0"/>
               </a:spcBef>
@@ -12546,19 +13958,35 @@
           </a:bodyPr>
           <a:lstStyle/>
           <a:p>
-            <a:pPr indent="0" lvl="0" marL="0" rtl="0" algn="l">
-              <a:spcBef>
-                <a:spcPts val="0"/>
-              </a:spcBef>
-              <a:spcAft>
-                <a:spcPts val="0"/>
-              </a:spcAft>
+            <a:pPr indent="0" lvl="0" marL="0" marR="0" rtl="0" algn="l">
+              <a:lnSpc>
+                <a:spcPct val="100000"/>
+              </a:lnSpc>
+              <a:spcBef>
+                <a:spcPts val="0"/>
+              </a:spcBef>
+              <a:spcAft>
+                <a:spcPts val="0"/>
+              </a:spcAft>
+              <a:buClr>
+                <a:srgbClr val="000000"/>
+              </a:buClr>
+              <a:buSzPts val="1400"/>
+              <a:buFont typeface="Arial"/>
               <a:buNone/>
             </a:pPr>
             <a:r>
               <a:t/>
             </a:r>
-            <a:endParaRPr/>
+            <a:endParaRPr b="0" i="0" sz="1400" u="none" cap="none" strike="noStrike">
+              <a:solidFill>
+                <a:srgbClr val="000000"/>
+              </a:solidFill>
+              <a:latin typeface="Arial"/>
+              <a:ea typeface="Arial"/>
+              <a:cs typeface="Arial"/>
+              <a:sym typeface="Arial"/>
+            </a:endParaRPr>
           </a:p>
         </p:txBody>
       </p:sp>
@@ -12588,6 +14016,9 @@
           <a:lstStyle/>
           <a:p>
             <a:pPr indent="0" lvl="0" marL="0" marR="0" rtl="0" algn="ctr">
+              <a:lnSpc>
+                <a:spcPct val="100000"/>
+              </a:lnSpc>
               <a:spcBef>
                 <a:spcPts val="0"/>
               </a:spcBef>
@@ -12651,6 +14082,9 @@
           <a:lstStyle/>
           <a:p>
             <a:pPr indent="0" lvl="0" marL="0" marR="0" rtl="0" algn="ctr">
+              <a:lnSpc>
+                <a:spcPct val="100000"/>
+              </a:lnSpc>
               <a:spcBef>
                 <a:spcPts val="0"/>
               </a:spcBef>
@@ -12753,19 +14187,35 @@
           </a:bodyPr>
           <a:lstStyle/>
           <a:p>
-            <a:pPr indent="0" lvl="0" marL="0" rtl="0" algn="l">
-              <a:spcBef>
-                <a:spcPts val="0"/>
-              </a:spcBef>
-              <a:spcAft>
-                <a:spcPts val="0"/>
-              </a:spcAft>
+            <a:pPr indent="0" lvl="0" marL="0" marR="0" rtl="0" algn="l">
+              <a:lnSpc>
+                <a:spcPct val="100000"/>
+              </a:lnSpc>
+              <a:spcBef>
+                <a:spcPts val="0"/>
+              </a:spcBef>
+              <a:spcAft>
+                <a:spcPts val="0"/>
+              </a:spcAft>
+              <a:buClr>
+                <a:srgbClr val="000000"/>
+              </a:buClr>
+              <a:buSzPts val="1400"/>
+              <a:buFont typeface="Arial"/>
               <a:buNone/>
             </a:pPr>
             <a:r>
               <a:t/>
             </a:r>
-            <a:endParaRPr/>
+            <a:endParaRPr b="0" i="0" sz="1400" u="none" cap="none" strike="noStrike">
+              <a:solidFill>
+                <a:srgbClr val="000000"/>
+              </a:solidFill>
+              <a:latin typeface="Arial"/>
+              <a:ea typeface="Arial"/>
+              <a:cs typeface="Arial"/>
+              <a:sym typeface="Arial"/>
+            </a:endParaRPr>
           </a:p>
         </p:txBody>
       </p:sp>
@@ -12795,6 +14245,9 @@
           <a:lstStyle/>
           <a:p>
             <a:pPr indent="0" lvl="0" marL="0" marR="0" rtl="0" algn="l">
+              <a:lnSpc>
+                <a:spcPct val="100000"/>
+              </a:lnSpc>
               <a:spcBef>
                 <a:spcPts val="0"/>
               </a:spcBef>
@@ -12858,6 +14311,9 @@
           <a:lstStyle/>
           <a:p>
             <a:pPr indent="0" lvl="0" marL="0" marR="0" rtl="0" algn="l">
+              <a:lnSpc>
+                <a:spcPct val="100000"/>
+              </a:lnSpc>
               <a:spcBef>
                 <a:spcPts val="0"/>
               </a:spcBef>
@@ -12921,6 +14377,9 @@
           <a:lstStyle/>
           <a:p>
             <a:pPr indent="0" lvl="0" marL="0" marR="0" rtl="0" algn="l">
+              <a:lnSpc>
+                <a:spcPct val="100000"/>
+              </a:lnSpc>
               <a:spcBef>
                 <a:spcPts val="0"/>
               </a:spcBef>
@@ -12998,19 +14457,35 @@
           </a:bodyPr>
           <a:lstStyle/>
           <a:p>
-            <a:pPr indent="0" lvl="0" marL="0" rtl="0" algn="l">
-              <a:spcBef>
-                <a:spcPts val="0"/>
-              </a:spcBef>
-              <a:spcAft>
-                <a:spcPts val="0"/>
-              </a:spcAft>
+            <a:pPr indent="0" lvl="0" marL="0" marR="0" rtl="0" algn="l">
+              <a:lnSpc>
+                <a:spcPct val="100000"/>
+              </a:lnSpc>
+              <a:spcBef>
+                <a:spcPts val="0"/>
+              </a:spcBef>
+              <a:spcAft>
+                <a:spcPts val="0"/>
+              </a:spcAft>
+              <a:buClr>
+                <a:srgbClr val="000000"/>
+              </a:buClr>
+              <a:buSzPts val="1400"/>
+              <a:buFont typeface="Arial"/>
               <a:buNone/>
             </a:pPr>
             <a:r>
               <a:t/>
             </a:r>
-            <a:endParaRPr/>
+            <a:endParaRPr b="0" i="0" sz="1400" u="none" cap="none" strike="noStrike">
+              <a:solidFill>
+                <a:srgbClr val="000000"/>
+              </a:solidFill>
+              <a:latin typeface="Arial"/>
+              <a:ea typeface="Arial"/>
+              <a:cs typeface="Arial"/>
+              <a:sym typeface="Arial"/>
+            </a:endParaRPr>
           </a:p>
         </p:txBody>
       </p:sp>
@@ -13047,19 +14522,35 @@
           </a:bodyPr>
           <a:lstStyle/>
           <a:p>
-            <a:pPr indent="0" lvl="0" marL="0" rtl="0" algn="l">
-              <a:spcBef>
-                <a:spcPts val="0"/>
-              </a:spcBef>
-              <a:spcAft>
-                <a:spcPts val="0"/>
-              </a:spcAft>
+            <a:pPr indent="0" lvl="0" marL="0" marR="0" rtl="0" algn="l">
+              <a:lnSpc>
+                <a:spcPct val="100000"/>
+              </a:lnSpc>
+              <a:spcBef>
+                <a:spcPts val="0"/>
+              </a:spcBef>
+              <a:spcAft>
+                <a:spcPts val="0"/>
+              </a:spcAft>
+              <a:buClr>
+                <a:srgbClr val="000000"/>
+              </a:buClr>
+              <a:buSzPts val="1400"/>
+              <a:buFont typeface="Arial"/>
               <a:buNone/>
             </a:pPr>
             <a:r>
               <a:t/>
             </a:r>
-            <a:endParaRPr/>
+            <a:endParaRPr b="0" i="0" sz="1400" u="none" cap="none" strike="noStrike">
+              <a:solidFill>
+                <a:srgbClr val="000000"/>
+              </a:solidFill>
+              <a:latin typeface="Arial"/>
+              <a:ea typeface="Arial"/>
+              <a:cs typeface="Arial"/>
+              <a:sym typeface="Arial"/>
+            </a:endParaRPr>
           </a:p>
         </p:txBody>
       </p:sp>
@@ -13089,6 +14580,9 @@
           <a:lstStyle/>
           <a:p>
             <a:pPr indent="0" lvl="0" marL="0" marR="0" rtl="0" algn="ctr">
+              <a:lnSpc>
+                <a:spcPct val="100000"/>
+              </a:lnSpc>
               <a:spcBef>
                 <a:spcPts val="0"/>
               </a:spcBef>
@@ -13152,6 +14646,9 @@
           <a:lstStyle/>
           <a:p>
             <a:pPr indent="0" lvl="0" marL="0" marR="0" rtl="0" algn="l">
+              <a:lnSpc>
+                <a:spcPct val="100000"/>
+              </a:lnSpc>
               <a:spcBef>
                 <a:spcPts val="0"/>
               </a:spcBef>
@@ -13215,6 +14712,9 @@
           <a:lstStyle/>
           <a:p>
             <a:pPr indent="0" lvl="0" marL="0" marR="0" rtl="0" algn="l">
+              <a:lnSpc>
+                <a:spcPct val="100000"/>
+              </a:lnSpc>
               <a:spcBef>
                 <a:spcPts val="0"/>
               </a:spcBef>
@@ -13292,19 +14792,35 @@
           </a:bodyPr>
           <a:lstStyle/>
           <a:p>
-            <a:pPr indent="0" lvl="0" marL="0" rtl="0" algn="l">
-              <a:spcBef>
-                <a:spcPts val="0"/>
-              </a:spcBef>
-              <a:spcAft>
-                <a:spcPts val="0"/>
-              </a:spcAft>
+            <a:pPr indent="0" lvl="0" marL="0" marR="0" rtl="0" algn="l">
+              <a:lnSpc>
+                <a:spcPct val="100000"/>
+              </a:lnSpc>
+              <a:spcBef>
+                <a:spcPts val="0"/>
+              </a:spcBef>
+              <a:spcAft>
+                <a:spcPts val="0"/>
+              </a:spcAft>
+              <a:buClr>
+                <a:srgbClr val="000000"/>
+              </a:buClr>
+              <a:buSzPts val="1400"/>
+              <a:buFont typeface="Arial"/>
               <a:buNone/>
             </a:pPr>
             <a:r>
               <a:t/>
             </a:r>
-            <a:endParaRPr/>
+            <a:endParaRPr b="0" i="0" sz="1400" u="none" cap="none" strike="noStrike">
+              <a:solidFill>
+                <a:srgbClr val="000000"/>
+              </a:solidFill>
+              <a:latin typeface="Arial"/>
+              <a:ea typeface="Arial"/>
+              <a:cs typeface="Arial"/>
+              <a:sym typeface="Arial"/>
+            </a:endParaRPr>
           </a:p>
         </p:txBody>
       </p:sp>
@@ -13341,19 +14857,35 @@
           </a:bodyPr>
           <a:lstStyle/>
           <a:p>
-            <a:pPr indent="0" lvl="0" marL="0" rtl="0" algn="l">
-              <a:spcBef>
-                <a:spcPts val="0"/>
-              </a:spcBef>
-              <a:spcAft>
-                <a:spcPts val="0"/>
-              </a:spcAft>
+            <a:pPr indent="0" lvl="0" marL="0" marR="0" rtl="0" algn="l">
+              <a:lnSpc>
+                <a:spcPct val="100000"/>
+              </a:lnSpc>
+              <a:spcBef>
+                <a:spcPts val="0"/>
+              </a:spcBef>
+              <a:spcAft>
+                <a:spcPts val="0"/>
+              </a:spcAft>
+              <a:buClr>
+                <a:srgbClr val="000000"/>
+              </a:buClr>
+              <a:buSzPts val="1400"/>
+              <a:buFont typeface="Arial"/>
               <a:buNone/>
             </a:pPr>
             <a:r>
               <a:t/>
             </a:r>
-            <a:endParaRPr/>
+            <a:endParaRPr b="0" i="0" sz="1400" u="none" cap="none" strike="noStrike">
+              <a:solidFill>
+                <a:srgbClr val="000000"/>
+              </a:solidFill>
+              <a:latin typeface="Arial"/>
+              <a:ea typeface="Arial"/>
+              <a:cs typeface="Arial"/>
+              <a:sym typeface="Arial"/>
+            </a:endParaRPr>
           </a:p>
         </p:txBody>
       </p:sp>
@@ -13383,6 +14915,9 @@
           <a:lstStyle/>
           <a:p>
             <a:pPr indent="0" lvl="0" marL="0" marR="0" rtl="0" algn="ctr">
+              <a:lnSpc>
+                <a:spcPct val="100000"/>
+              </a:lnSpc>
               <a:spcBef>
                 <a:spcPts val="0"/>
               </a:spcBef>
@@ -13446,6 +14981,9 @@
           <a:lstStyle/>
           <a:p>
             <a:pPr indent="0" lvl="0" marL="0" marR="0" rtl="0" algn="l">
+              <a:lnSpc>
+                <a:spcPct val="100000"/>
+              </a:lnSpc>
               <a:spcBef>
                 <a:spcPts val="0"/>
               </a:spcBef>
@@ -13509,6 +15047,9 @@
           <a:lstStyle/>
           <a:p>
             <a:pPr indent="0" lvl="0" marL="0" marR="0" rtl="0" algn="l">
+              <a:lnSpc>
+                <a:spcPct val="100000"/>
+              </a:lnSpc>
               <a:spcBef>
                 <a:spcPts val="0"/>
               </a:spcBef>
@@ -13586,19 +15127,35 @@
           </a:bodyPr>
           <a:lstStyle/>
           <a:p>
-            <a:pPr indent="0" lvl="0" marL="0" rtl="0" algn="l">
-              <a:spcBef>
-                <a:spcPts val="0"/>
-              </a:spcBef>
-              <a:spcAft>
-                <a:spcPts val="0"/>
-              </a:spcAft>
+            <a:pPr indent="0" lvl="0" marL="0" marR="0" rtl="0" algn="l">
+              <a:lnSpc>
+                <a:spcPct val="100000"/>
+              </a:lnSpc>
+              <a:spcBef>
+                <a:spcPts val="0"/>
+              </a:spcBef>
+              <a:spcAft>
+                <a:spcPts val="0"/>
+              </a:spcAft>
+              <a:buClr>
+                <a:srgbClr val="000000"/>
+              </a:buClr>
+              <a:buSzPts val="1400"/>
+              <a:buFont typeface="Arial"/>
               <a:buNone/>
             </a:pPr>
             <a:r>
               <a:t/>
             </a:r>
-            <a:endParaRPr/>
+            <a:endParaRPr b="0" i="0" sz="1400" u="none" cap="none" strike="noStrike">
+              <a:solidFill>
+                <a:srgbClr val="000000"/>
+              </a:solidFill>
+              <a:latin typeface="Arial"/>
+              <a:ea typeface="Arial"/>
+              <a:cs typeface="Arial"/>
+              <a:sym typeface="Arial"/>
+            </a:endParaRPr>
           </a:p>
         </p:txBody>
       </p:sp>
@@ -13635,19 +15192,35 @@
           </a:bodyPr>
           <a:lstStyle/>
           <a:p>
-            <a:pPr indent="0" lvl="0" marL="0" rtl="0" algn="l">
-              <a:spcBef>
-                <a:spcPts val="0"/>
-              </a:spcBef>
-              <a:spcAft>
-                <a:spcPts val="0"/>
-              </a:spcAft>
+            <a:pPr indent="0" lvl="0" marL="0" marR="0" rtl="0" algn="l">
+              <a:lnSpc>
+                <a:spcPct val="100000"/>
+              </a:lnSpc>
+              <a:spcBef>
+                <a:spcPts val="0"/>
+              </a:spcBef>
+              <a:spcAft>
+                <a:spcPts val="0"/>
+              </a:spcAft>
+              <a:buClr>
+                <a:srgbClr val="000000"/>
+              </a:buClr>
+              <a:buSzPts val="1400"/>
+              <a:buFont typeface="Arial"/>
               <a:buNone/>
             </a:pPr>
             <a:r>
               <a:t/>
             </a:r>
-            <a:endParaRPr/>
+            <a:endParaRPr b="0" i="0" sz="1400" u="none" cap="none" strike="noStrike">
+              <a:solidFill>
+                <a:srgbClr val="000000"/>
+              </a:solidFill>
+              <a:latin typeface="Arial"/>
+              <a:ea typeface="Arial"/>
+              <a:cs typeface="Arial"/>
+              <a:sym typeface="Arial"/>
+            </a:endParaRPr>
           </a:p>
         </p:txBody>
       </p:sp>
@@ -13677,6 +15250,9 @@
           <a:lstStyle/>
           <a:p>
             <a:pPr indent="0" lvl="0" marL="0" marR="0" rtl="0" algn="ctr">
+              <a:lnSpc>
+                <a:spcPct val="100000"/>
+              </a:lnSpc>
               <a:spcBef>
                 <a:spcPts val="0"/>
               </a:spcBef>
@@ -13740,6 +15316,9 @@
           <a:lstStyle/>
           <a:p>
             <a:pPr indent="0" lvl="0" marL="0" marR="0" rtl="0" algn="l">
+              <a:lnSpc>
+                <a:spcPct val="100000"/>
+              </a:lnSpc>
               <a:spcBef>
                 <a:spcPts val="0"/>
               </a:spcBef>
@@ -13803,6 +15382,9 @@
           <a:lstStyle/>
           <a:p>
             <a:pPr indent="0" lvl="0" marL="0" marR="0" rtl="0" algn="l">
+              <a:lnSpc>
+                <a:spcPct val="100000"/>
+              </a:lnSpc>
               <a:spcBef>
                 <a:spcPts val="0"/>
               </a:spcBef>
@@ -13880,19 +15462,35 @@
           </a:bodyPr>
           <a:lstStyle/>
           <a:p>
-            <a:pPr indent="0" lvl="0" marL="0" rtl="0" algn="l">
-              <a:spcBef>
-                <a:spcPts val="0"/>
-              </a:spcBef>
-              <a:spcAft>
-                <a:spcPts val="0"/>
-              </a:spcAft>
+            <a:pPr indent="0" lvl="0" marL="0" marR="0" rtl="0" algn="l">
+              <a:lnSpc>
+                <a:spcPct val="100000"/>
+              </a:lnSpc>
+              <a:spcBef>
+                <a:spcPts val="0"/>
+              </a:spcBef>
+              <a:spcAft>
+                <a:spcPts val="0"/>
+              </a:spcAft>
+              <a:buClr>
+                <a:srgbClr val="000000"/>
+              </a:buClr>
+              <a:buSzPts val="1400"/>
+              <a:buFont typeface="Arial"/>
               <a:buNone/>
             </a:pPr>
             <a:r>
               <a:t/>
             </a:r>
-            <a:endParaRPr/>
+            <a:endParaRPr b="0" i="0" sz="1400" u="none" cap="none" strike="noStrike">
+              <a:solidFill>
+                <a:srgbClr val="000000"/>
+              </a:solidFill>
+              <a:latin typeface="Arial"/>
+              <a:ea typeface="Arial"/>
+              <a:cs typeface="Arial"/>
+              <a:sym typeface="Arial"/>
+            </a:endParaRPr>
           </a:p>
         </p:txBody>
       </p:sp>
@@ -13929,19 +15527,35 @@
           </a:bodyPr>
           <a:lstStyle/>
           <a:p>
-            <a:pPr indent="0" lvl="0" marL="0" rtl="0" algn="l">
-              <a:spcBef>
-                <a:spcPts val="0"/>
-              </a:spcBef>
-              <a:spcAft>
-                <a:spcPts val="0"/>
-              </a:spcAft>
+            <a:pPr indent="0" lvl="0" marL="0" marR="0" rtl="0" algn="l">
+              <a:lnSpc>
+                <a:spcPct val="100000"/>
+              </a:lnSpc>
+              <a:spcBef>
+                <a:spcPts val="0"/>
+              </a:spcBef>
+              <a:spcAft>
+                <a:spcPts val="0"/>
+              </a:spcAft>
+              <a:buClr>
+                <a:srgbClr val="000000"/>
+              </a:buClr>
+              <a:buSzPts val="1400"/>
+              <a:buFont typeface="Arial"/>
               <a:buNone/>
             </a:pPr>
             <a:r>
               <a:t/>
             </a:r>
-            <a:endParaRPr/>
+            <a:endParaRPr b="0" i="0" sz="1400" u="none" cap="none" strike="noStrike">
+              <a:solidFill>
+                <a:srgbClr val="000000"/>
+              </a:solidFill>
+              <a:latin typeface="Arial"/>
+              <a:ea typeface="Arial"/>
+              <a:cs typeface="Arial"/>
+              <a:sym typeface="Arial"/>
+            </a:endParaRPr>
           </a:p>
         </p:txBody>
       </p:sp>
@@ -13971,6 +15585,9 @@
           <a:lstStyle/>
           <a:p>
             <a:pPr indent="0" lvl="0" marL="0" marR="0" rtl="0" algn="ctr">
+              <a:lnSpc>
+                <a:spcPct val="100000"/>
+              </a:lnSpc>
               <a:spcBef>
                 <a:spcPts val="0"/>
               </a:spcBef>
@@ -14034,6 +15651,9 @@
           <a:lstStyle/>
           <a:p>
             <a:pPr indent="0" lvl="0" marL="0" marR="0" rtl="0" algn="l">
+              <a:lnSpc>
+                <a:spcPct val="100000"/>
+              </a:lnSpc>
               <a:spcBef>
                 <a:spcPts val="0"/>
               </a:spcBef>
@@ -14097,6 +15717,9 @@
           <a:lstStyle/>
           <a:p>
             <a:pPr indent="0" lvl="0" marL="0" marR="0" rtl="0" algn="l">
+              <a:lnSpc>
+                <a:spcPct val="100000"/>
+              </a:lnSpc>
               <a:spcBef>
                 <a:spcPts val="0"/>
               </a:spcBef>
@@ -14174,19 +15797,35 @@
           </a:bodyPr>
           <a:lstStyle/>
           <a:p>
-            <a:pPr indent="0" lvl="0" marL="0" rtl="0" algn="l">
-              <a:spcBef>
-                <a:spcPts val="0"/>
-              </a:spcBef>
-              <a:spcAft>
-                <a:spcPts val="0"/>
-              </a:spcAft>
+            <a:pPr indent="0" lvl="0" marL="0" marR="0" rtl="0" algn="l">
+              <a:lnSpc>
+                <a:spcPct val="100000"/>
+              </a:lnSpc>
+              <a:spcBef>
+                <a:spcPts val="0"/>
+              </a:spcBef>
+              <a:spcAft>
+                <a:spcPts val="0"/>
+              </a:spcAft>
+              <a:buClr>
+                <a:srgbClr val="000000"/>
+              </a:buClr>
+              <a:buSzPts val="1400"/>
+              <a:buFont typeface="Arial"/>
               <a:buNone/>
             </a:pPr>
             <a:r>
               <a:t/>
             </a:r>
-            <a:endParaRPr/>
+            <a:endParaRPr b="0" i="0" sz="1400" u="none" cap="none" strike="noStrike">
+              <a:solidFill>
+                <a:srgbClr val="000000"/>
+              </a:solidFill>
+              <a:latin typeface="Arial"/>
+              <a:ea typeface="Arial"/>
+              <a:cs typeface="Arial"/>
+              <a:sym typeface="Arial"/>
+            </a:endParaRPr>
           </a:p>
         </p:txBody>
       </p:sp>
@@ -14223,19 +15862,35 @@
           </a:bodyPr>
           <a:lstStyle/>
           <a:p>
-            <a:pPr indent="0" lvl="0" marL="0" rtl="0" algn="l">
-              <a:spcBef>
-                <a:spcPts val="0"/>
-              </a:spcBef>
-              <a:spcAft>
-                <a:spcPts val="0"/>
-              </a:spcAft>
+            <a:pPr indent="0" lvl="0" marL="0" marR="0" rtl="0" algn="l">
+              <a:lnSpc>
+                <a:spcPct val="100000"/>
+              </a:lnSpc>
+              <a:spcBef>
+                <a:spcPts val="0"/>
+              </a:spcBef>
+              <a:spcAft>
+                <a:spcPts val="0"/>
+              </a:spcAft>
+              <a:buClr>
+                <a:srgbClr val="000000"/>
+              </a:buClr>
+              <a:buSzPts val="1400"/>
+              <a:buFont typeface="Arial"/>
               <a:buNone/>
             </a:pPr>
             <a:r>
               <a:t/>
             </a:r>
-            <a:endParaRPr/>
+            <a:endParaRPr b="0" i="0" sz="1400" u="none" cap="none" strike="noStrike">
+              <a:solidFill>
+                <a:srgbClr val="000000"/>
+              </a:solidFill>
+              <a:latin typeface="Arial"/>
+              <a:ea typeface="Arial"/>
+              <a:cs typeface="Arial"/>
+              <a:sym typeface="Arial"/>
+            </a:endParaRPr>
           </a:p>
         </p:txBody>
       </p:sp>
@@ -14265,6 +15920,9 @@
           <a:lstStyle/>
           <a:p>
             <a:pPr indent="0" lvl="0" marL="0" marR="0" rtl="0" algn="ctr">
+              <a:lnSpc>
+                <a:spcPct val="100000"/>
+              </a:lnSpc>
               <a:spcBef>
                 <a:spcPts val="0"/>
               </a:spcBef>
@@ -14328,6 +15986,9 @@
           <a:lstStyle/>
           <a:p>
             <a:pPr indent="0" lvl="0" marL="0" marR="0" rtl="0" algn="l">
+              <a:lnSpc>
+                <a:spcPct val="100000"/>
+              </a:lnSpc>
               <a:spcBef>
                 <a:spcPts val="0"/>
               </a:spcBef>
@@ -14391,6 +16052,9 @@
           <a:lstStyle/>
           <a:p>
             <a:pPr indent="0" lvl="0" marL="0" marR="0" rtl="0" algn="l">
+              <a:lnSpc>
+                <a:spcPct val="100000"/>
+              </a:lnSpc>
               <a:spcBef>
                 <a:spcPts val="0"/>
               </a:spcBef>
@@ -14468,19 +16132,35 @@
           </a:bodyPr>
           <a:lstStyle/>
           <a:p>
-            <a:pPr indent="0" lvl="0" marL="0" rtl="0" algn="l">
-              <a:spcBef>
-                <a:spcPts val="0"/>
-              </a:spcBef>
-              <a:spcAft>
-                <a:spcPts val="0"/>
-              </a:spcAft>
+            <a:pPr indent="0" lvl="0" marL="0" marR="0" rtl="0" algn="l">
+              <a:lnSpc>
+                <a:spcPct val="100000"/>
+              </a:lnSpc>
+              <a:spcBef>
+                <a:spcPts val="0"/>
+              </a:spcBef>
+              <a:spcAft>
+                <a:spcPts val="0"/>
+              </a:spcAft>
+              <a:buClr>
+                <a:srgbClr val="000000"/>
+              </a:buClr>
+              <a:buSzPts val="1400"/>
+              <a:buFont typeface="Arial"/>
               <a:buNone/>
             </a:pPr>
             <a:r>
               <a:t/>
             </a:r>
-            <a:endParaRPr/>
+            <a:endParaRPr b="0" i="0" sz="1400" u="none" cap="none" strike="noStrike">
+              <a:solidFill>
+                <a:srgbClr val="000000"/>
+              </a:solidFill>
+              <a:latin typeface="Arial"/>
+              <a:ea typeface="Arial"/>
+              <a:cs typeface="Arial"/>
+              <a:sym typeface="Arial"/>
+            </a:endParaRPr>
           </a:p>
         </p:txBody>
       </p:sp>
@@ -14517,19 +16197,35 @@
           </a:bodyPr>
           <a:lstStyle/>
           <a:p>
-            <a:pPr indent="0" lvl="0" marL="0" rtl="0" algn="l">
-              <a:spcBef>
-                <a:spcPts val="0"/>
-              </a:spcBef>
-              <a:spcAft>
-                <a:spcPts val="0"/>
-              </a:spcAft>
+            <a:pPr indent="0" lvl="0" marL="0" marR="0" rtl="0" algn="l">
+              <a:lnSpc>
+                <a:spcPct val="100000"/>
+              </a:lnSpc>
+              <a:spcBef>
+                <a:spcPts val="0"/>
+              </a:spcBef>
+              <a:spcAft>
+                <a:spcPts val="0"/>
+              </a:spcAft>
+              <a:buClr>
+                <a:srgbClr val="000000"/>
+              </a:buClr>
+              <a:buSzPts val="1400"/>
+              <a:buFont typeface="Arial"/>
               <a:buNone/>
             </a:pPr>
             <a:r>
               <a:t/>
             </a:r>
-            <a:endParaRPr/>
+            <a:endParaRPr b="0" i="0" sz="1400" u="none" cap="none" strike="noStrike">
+              <a:solidFill>
+                <a:srgbClr val="000000"/>
+              </a:solidFill>
+              <a:latin typeface="Arial"/>
+              <a:ea typeface="Arial"/>
+              <a:cs typeface="Arial"/>
+              <a:sym typeface="Arial"/>
+            </a:endParaRPr>
           </a:p>
         </p:txBody>
       </p:sp>
@@ -14559,6 +16255,9 @@
           <a:lstStyle/>
           <a:p>
             <a:pPr indent="0" lvl="0" marL="0" marR="0" rtl="0" algn="ctr">
+              <a:lnSpc>
+                <a:spcPct val="100000"/>
+              </a:lnSpc>
               <a:spcBef>
                 <a:spcPts val="0"/>
               </a:spcBef>
@@ -14622,6 +16321,9 @@
           <a:lstStyle/>
           <a:p>
             <a:pPr indent="0" lvl="0" marL="0" marR="0" rtl="0" algn="l">
+              <a:lnSpc>
+                <a:spcPct val="100000"/>
+              </a:lnSpc>
               <a:spcBef>
                 <a:spcPts val="0"/>
               </a:spcBef>
@@ -14724,19 +16426,35 @@
           </a:bodyPr>
           <a:lstStyle/>
           <a:p>
-            <a:pPr indent="0" lvl="0" marL="0" rtl="0" algn="l">
-              <a:spcBef>
-                <a:spcPts val="0"/>
-              </a:spcBef>
-              <a:spcAft>
-                <a:spcPts val="0"/>
-              </a:spcAft>
+            <a:pPr indent="0" lvl="0" marL="0" marR="0" rtl="0" algn="l">
+              <a:lnSpc>
+                <a:spcPct val="100000"/>
+              </a:lnSpc>
+              <a:spcBef>
+                <a:spcPts val="0"/>
+              </a:spcBef>
+              <a:spcAft>
+                <a:spcPts val="0"/>
+              </a:spcAft>
+              <a:buClr>
+                <a:srgbClr val="000000"/>
+              </a:buClr>
+              <a:buSzPts val="1400"/>
+              <a:buFont typeface="Arial"/>
               <a:buNone/>
             </a:pPr>
             <a:r>
               <a:t/>
             </a:r>
-            <a:endParaRPr/>
+            <a:endParaRPr b="0" i="0" sz="1400" u="none" cap="none" strike="noStrike">
+              <a:solidFill>
+                <a:srgbClr val="000000"/>
+              </a:solidFill>
+              <a:latin typeface="Arial"/>
+              <a:ea typeface="Arial"/>
+              <a:cs typeface="Arial"/>
+              <a:sym typeface="Arial"/>
+            </a:endParaRPr>
           </a:p>
         </p:txBody>
       </p:sp>
@@ -14766,6 +16484,9 @@
           <a:lstStyle/>
           <a:p>
             <a:pPr indent="0" lvl="0" marL="0" marR="0" rtl="0" algn="l">
+              <a:lnSpc>
+                <a:spcPct val="100000"/>
+              </a:lnSpc>
               <a:spcBef>
                 <a:spcPts val="0"/>
               </a:spcBef>
@@ -14829,6 +16550,9 @@
           <a:lstStyle/>
           <a:p>
             <a:pPr indent="0" lvl="0" marL="0" marR="0" rtl="0" algn="l">
+              <a:lnSpc>
+                <a:spcPct val="100000"/>
+              </a:lnSpc>
               <a:spcBef>
                 <a:spcPts val="0"/>
               </a:spcBef>
@@ -14892,6 +16616,9 @@
           <a:lstStyle/>
           <a:p>
             <a:pPr indent="0" lvl="0" marL="0" marR="0" rtl="0" algn="l">
+              <a:lnSpc>
+                <a:spcPct val="100000"/>
+              </a:lnSpc>
               <a:spcBef>
                 <a:spcPts val="0"/>
               </a:spcBef>
@@ -14969,19 +16696,35 @@
           </a:bodyPr>
           <a:lstStyle/>
           <a:p>
-            <a:pPr indent="0" lvl="0" marL="0" rtl="0" algn="l">
-              <a:spcBef>
-                <a:spcPts val="0"/>
-              </a:spcBef>
-              <a:spcAft>
-                <a:spcPts val="0"/>
-              </a:spcAft>
+            <a:pPr indent="0" lvl="0" marL="0" marR="0" rtl="0" algn="l">
+              <a:lnSpc>
+                <a:spcPct val="100000"/>
+              </a:lnSpc>
+              <a:spcBef>
+                <a:spcPts val="0"/>
+              </a:spcBef>
+              <a:spcAft>
+                <a:spcPts val="0"/>
+              </a:spcAft>
+              <a:buClr>
+                <a:srgbClr val="000000"/>
+              </a:buClr>
+              <a:buSzPts val="1400"/>
+              <a:buFont typeface="Arial"/>
               <a:buNone/>
             </a:pPr>
             <a:r>
               <a:t/>
             </a:r>
-            <a:endParaRPr/>
+            <a:endParaRPr b="0" i="0" sz="1400" u="none" cap="none" strike="noStrike">
+              <a:solidFill>
+                <a:srgbClr val="000000"/>
+              </a:solidFill>
+              <a:latin typeface="Arial"/>
+              <a:ea typeface="Arial"/>
+              <a:cs typeface="Arial"/>
+              <a:sym typeface="Arial"/>
+            </a:endParaRPr>
           </a:p>
         </p:txBody>
       </p:sp>
@@ -15038,6 +16781,9 @@
           <a:lstStyle/>
           <a:p>
             <a:pPr indent="0" lvl="0" marL="0" marR="0" rtl="0" algn="l">
+              <a:lnSpc>
+                <a:spcPct val="100000"/>
+              </a:lnSpc>
               <a:spcBef>
                 <a:spcPts val="0"/>
               </a:spcBef>
@@ -15101,6 +16847,9 @@
           <a:lstStyle/>
           <a:p>
             <a:pPr indent="0" lvl="0" marL="0" marR="0" rtl="0" algn="l">
+              <a:lnSpc>
+                <a:spcPct val="100000"/>
+              </a:lnSpc>
               <a:spcBef>
                 <a:spcPts val="0"/>
               </a:spcBef>
@@ -15178,19 +16927,35 @@
           </a:bodyPr>
           <a:lstStyle/>
           <a:p>
-            <a:pPr indent="0" lvl="0" marL="0" rtl="0" algn="l">
-              <a:spcBef>
-                <a:spcPts val="0"/>
-              </a:spcBef>
-              <a:spcAft>
-                <a:spcPts val="0"/>
-              </a:spcAft>
+            <a:pPr indent="0" lvl="0" marL="0" marR="0" rtl="0" algn="l">
+              <a:lnSpc>
+                <a:spcPct val="100000"/>
+              </a:lnSpc>
+              <a:spcBef>
+                <a:spcPts val="0"/>
+              </a:spcBef>
+              <a:spcAft>
+                <a:spcPts val="0"/>
+              </a:spcAft>
+              <a:buClr>
+                <a:srgbClr val="000000"/>
+              </a:buClr>
+              <a:buSzPts val="1400"/>
+              <a:buFont typeface="Arial"/>
               <a:buNone/>
             </a:pPr>
             <a:r>
               <a:t/>
             </a:r>
-            <a:endParaRPr/>
+            <a:endParaRPr b="0" i="0" sz="1400" u="none" cap="none" strike="noStrike">
+              <a:solidFill>
+                <a:srgbClr val="000000"/>
+              </a:solidFill>
+              <a:latin typeface="Arial"/>
+              <a:ea typeface="Arial"/>
+              <a:cs typeface="Arial"/>
+              <a:sym typeface="Arial"/>
+            </a:endParaRPr>
           </a:p>
         </p:txBody>
       </p:sp>
@@ -15247,6 +17012,9 @@
           <a:lstStyle/>
           <a:p>
             <a:pPr indent="0" lvl="0" marL="0" marR="0" rtl="0" algn="l">
+              <a:lnSpc>
+                <a:spcPct val="100000"/>
+              </a:lnSpc>
               <a:spcBef>
                 <a:spcPts val="0"/>
               </a:spcBef>
@@ -15310,6 +17078,9 @@
           <a:lstStyle/>
           <a:p>
             <a:pPr indent="0" lvl="0" marL="0" marR="0" rtl="0" algn="l">
+              <a:lnSpc>
+                <a:spcPct val="100000"/>
+              </a:lnSpc>
               <a:spcBef>
                 <a:spcPts val="0"/>
               </a:spcBef>
@@ -15387,19 +17158,35 @@
           </a:bodyPr>
           <a:lstStyle/>
           <a:p>
-            <a:pPr indent="0" lvl="0" marL="0" rtl="0" algn="l">
-              <a:spcBef>
-                <a:spcPts val="0"/>
-              </a:spcBef>
-              <a:spcAft>
-                <a:spcPts val="0"/>
-              </a:spcAft>
+            <a:pPr indent="0" lvl="0" marL="0" marR="0" rtl="0" algn="l">
+              <a:lnSpc>
+                <a:spcPct val="100000"/>
+              </a:lnSpc>
+              <a:spcBef>
+                <a:spcPts val="0"/>
+              </a:spcBef>
+              <a:spcAft>
+                <a:spcPts val="0"/>
+              </a:spcAft>
+              <a:buClr>
+                <a:srgbClr val="000000"/>
+              </a:buClr>
+              <a:buSzPts val="1400"/>
+              <a:buFont typeface="Arial"/>
               <a:buNone/>
             </a:pPr>
             <a:r>
               <a:t/>
             </a:r>
-            <a:endParaRPr/>
+            <a:endParaRPr b="0" i="0" sz="1400" u="none" cap="none" strike="noStrike">
+              <a:solidFill>
+                <a:srgbClr val="000000"/>
+              </a:solidFill>
+              <a:latin typeface="Arial"/>
+              <a:ea typeface="Arial"/>
+              <a:cs typeface="Arial"/>
+              <a:sym typeface="Arial"/>
+            </a:endParaRPr>
           </a:p>
         </p:txBody>
       </p:sp>
@@ -15456,6 +17243,9 @@
           <a:lstStyle/>
           <a:p>
             <a:pPr indent="0" lvl="0" marL="0" marR="0" rtl="0" algn="l">
+              <a:lnSpc>
+                <a:spcPct val="100000"/>
+              </a:lnSpc>
               <a:spcBef>
                 <a:spcPts val="0"/>
               </a:spcBef>
@@ -15519,6 +17309,9 @@
           <a:lstStyle/>
           <a:p>
             <a:pPr indent="0" lvl="0" marL="0" marR="0" rtl="0" algn="l">
+              <a:lnSpc>
+                <a:spcPct val="100000"/>
+              </a:lnSpc>
               <a:spcBef>
                 <a:spcPts val="0"/>
               </a:spcBef>
@@ -15596,19 +17389,35 @@
           </a:bodyPr>
           <a:lstStyle/>
           <a:p>
-            <a:pPr indent="0" lvl="0" marL="0" rtl="0" algn="l">
-              <a:spcBef>
-                <a:spcPts val="0"/>
-              </a:spcBef>
-              <a:spcAft>
-                <a:spcPts val="0"/>
-              </a:spcAft>
+            <a:pPr indent="0" lvl="0" marL="0" marR="0" rtl="0" algn="l">
+              <a:lnSpc>
+                <a:spcPct val="100000"/>
+              </a:lnSpc>
+              <a:spcBef>
+                <a:spcPts val="0"/>
+              </a:spcBef>
+              <a:spcAft>
+                <a:spcPts val="0"/>
+              </a:spcAft>
+              <a:buClr>
+                <a:srgbClr val="000000"/>
+              </a:buClr>
+              <a:buSzPts val="1400"/>
+              <a:buFont typeface="Arial"/>
               <a:buNone/>
             </a:pPr>
             <a:r>
               <a:t/>
             </a:r>
-            <a:endParaRPr/>
+            <a:endParaRPr b="0" i="0" sz="1400" u="none" cap="none" strike="noStrike">
+              <a:solidFill>
+                <a:srgbClr val="000000"/>
+              </a:solidFill>
+              <a:latin typeface="Arial"/>
+              <a:ea typeface="Arial"/>
+              <a:cs typeface="Arial"/>
+              <a:sym typeface="Arial"/>
+            </a:endParaRPr>
           </a:p>
         </p:txBody>
       </p:sp>
@@ -15665,6 +17474,9 @@
           <a:lstStyle/>
           <a:p>
             <a:pPr indent="0" lvl="0" marL="0" marR="0" rtl="0" algn="l">
+              <a:lnSpc>
+                <a:spcPct val="100000"/>
+              </a:lnSpc>
               <a:spcBef>
                 <a:spcPts val="0"/>
               </a:spcBef>
@@ -15728,6 +17540,9 @@
           <a:lstStyle/>
           <a:p>
             <a:pPr indent="0" lvl="0" marL="0" marR="0" rtl="0" algn="l">
+              <a:lnSpc>
+                <a:spcPct val="100000"/>
+              </a:lnSpc>
               <a:spcBef>
                 <a:spcPts val="0"/>
               </a:spcBef>
@@ -15751,7 +17566,7 @@
                 <a:cs typeface="Calibri"/>
                 <a:sym typeface="Calibri"/>
               </a:rPr>
-              <a:t>Which geographies lead in sales?</a:t>
+              <a:t>Which geographies lead  in sales?</a:t>
             </a:r>
             <a:endParaRPr b="0" i="0" sz="1100" u="none" cap="none" strike="noStrike">
               <a:solidFill>
@@ -15805,19 +17620,35 @@
           </a:bodyPr>
           <a:lstStyle/>
           <a:p>
-            <a:pPr indent="0" lvl="0" marL="0" rtl="0" algn="l">
-              <a:spcBef>
-                <a:spcPts val="0"/>
-              </a:spcBef>
-              <a:spcAft>
-                <a:spcPts val="0"/>
-              </a:spcAft>
+            <a:pPr indent="0" lvl="0" marL="0" marR="0" rtl="0" algn="l">
+              <a:lnSpc>
+                <a:spcPct val="100000"/>
+              </a:lnSpc>
+              <a:spcBef>
+                <a:spcPts val="0"/>
+              </a:spcBef>
+              <a:spcAft>
+                <a:spcPts val="0"/>
+              </a:spcAft>
+              <a:buClr>
+                <a:srgbClr val="000000"/>
+              </a:buClr>
+              <a:buSzPts val="1400"/>
+              <a:buFont typeface="Arial"/>
               <a:buNone/>
             </a:pPr>
             <a:r>
               <a:t/>
             </a:r>
-            <a:endParaRPr/>
+            <a:endParaRPr b="0" i="0" sz="1400" u="none" cap="none" strike="noStrike">
+              <a:solidFill>
+                <a:srgbClr val="000000"/>
+              </a:solidFill>
+              <a:latin typeface="Arial"/>
+              <a:ea typeface="Arial"/>
+              <a:cs typeface="Arial"/>
+              <a:sym typeface="Arial"/>
+            </a:endParaRPr>
           </a:p>
         </p:txBody>
       </p:sp>
@@ -15874,6 +17705,9 @@
           <a:lstStyle/>
           <a:p>
             <a:pPr indent="0" lvl="0" marL="0" marR="0" rtl="0" algn="l">
+              <a:lnSpc>
+                <a:spcPct val="100000"/>
+              </a:lnSpc>
               <a:spcBef>
                 <a:spcPts val="0"/>
               </a:spcBef>
@@ -15937,6 +17771,9 @@
           <a:lstStyle/>
           <a:p>
             <a:pPr indent="0" lvl="0" marL="0" marR="0" rtl="0" algn="l">
+              <a:lnSpc>
+                <a:spcPct val="100000"/>
+              </a:lnSpc>
               <a:spcBef>
                 <a:spcPts val="0"/>
               </a:spcBef>
@@ -16014,19 +17851,35 @@
           </a:bodyPr>
           <a:lstStyle/>
           <a:p>
-            <a:pPr indent="0" lvl="0" marL="0" rtl="0" algn="l">
-              <a:spcBef>
-                <a:spcPts val="0"/>
-              </a:spcBef>
-              <a:spcAft>
-                <a:spcPts val="0"/>
-              </a:spcAft>
+            <a:pPr indent="0" lvl="0" marL="0" marR="0" rtl="0" algn="l">
+              <a:lnSpc>
+                <a:spcPct val="100000"/>
+              </a:lnSpc>
+              <a:spcBef>
+                <a:spcPts val="0"/>
+              </a:spcBef>
+              <a:spcAft>
+                <a:spcPts val="0"/>
+              </a:spcAft>
+              <a:buClr>
+                <a:srgbClr val="000000"/>
+              </a:buClr>
+              <a:buSzPts val="1400"/>
+              <a:buFont typeface="Arial"/>
               <a:buNone/>
             </a:pPr>
             <a:r>
               <a:t/>
             </a:r>
-            <a:endParaRPr/>
+            <a:endParaRPr b="0" i="0" sz="1400" u="none" cap="none" strike="noStrike">
+              <a:solidFill>
+                <a:srgbClr val="000000"/>
+              </a:solidFill>
+              <a:latin typeface="Arial"/>
+              <a:ea typeface="Arial"/>
+              <a:cs typeface="Arial"/>
+              <a:sym typeface="Arial"/>
+            </a:endParaRPr>
           </a:p>
         </p:txBody>
       </p:sp>
@@ -16083,6 +17936,9 @@
           <a:lstStyle/>
           <a:p>
             <a:pPr indent="0" lvl="0" marL="0" marR="0" rtl="0" algn="l">
+              <a:lnSpc>
+                <a:spcPct val="100000"/>
+              </a:lnSpc>
               <a:spcBef>
                 <a:spcPts val="0"/>
               </a:spcBef>
@@ -16146,6 +18002,9 @@
           <a:lstStyle/>
           <a:p>
             <a:pPr indent="0" lvl="0" marL="0" marR="0" rtl="0" algn="l">
+              <a:lnSpc>
+                <a:spcPct val="100000"/>
+              </a:lnSpc>
               <a:spcBef>
                 <a:spcPts val="0"/>
               </a:spcBef>
@@ -16248,19 +18107,35 @@
           </a:bodyPr>
           <a:lstStyle/>
           <a:p>
-            <a:pPr indent="0" lvl="0" marL="0" rtl="0" algn="l">
-              <a:spcBef>
-                <a:spcPts val="0"/>
-              </a:spcBef>
-              <a:spcAft>
-                <a:spcPts val="0"/>
-              </a:spcAft>
+            <a:pPr indent="0" lvl="0" marL="0" marR="0" rtl="0" algn="l">
+              <a:lnSpc>
+                <a:spcPct val="100000"/>
+              </a:lnSpc>
+              <a:spcBef>
+                <a:spcPts val="0"/>
+              </a:spcBef>
+              <a:spcAft>
+                <a:spcPts val="0"/>
+              </a:spcAft>
+              <a:buClr>
+                <a:srgbClr val="000000"/>
+              </a:buClr>
+              <a:buSzPts val="1400"/>
+              <a:buFont typeface="Arial"/>
               <a:buNone/>
             </a:pPr>
             <a:r>
               <a:t/>
             </a:r>
-            <a:endParaRPr/>
+            <a:endParaRPr b="0" i="0" sz="1400" u="none" cap="none" strike="noStrike">
+              <a:solidFill>
+                <a:srgbClr val="000000"/>
+              </a:solidFill>
+              <a:latin typeface="Arial"/>
+              <a:ea typeface="Arial"/>
+              <a:cs typeface="Arial"/>
+              <a:sym typeface="Arial"/>
+            </a:endParaRPr>
           </a:p>
         </p:txBody>
       </p:sp>
@@ -16290,6 +18165,9 @@
           <a:lstStyle/>
           <a:p>
             <a:pPr indent="0" lvl="0" marL="0" marR="0" rtl="0" algn="l">
+              <a:lnSpc>
+                <a:spcPct val="100000"/>
+              </a:lnSpc>
               <a:spcBef>
                 <a:spcPts val="0"/>
               </a:spcBef>
@@ -16353,6 +18231,9 @@
           <a:lstStyle/>
           <a:p>
             <a:pPr indent="0" lvl="0" marL="0" marR="0" rtl="0" algn="l">
+              <a:lnSpc>
+                <a:spcPct val="100000"/>
+              </a:lnSpc>
               <a:spcBef>
                 <a:spcPts val="0"/>
               </a:spcBef>
@@ -16416,6 +18297,9 @@
           <a:lstStyle/>
           <a:p>
             <a:pPr indent="0" lvl="0" marL="0" marR="0" rtl="0" algn="l">
+              <a:lnSpc>
+                <a:spcPct val="100000"/>
+              </a:lnSpc>
               <a:spcBef>
                 <a:spcPts val="0"/>
               </a:spcBef>
@@ -16493,19 +18377,35 @@
           </a:bodyPr>
           <a:lstStyle/>
           <a:p>
-            <a:pPr indent="0" lvl="0" marL="0" rtl="0" algn="l">
-              <a:spcBef>
-                <a:spcPts val="0"/>
-              </a:spcBef>
-              <a:spcAft>
-                <a:spcPts val="0"/>
-              </a:spcAft>
+            <a:pPr indent="0" lvl="0" marL="0" marR="0" rtl="0" algn="l">
+              <a:lnSpc>
+                <a:spcPct val="100000"/>
+              </a:lnSpc>
+              <a:spcBef>
+                <a:spcPts val="0"/>
+              </a:spcBef>
+              <a:spcAft>
+                <a:spcPts val="0"/>
+              </a:spcAft>
+              <a:buClr>
+                <a:srgbClr val="000000"/>
+              </a:buClr>
+              <a:buSzPts val="1400"/>
+              <a:buFont typeface="Arial"/>
               <a:buNone/>
             </a:pPr>
             <a:r>
               <a:t/>
             </a:r>
-            <a:endParaRPr/>
+            <a:endParaRPr b="0" i="0" sz="1400" u="none" cap="none" strike="noStrike">
+              <a:solidFill>
+                <a:srgbClr val="000000"/>
+              </a:solidFill>
+              <a:latin typeface="Arial"/>
+              <a:ea typeface="Arial"/>
+              <a:cs typeface="Arial"/>
+              <a:sym typeface="Arial"/>
+            </a:endParaRPr>
           </a:p>
         </p:txBody>
       </p:sp>
@@ -16535,6 +18435,9 @@
           <a:lstStyle/>
           <a:p>
             <a:pPr indent="0" lvl="0" marL="0" marR="0" rtl="0" algn="l">
+              <a:lnSpc>
+                <a:spcPct val="100000"/>
+              </a:lnSpc>
               <a:spcBef>
                 <a:spcPts val="0"/>
               </a:spcBef>
@@ -16605,19 +18508,35 @@
           </a:bodyPr>
           <a:lstStyle/>
           <a:p>
-            <a:pPr indent="0" lvl="0" marL="0" rtl="0" algn="l">
-              <a:spcBef>
-                <a:spcPts val="0"/>
-              </a:spcBef>
-              <a:spcAft>
-                <a:spcPts val="0"/>
-              </a:spcAft>
+            <a:pPr indent="0" lvl="0" marL="0" marR="0" rtl="0" algn="l">
+              <a:lnSpc>
+                <a:spcPct val="100000"/>
+              </a:lnSpc>
+              <a:spcBef>
+                <a:spcPts val="0"/>
+              </a:spcBef>
+              <a:spcAft>
+                <a:spcPts val="0"/>
+              </a:spcAft>
+              <a:buClr>
+                <a:srgbClr val="000000"/>
+              </a:buClr>
+              <a:buSzPts val="1400"/>
+              <a:buFont typeface="Arial"/>
               <a:buNone/>
             </a:pPr>
             <a:r>
               <a:t/>
             </a:r>
-            <a:endParaRPr/>
+            <a:endParaRPr b="0" i="0" sz="1400" u="none" cap="none" strike="noStrike">
+              <a:solidFill>
+                <a:srgbClr val="000000"/>
+              </a:solidFill>
+              <a:latin typeface="Arial"/>
+              <a:ea typeface="Arial"/>
+              <a:cs typeface="Arial"/>
+              <a:sym typeface="Arial"/>
+            </a:endParaRPr>
           </a:p>
         </p:txBody>
       </p:sp>
@@ -16647,6 +18566,9 @@
           <a:lstStyle/>
           <a:p>
             <a:pPr indent="0" lvl="0" marL="0" marR="0" rtl="0" algn="l">
+              <a:lnSpc>
+                <a:spcPct val="100000"/>
+              </a:lnSpc>
               <a:spcBef>
                 <a:spcPts val="0"/>
               </a:spcBef>
@@ -16710,6 +18632,9 @@
           <a:lstStyle/>
           <a:p>
             <a:pPr indent="0" lvl="0" marL="0" marR="0" rtl="0" algn="l">
+              <a:lnSpc>
+                <a:spcPct val="100000"/>
+              </a:lnSpc>
               <a:spcBef>
                 <a:spcPts val="0"/>
               </a:spcBef>
@@ -16780,19 +18705,35 @@
           </a:bodyPr>
           <a:lstStyle/>
           <a:p>
-            <a:pPr indent="0" lvl="0" marL="0" rtl="0" algn="l">
-              <a:spcBef>
-                <a:spcPts val="0"/>
-              </a:spcBef>
-              <a:spcAft>
-                <a:spcPts val="0"/>
-              </a:spcAft>
+            <a:pPr indent="0" lvl="0" marL="0" marR="0" rtl="0" algn="l">
+              <a:lnSpc>
+                <a:spcPct val="100000"/>
+              </a:lnSpc>
+              <a:spcBef>
+                <a:spcPts val="0"/>
+              </a:spcBef>
+              <a:spcAft>
+                <a:spcPts val="0"/>
+              </a:spcAft>
+              <a:buClr>
+                <a:srgbClr val="000000"/>
+              </a:buClr>
+              <a:buSzPts val="1400"/>
+              <a:buFont typeface="Arial"/>
               <a:buNone/>
             </a:pPr>
             <a:r>
               <a:t/>
             </a:r>
-            <a:endParaRPr/>
+            <a:endParaRPr b="0" i="0" sz="1400" u="none" cap="none" strike="noStrike">
+              <a:solidFill>
+                <a:srgbClr val="000000"/>
+              </a:solidFill>
+              <a:latin typeface="Arial"/>
+              <a:ea typeface="Arial"/>
+              <a:cs typeface="Arial"/>
+              <a:sym typeface="Arial"/>
+            </a:endParaRPr>
           </a:p>
         </p:txBody>
       </p:sp>
@@ -16822,6 +18763,9 @@
           <a:lstStyle/>
           <a:p>
             <a:pPr indent="0" lvl="0" marL="0" marR="0" rtl="0" algn="l">
+              <a:lnSpc>
+                <a:spcPct val="100000"/>
+              </a:lnSpc>
               <a:spcBef>
                 <a:spcPts val="0"/>
               </a:spcBef>
@@ -16885,6 +18829,9 @@
           <a:lstStyle/>
           <a:p>
             <a:pPr indent="0" lvl="0" marL="0" marR="0" rtl="0" algn="l">
+              <a:lnSpc>
+                <a:spcPct val="100000"/>
+              </a:lnSpc>
               <a:spcBef>
                 <a:spcPts val="0"/>
               </a:spcBef>
@@ -16955,19 +18902,35 @@
           </a:bodyPr>
           <a:lstStyle/>
           <a:p>
-            <a:pPr indent="0" lvl="0" marL="0" rtl="0" algn="l">
-              <a:spcBef>
-                <a:spcPts val="0"/>
-              </a:spcBef>
-              <a:spcAft>
-                <a:spcPts val="0"/>
-              </a:spcAft>
+            <a:pPr indent="0" lvl="0" marL="0" marR="0" rtl="0" algn="l">
+              <a:lnSpc>
+                <a:spcPct val="100000"/>
+              </a:lnSpc>
+              <a:spcBef>
+                <a:spcPts val="0"/>
+              </a:spcBef>
+              <a:spcAft>
+                <a:spcPts val="0"/>
+              </a:spcAft>
+              <a:buClr>
+                <a:srgbClr val="000000"/>
+              </a:buClr>
+              <a:buSzPts val="1400"/>
+              <a:buFont typeface="Arial"/>
               <a:buNone/>
             </a:pPr>
             <a:r>
               <a:t/>
             </a:r>
-            <a:endParaRPr/>
+            <a:endParaRPr b="0" i="0" sz="1400" u="none" cap="none" strike="noStrike">
+              <a:solidFill>
+                <a:srgbClr val="000000"/>
+              </a:solidFill>
+              <a:latin typeface="Arial"/>
+              <a:ea typeface="Arial"/>
+              <a:cs typeface="Arial"/>
+              <a:sym typeface="Arial"/>
+            </a:endParaRPr>
           </a:p>
         </p:txBody>
       </p:sp>
@@ -16997,6 +18960,9 @@
           <a:lstStyle/>
           <a:p>
             <a:pPr indent="0" lvl="0" marL="0" marR="0" rtl="0" algn="l">
+              <a:lnSpc>
+                <a:spcPct val="100000"/>
+              </a:lnSpc>
               <a:spcBef>
                 <a:spcPts val="0"/>
               </a:spcBef>
@@ -17060,6 +19026,9 @@
           <a:lstStyle/>
           <a:p>
             <a:pPr indent="0" lvl="0" marL="0" marR="0" rtl="0" algn="l">
+              <a:lnSpc>
+                <a:spcPct val="100000"/>
+              </a:lnSpc>
               <a:spcBef>
                 <a:spcPts val="0"/>
               </a:spcBef>
@@ -17130,19 +19099,35 @@
           </a:bodyPr>
           <a:lstStyle/>
           <a:p>
-            <a:pPr indent="0" lvl="0" marL="0" rtl="0" algn="l">
-              <a:spcBef>
-                <a:spcPts val="0"/>
-              </a:spcBef>
-              <a:spcAft>
-                <a:spcPts val="0"/>
-              </a:spcAft>
+            <a:pPr indent="0" lvl="0" marL="0" marR="0" rtl="0" algn="l">
+              <a:lnSpc>
+                <a:spcPct val="100000"/>
+              </a:lnSpc>
+              <a:spcBef>
+                <a:spcPts val="0"/>
+              </a:spcBef>
+              <a:spcAft>
+                <a:spcPts val="0"/>
+              </a:spcAft>
+              <a:buClr>
+                <a:srgbClr val="000000"/>
+              </a:buClr>
+              <a:buSzPts val="1400"/>
+              <a:buFont typeface="Arial"/>
               <a:buNone/>
             </a:pPr>
             <a:r>
               <a:t/>
             </a:r>
-            <a:endParaRPr/>
+            <a:endParaRPr b="0" i="0" sz="1400" u="none" cap="none" strike="noStrike">
+              <a:solidFill>
+                <a:srgbClr val="000000"/>
+              </a:solidFill>
+              <a:latin typeface="Arial"/>
+              <a:ea typeface="Arial"/>
+              <a:cs typeface="Arial"/>
+              <a:sym typeface="Arial"/>
+            </a:endParaRPr>
           </a:p>
         </p:txBody>
       </p:sp>
@@ -17172,6 +19157,9 @@
           <a:lstStyle/>
           <a:p>
             <a:pPr indent="0" lvl="0" marL="0" marR="0" rtl="0" algn="l">
+              <a:lnSpc>
+                <a:spcPct val="100000"/>
+              </a:lnSpc>
               <a:spcBef>
                 <a:spcPts val="0"/>
               </a:spcBef>
@@ -17235,6 +19223,9 @@
           <a:lstStyle/>
           <a:p>
             <a:pPr indent="0" lvl="0" marL="0" marR="0" rtl="0" algn="l">
+              <a:lnSpc>
+                <a:spcPct val="100000"/>
+              </a:lnSpc>
               <a:spcBef>
                 <a:spcPts val="0"/>
               </a:spcBef>
@@ -17305,19 +19296,35 @@
           </a:bodyPr>
           <a:lstStyle/>
           <a:p>
-            <a:pPr indent="0" lvl="0" marL="0" rtl="0" algn="l">
-              <a:spcBef>
-                <a:spcPts val="0"/>
-              </a:spcBef>
-              <a:spcAft>
-                <a:spcPts val="0"/>
-              </a:spcAft>
+            <a:pPr indent="0" lvl="0" marL="0" marR="0" rtl="0" algn="l">
+              <a:lnSpc>
+                <a:spcPct val="100000"/>
+              </a:lnSpc>
+              <a:spcBef>
+                <a:spcPts val="0"/>
+              </a:spcBef>
+              <a:spcAft>
+                <a:spcPts val="0"/>
+              </a:spcAft>
+              <a:buClr>
+                <a:srgbClr val="000000"/>
+              </a:buClr>
+              <a:buSzPts val="1400"/>
+              <a:buFont typeface="Arial"/>
               <a:buNone/>
             </a:pPr>
             <a:r>
               <a:t/>
             </a:r>
-            <a:endParaRPr/>
+            <a:endParaRPr b="0" i="0" sz="1400" u="none" cap="none" strike="noStrike">
+              <a:solidFill>
+                <a:srgbClr val="000000"/>
+              </a:solidFill>
+              <a:latin typeface="Arial"/>
+              <a:ea typeface="Arial"/>
+              <a:cs typeface="Arial"/>
+              <a:sym typeface="Arial"/>
+            </a:endParaRPr>
           </a:p>
         </p:txBody>
       </p:sp>
@@ -17347,6 +19354,9 @@
           <a:lstStyle/>
           <a:p>
             <a:pPr indent="0" lvl="0" marL="0" marR="0" rtl="0" algn="l">
+              <a:lnSpc>
+                <a:spcPct val="100000"/>
+              </a:lnSpc>
               <a:spcBef>
                 <a:spcPts val="0"/>
               </a:spcBef>
@@ -17410,6 +19420,9 @@
           <a:lstStyle/>
           <a:p>
             <a:pPr indent="0" lvl="0" marL="0" marR="0" rtl="0" algn="l">
+              <a:lnSpc>
+                <a:spcPct val="100000"/>
+              </a:lnSpc>
               <a:spcBef>
                 <a:spcPts val="0"/>
               </a:spcBef>
@@ -17487,19 +19500,35 @@
           </a:bodyPr>
           <a:lstStyle/>
           <a:p>
-            <a:pPr indent="0" lvl="0" marL="0" rtl="0" algn="l">
-              <a:spcBef>
-                <a:spcPts val="0"/>
-              </a:spcBef>
-              <a:spcAft>
-                <a:spcPts val="0"/>
-              </a:spcAft>
+            <a:pPr indent="0" lvl="0" marL="0" marR="0" rtl="0" algn="l">
+              <a:lnSpc>
+                <a:spcPct val="100000"/>
+              </a:lnSpc>
+              <a:spcBef>
+                <a:spcPts val="0"/>
+              </a:spcBef>
+              <a:spcAft>
+                <a:spcPts val="0"/>
+              </a:spcAft>
+              <a:buClr>
+                <a:srgbClr val="000000"/>
+              </a:buClr>
+              <a:buSzPts val="1400"/>
+              <a:buFont typeface="Arial"/>
               <a:buNone/>
             </a:pPr>
             <a:r>
               <a:t/>
             </a:r>
-            <a:endParaRPr/>
+            <a:endParaRPr b="0" i="0" sz="1400" u="none" cap="none" strike="noStrike">
+              <a:solidFill>
+                <a:srgbClr val="000000"/>
+              </a:solidFill>
+              <a:latin typeface="Arial"/>
+              <a:ea typeface="Arial"/>
+              <a:cs typeface="Arial"/>
+              <a:sym typeface="Arial"/>
+            </a:endParaRPr>
           </a:p>
         </p:txBody>
       </p:sp>
@@ -17529,6 +19558,9 @@
           <a:lstStyle/>
           <a:p>
             <a:pPr indent="0" lvl="0" marL="0" marR="0" rtl="0" algn="ctr">
+              <a:lnSpc>
+                <a:spcPct val="100000"/>
+              </a:lnSpc>
               <a:spcBef>
                 <a:spcPts val="0"/>
               </a:spcBef>
@@ -17606,19 +19638,35 @@
           </a:bodyPr>
           <a:lstStyle/>
           <a:p>
-            <a:pPr indent="0" lvl="0" marL="0" rtl="0" algn="l">
-              <a:spcBef>
-                <a:spcPts val="0"/>
-              </a:spcBef>
-              <a:spcAft>
-                <a:spcPts val="0"/>
-              </a:spcAft>
+            <a:pPr indent="0" lvl="0" marL="0" marR="0" rtl="0" algn="l">
+              <a:lnSpc>
+                <a:spcPct val="100000"/>
+              </a:lnSpc>
+              <a:spcBef>
+                <a:spcPts val="0"/>
+              </a:spcBef>
+              <a:spcAft>
+                <a:spcPts val="0"/>
+              </a:spcAft>
+              <a:buClr>
+                <a:srgbClr val="000000"/>
+              </a:buClr>
+              <a:buSzPts val="1400"/>
+              <a:buFont typeface="Arial"/>
               <a:buNone/>
             </a:pPr>
             <a:r>
               <a:t/>
             </a:r>
-            <a:endParaRPr/>
+            <a:endParaRPr b="0" i="0" sz="1400" u="none" cap="none" strike="noStrike">
+              <a:solidFill>
+                <a:srgbClr val="000000"/>
+              </a:solidFill>
+              <a:latin typeface="Arial"/>
+              <a:ea typeface="Arial"/>
+              <a:cs typeface="Arial"/>
+              <a:sym typeface="Arial"/>
+            </a:endParaRPr>
           </a:p>
         </p:txBody>
       </p:sp>
@@ -17648,6 +19696,9 @@
           <a:lstStyle/>
           <a:p>
             <a:pPr indent="0" lvl="0" marL="0" marR="0" rtl="0" algn="ctr">
+              <a:lnSpc>
+                <a:spcPct val="100000"/>
+              </a:lnSpc>
               <a:spcBef>
                 <a:spcPts val="0"/>
               </a:spcBef>
@@ -17725,19 +19776,35 @@
           </a:bodyPr>
           <a:lstStyle/>
           <a:p>
-            <a:pPr indent="0" lvl="0" marL="0" rtl="0" algn="l">
-              <a:spcBef>
-                <a:spcPts val="0"/>
-              </a:spcBef>
-              <a:spcAft>
-                <a:spcPts val="0"/>
-              </a:spcAft>
+            <a:pPr indent="0" lvl="0" marL="0" marR="0" rtl="0" algn="l">
+              <a:lnSpc>
+                <a:spcPct val="100000"/>
+              </a:lnSpc>
+              <a:spcBef>
+                <a:spcPts val="0"/>
+              </a:spcBef>
+              <a:spcAft>
+                <a:spcPts val="0"/>
+              </a:spcAft>
+              <a:buClr>
+                <a:srgbClr val="000000"/>
+              </a:buClr>
+              <a:buSzPts val="1400"/>
+              <a:buFont typeface="Arial"/>
               <a:buNone/>
             </a:pPr>
             <a:r>
               <a:t/>
             </a:r>
-            <a:endParaRPr/>
+            <a:endParaRPr b="0" i="0" sz="1400" u="none" cap="none" strike="noStrike">
+              <a:solidFill>
+                <a:srgbClr val="000000"/>
+              </a:solidFill>
+              <a:latin typeface="Arial"/>
+              <a:ea typeface="Arial"/>
+              <a:cs typeface="Arial"/>
+              <a:sym typeface="Arial"/>
+            </a:endParaRPr>
           </a:p>
         </p:txBody>
       </p:sp>
@@ -17767,6 +19834,9 @@
           <a:lstStyle/>
           <a:p>
             <a:pPr indent="0" lvl="0" marL="0" marR="0" rtl="0" algn="ctr">
+              <a:lnSpc>
+                <a:spcPct val="100000"/>
+              </a:lnSpc>
               <a:spcBef>
                 <a:spcPts val="0"/>
               </a:spcBef>
@@ -17844,19 +19914,35 @@
           </a:bodyPr>
           <a:lstStyle/>
           <a:p>
-            <a:pPr indent="0" lvl="0" marL="0" rtl="0" algn="l">
-              <a:spcBef>
-                <a:spcPts val="0"/>
-              </a:spcBef>
-              <a:spcAft>
-                <a:spcPts val="0"/>
-              </a:spcAft>
+            <a:pPr indent="0" lvl="0" marL="0" marR="0" rtl="0" algn="l">
+              <a:lnSpc>
+                <a:spcPct val="100000"/>
+              </a:lnSpc>
+              <a:spcBef>
+                <a:spcPts val="0"/>
+              </a:spcBef>
+              <a:spcAft>
+                <a:spcPts val="0"/>
+              </a:spcAft>
+              <a:buClr>
+                <a:srgbClr val="000000"/>
+              </a:buClr>
+              <a:buSzPts val="1400"/>
+              <a:buFont typeface="Arial"/>
               <a:buNone/>
             </a:pPr>
             <a:r>
               <a:t/>
             </a:r>
-            <a:endParaRPr/>
+            <a:endParaRPr b="0" i="0" sz="1400" u="none" cap="none" strike="noStrike">
+              <a:solidFill>
+                <a:srgbClr val="000000"/>
+              </a:solidFill>
+              <a:latin typeface="Arial"/>
+              <a:ea typeface="Arial"/>
+              <a:cs typeface="Arial"/>
+              <a:sym typeface="Arial"/>
+            </a:endParaRPr>
           </a:p>
         </p:txBody>
       </p:sp>
@@ -17886,6 +19972,9 @@
           <a:lstStyle/>
           <a:p>
             <a:pPr indent="0" lvl="0" marL="0" marR="0" rtl="0" algn="ctr">
+              <a:lnSpc>
+                <a:spcPct val="100000"/>
+              </a:lnSpc>
               <a:spcBef>
                 <a:spcPts val="0"/>
               </a:spcBef>
@@ -18027,6 +20116,9 @@
           <a:lstStyle/>
           <a:p>
             <a:pPr indent="0" lvl="0" marL="0" marR="0" rtl="0" algn="l">
+              <a:lnSpc>
+                <a:spcPct val="100000"/>
+              </a:lnSpc>
               <a:spcBef>
                 <a:spcPts val="0"/>
               </a:spcBef>
@@ -18097,19 +20189,35 @@
           </a:bodyPr>
           <a:lstStyle/>
           <a:p>
-            <a:pPr indent="0" lvl="0" marL="0" rtl="0" algn="l">
-              <a:spcBef>
-                <a:spcPts val="0"/>
-              </a:spcBef>
-              <a:spcAft>
-                <a:spcPts val="0"/>
-              </a:spcAft>
+            <a:pPr indent="0" lvl="0" marL="0" marR="0" rtl="0" algn="l">
+              <a:lnSpc>
+                <a:spcPct val="100000"/>
+              </a:lnSpc>
+              <a:spcBef>
+                <a:spcPts val="0"/>
+              </a:spcBef>
+              <a:spcAft>
+                <a:spcPts val="0"/>
+              </a:spcAft>
+              <a:buClr>
+                <a:srgbClr val="000000"/>
+              </a:buClr>
+              <a:buSzPts val="1400"/>
+              <a:buFont typeface="Arial"/>
               <a:buNone/>
             </a:pPr>
             <a:r>
               <a:t/>
             </a:r>
-            <a:endParaRPr/>
+            <a:endParaRPr b="0" i="0" sz="1400" u="none" cap="none" strike="noStrike">
+              <a:solidFill>
+                <a:srgbClr val="000000"/>
+              </a:solidFill>
+              <a:latin typeface="Arial"/>
+              <a:ea typeface="Arial"/>
+              <a:cs typeface="Arial"/>
+              <a:sym typeface="Arial"/>
+            </a:endParaRPr>
           </a:p>
         </p:txBody>
       </p:sp>
@@ -18139,6 +20247,9 @@
           <a:lstStyle/>
           <a:p>
             <a:pPr indent="0" lvl="0" marL="0" marR="0" rtl="0" algn="ctr">
+              <a:lnSpc>
+                <a:spcPct val="100000"/>
+              </a:lnSpc>
               <a:spcBef>
                 <a:spcPts val="0"/>
               </a:spcBef>
@@ -18209,19 +20320,35 @@
           </a:bodyPr>
           <a:lstStyle/>
           <a:p>
-            <a:pPr indent="0" lvl="0" marL="0" rtl="0" algn="l">
-              <a:spcBef>
-                <a:spcPts val="0"/>
-              </a:spcBef>
-              <a:spcAft>
-                <a:spcPts val="0"/>
-              </a:spcAft>
+            <a:pPr indent="0" lvl="0" marL="0" marR="0" rtl="0" algn="l">
+              <a:lnSpc>
+                <a:spcPct val="100000"/>
+              </a:lnSpc>
+              <a:spcBef>
+                <a:spcPts val="0"/>
+              </a:spcBef>
+              <a:spcAft>
+                <a:spcPts val="0"/>
+              </a:spcAft>
+              <a:buClr>
+                <a:srgbClr val="000000"/>
+              </a:buClr>
+              <a:buSzPts val="1400"/>
+              <a:buFont typeface="Arial"/>
               <a:buNone/>
             </a:pPr>
             <a:r>
               <a:t/>
             </a:r>
-            <a:endParaRPr/>
+            <a:endParaRPr b="0" i="0" sz="1400" u="none" cap="none" strike="noStrike">
+              <a:solidFill>
+                <a:srgbClr val="000000"/>
+              </a:solidFill>
+              <a:latin typeface="Arial"/>
+              <a:ea typeface="Arial"/>
+              <a:cs typeface="Arial"/>
+              <a:sym typeface="Arial"/>
+            </a:endParaRPr>
           </a:p>
         </p:txBody>
       </p:sp>
@@ -18251,6 +20378,9 @@
           <a:lstStyle/>
           <a:p>
             <a:pPr indent="0" lvl="0" marL="0" marR="0" rtl="0" algn="ctr">
+              <a:lnSpc>
+                <a:spcPct val="100000"/>
+              </a:lnSpc>
               <a:spcBef>
                 <a:spcPts val="0"/>
               </a:spcBef>
@@ -18321,19 +20451,35 @@
           </a:bodyPr>
           <a:lstStyle/>
           <a:p>
-            <a:pPr indent="0" lvl="0" marL="0" rtl="0" algn="l">
-              <a:spcBef>
-                <a:spcPts val="0"/>
-              </a:spcBef>
-              <a:spcAft>
-                <a:spcPts val="0"/>
-              </a:spcAft>
+            <a:pPr indent="0" lvl="0" marL="0" marR="0" rtl="0" algn="l">
+              <a:lnSpc>
+                <a:spcPct val="100000"/>
+              </a:lnSpc>
+              <a:spcBef>
+                <a:spcPts val="0"/>
+              </a:spcBef>
+              <a:spcAft>
+                <a:spcPts val="0"/>
+              </a:spcAft>
+              <a:buClr>
+                <a:srgbClr val="000000"/>
+              </a:buClr>
+              <a:buSzPts val="1400"/>
+              <a:buFont typeface="Arial"/>
               <a:buNone/>
             </a:pPr>
             <a:r>
               <a:t/>
             </a:r>
-            <a:endParaRPr/>
+            <a:endParaRPr b="0" i="0" sz="1400" u="none" cap="none" strike="noStrike">
+              <a:solidFill>
+                <a:srgbClr val="000000"/>
+              </a:solidFill>
+              <a:latin typeface="Arial"/>
+              <a:ea typeface="Arial"/>
+              <a:cs typeface="Arial"/>
+              <a:sym typeface="Arial"/>
+            </a:endParaRPr>
           </a:p>
         </p:txBody>
       </p:sp>
@@ -18363,6 +20509,9 @@
           <a:lstStyle/>
           <a:p>
             <a:pPr indent="0" lvl="0" marL="0" marR="0" rtl="0" algn="ctr">
+              <a:lnSpc>
+                <a:spcPct val="100000"/>
+              </a:lnSpc>
               <a:spcBef>
                 <a:spcPts val="0"/>
               </a:spcBef>
@@ -18433,19 +20582,35 @@
           </a:bodyPr>
           <a:lstStyle/>
           <a:p>
-            <a:pPr indent="0" lvl="0" marL="0" rtl="0" algn="l">
-              <a:spcBef>
-                <a:spcPts val="0"/>
-              </a:spcBef>
-              <a:spcAft>
-                <a:spcPts val="0"/>
-              </a:spcAft>
+            <a:pPr indent="0" lvl="0" marL="0" marR="0" rtl="0" algn="l">
+              <a:lnSpc>
+                <a:spcPct val="100000"/>
+              </a:lnSpc>
+              <a:spcBef>
+                <a:spcPts val="0"/>
+              </a:spcBef>
+              <a:spcAft>
+                <a:spcPts val="0"/>
+              </a:spcAft>
+              <a:buClr>
+                <a:srgbClr val="000000"/>
+              </a:buClr>
+              <a:buSzPts val="1400"/>
+              <a:buFont typeface="Arial"/>
               <a:buNone/>
             </a:pPr>
             <a:r>
               <a:t/>
             </a:r>
-            <a:endParaRPr/>
+            <a:endParaRPr b="0" i="0" sz="1400" u="none" cap="none" strike="noStrike">
+              <a:solidFill>
+                <a:srgbClr val="000000"/>
+              </a:solidFill>
+              <a:latin typeface="Arial"/>
+              <a:ea typeface="Arial"/>
+              <a:cs typeface="Arial"/>
+              <a:sym typeface="Arial"/>
+            </a:endParaRPr>
           </a:p>
         </p:txBody>
       </p:sp>
@@ -18475,6 +20640,9 @@
           <a:lstStyle/>
           <a:p>
             <a:pPr indent="0" lvl="0" marL="0" marR="0" rtl="0" algn="ctr">
+              <a:lnSpc>
+                <a:spcPct val="100000"/>
+              </a:lnSpc>
               <a:spcBef>
                 <a:spcPts val="0"/>
               </a:spcBef>
@@ -18577,19 +20745,35 @@
           </a:bodyPr>
           <a:lstStyle/>
           <a:p>
-            <a:pPr indent="0" lvl="0" marL="0" rtl="0" algn="l">
-              <a:spcBef>
-                <a:spcPts val="0"/>
-              </a:spcBef>
-              <a:spcAft>
-                <a:spcPts val="0"/>
-              </a:spcAft>
+            <a:pPr indent="0" lvl="0" marL="0" marR="0" rtl="0" algn="l">
+              <a:lnSpc>
+                <a:spcPct val="100000"/>
+              </a:lnSpc>
+              <a:spcBef>
+                <a:spcPts val="0"/>
+              </a:spcBef>
+              <a:spcAft>
+                <a:spcPts val="0"/>
+              </a:spcAft>
+              <a:buClr>
+                <a:srgbClr val="000000"/>
+              </a:buClr>
+              <a:buSzPts val="1400"/>
+              <a:buFont typeface="Arial"/>
               <a:buNone/>
             </a:pPr>
             <a:r>
               <a:t/>
             </a:r>
-            <a:endParaRPr/>
+            <a:endParaRPr b="0" i="0" sz="1400" u="none" cap="none" strike="noStrike">
+              <a:solidFill>
+                <a:srgbClr val="000000"/>
+              </a:solidFill>
+              <a:latin typeface="Arial"/>
+              <a:ea typeface="Arial"/>
+              <a:cs typeface="Arial"/>
+              <a:sym typeface="Arial"/>
+            </a:endParaRPr>
           </a:p>
         </p:txBody>
       </p:sp>
@@ -18619,6 +20803,9 @@
           <a:lstStyle/>
           <a:p>
             <a:pPr indent="0" lvl="0" marL="0" marR="0" rtl="0" algn="l">
+              <a:lnSpc>
+                <a:spcPct val="100000"/>
+              </a:lnSpc>
               <a:spcBef>
                 <a:spcPts val="0"/>
               </a:spcBef>
@@ -18682,6 +20869,9 @@
           <a:lstStyle/>
           <a:p>
             <a:pPr indent="0" lvl="0" marL="0" marR="0" rtl="0" algn="l">
+              <a:lnSpc>
+                <a:spcPct val="100000"/>
+              </a:lnSpc>
               <a:spcBef>
                 <a:spcPts val="0"/>
               </a:spcBef>
@@ -18745,6 +20935,9 @@
           <a:lstStyle/>
           <a:p>
             <a:pPr indent="0" lvl="0" marL="0" marR="0" rtl="0" algn="l">
+              <a:lnSpc>
+                <a:spcPct val="100000"/>
+              </a:lnSpc>
               <a:spcBef>
                 <a:spcPts val="0"/>
               </a:spcBef>
@@ -18822,19 +21015,35 @@
           </a:bodyPr>
           <a:lstStyle/>
           <a:p>
-            <a:pPr indent="0" lvl="0" marL="0" rtl="0" algn="l">
-              <a:spcBef>
-                <a:spcPts val="0"/>
-              </a:spcBef>
-              <a:spcAft>
-                <a:spcPts val="0"/>
-              </a:spcAft>
+            <a:pPr indent="0" lvl="0" marL="0" marR="0" rtl="0" algn="l">
+              <a:lnSpc>
+                <a:spcPct val="100000"/>
+              </a:lnSpc>
+              <a:spcBef>
+                <a:spcPts val="0"/>
+              </a:spcBef>
+              <a:spcAft>
+                <a:spcPts val="0"/>
+              </a:spcAft>
+              <a:buClr>
+                <a:srgbClr val="000000"/>
+              </a:buClr>
+              <a:buSzPts val="1400"/>
+              <a:buFont typeface="Arial"/>
               <a:buNone/>
             </a:pPr>
             <a:r>
               <a:t/>
             </a:r>
-            <a:endParaRPr/>
+            <a:endParaRPr b="0" i="0" sz="1400" u="none" cap="none" strike="noStrike">
+              <a:solidFill>
+                <a:srgbClr val="000000"/>
+              </a:solidFill>
+              <a:latin typeface="Arial"/>
+              <a:ea typeface="Arial"/>
+              <a:cs typeface="Arial"/>
+              <a:sym typeface="Arial"/>
+            </a:endParaRPr>
           </a:p>
         </p:txBody>
       </p:sp>
@@ -18891,6 +21100,9 @@
           <a:lstStyle/>
           <a:p>
             <a:pPr indent="0" lvl="0" marL="0" marR="0" rtl="0" algn="l">
+              <a:lnSpc>
+                <a:spcPct val="100000"/>
+              </a:lnSpc>
               <a:spcBef>
                 <a:spcPts val="0"/>
               </a:spcBef>
@@ -18981,6 +21193,9 @@
           <a:lstStyle/>
           <a:p>
             <a:pPr indent="0" lvl="0" marL="0" marR="0" rtl="0" algn="l">
+              <a:lnSpc>
+                <a:spcPct val="100000"/>
+              </a:lnSpc>
               <a:spcBef>
                 <a:spcPts val="0"/>
               </a:spcBef>
@@ -19071,6 +21286,9 @@
           <a:lstStyle/>
           <a:p>
             <a:pPr indent="0" lvl="0" marL="0" marR="0" rtl="0" algn="l">
+              <a:lnSpc>
+                <a:spcPct val="100000"/>
+              </a:lnSpc>
               <a:spcBef>
                 <a:spcPts val="0"/>
               </a:spcBef>
@@ -19161,6 +21379,9 @@
           <a:lstStyle/>
           <a:p>
             <a:pPr indent="0" lvl="0" marL="0" marR="0" rtl="0" algn="l">
+              <a:lnSpc>
+                <a:spcPct val="100000"/>
+              </a:lnSpc>
               <a:spcBef>
                 <a:spcPts val="0"/>
               </a:spcBef>
@@ -19251,6 +21472,9 @@
           <a:lstStyle/>
           <a:p>
             <a:pPr indent="0" lvl="0" marL="0" marR="0" rtl="0" algn="l">
+              <a:lnSpc>
+                <a:spcPct val="100000"/>
+              </a:lnSpc>
               <a:spcBef>
                 <a:spcPts val="0"/>
               </a:spcBef>
@@ -19341,6 +21565,9 @@
           <a:lstStyle/>
           <a:p>
             <a:pPr indent="0" lvl="0" marL="0" marR="0" rtl="0" algn="l">
+              <a:lnSpc>
+                <a:spcPct val="100000"/>
+              </a:lnSpc>
               <a:spcBef>
                 <a:spcPts val="0"/>
               </a:spcBef>
@@ -19418,19 +21645,35 @@
           </a:bodyPr>
           <a:lstStyle/>
           <a:p>
-            <a:pPr indent="0" lvl="0" marL="0" rtl="0" algn="l">
-              <a:spcBef>
-                <a:spcPts val="0"/>
-              </a:spcBef>
-              <a:spcAft>
-                <a:spcPts val="0"/>
-              </a:spcAft>
+            <a:pPr indent="0" lvl="0" marL="0" marR="0" rtl="0" algn="l">
+              <a:lnSpc>
+                <a:spcPct val="100000"/>
+              </a:lnSpc>
+              <a:spcBef>
+                <a:spcPts val="0"/>
+              </a:spcBef>
+              <a:spcAft>
+                <a:spcPts val="0"/>
+              </a:spcAft>
+              <a:buClr>
+                <a:srgbClr val="000000"/>
+              </a:buClr>
+              <a:buSzPts val="1400"/>
+              <a:buFont typeface="Arial"/>
               <a:buNone/>
             </a:pPr>
             <a:r>
               <a:t/>
             </a:r>
-            <a:endParaRPr/>
+            <a:endParaRPr b="0" i="0" sz="1400" u="none" cap="none" strike="noStrike">
+              <a:solidFill>
+                <a:srgbClr val="000000"/>
+              </a:solidFill>
+              <a:latin typeface="Arial"/>
+              <a:ea typeface="Arial"/>
+              <a:cs typeface="Arial"/>
+              <a:sym typeface="Arial"/>
+            </a:endParaRPr>
           </a:p>
         </p:txBody>
       </p:sp>
@@ -19487,6 +21730,9 @@
           <a:lstStyle/>
           <a:p>
             <a:pPr indent="0" lvl="0" marL="0" marR="0" rtl="0" algn="l">
+              <a:lnSpc>
+                <a:spcPct val="100000"/>
+              </a:lnSpc>
               <a:spcBef>
                 <a:spcPts val="0"/>
               </a:spcBef>
@@ -19577,6 +21823,9 @@
           <a:lstStyle/>
           <a:p>
             <a:pPr indent="0" lvl="0" marL="0" marR="0" rtl="0" algn="l">
+              <a:lnSpc>
+                <a:spcPct val="100000"/>
+              </a:lnSpc>
               <a:spcBef>
                 <a:spcPts val="0"/>
               </a:spcBef>
@@ -19667,6 +21916,9 @@
           <a:lstStyle/>
           <a:p>
             <a:pPr indent="0" lvl="0" marL="0" marR="0" rtl="0" algn="l">
+              <a:lnSpc>
+                <a:spcPct val="100000"/>
+              </a:lnSpc>
               <a:spcBef>
                 <a:spcPts val="0"/>
               </a:spcBef>
@@ -19757,6 +22009,9 @@
           <a:lstStyle/>
           <a:p>
             <a:pPr indent="0" lvl="0" marL="0" marR="0" rtl="0" algn="l">
+              <a:lnSpc>
+                <a:spcPct val="100000"/>
+              </a:lnSpc>
               <a:spcBef>
                 <a:spcPts val="0"/>
               </a:spcBef>
@@ -19847,6 +22102,9 @@
           <a:lstStyle/>
           <a:p>
             <a:pPr indent="0" lvl="0" marL="0" marR="0" rtl="0" algn="l">
+              <a:lnSpc>
+                <a:spcPct val="100000"/>
+              </a:lnSpc>
               <a:spcBef>
                 <a:spcPts val="0"/>
               </a:spcBef>
@@ -19937,6 +22195,9 @@
           <a:lstStyle/>
           <a:p>
             <a:pPr indent="0" lvl="0" marL="0" marR="0" rtl="0" algn="l">
+              <a:lnSpc>
+                <a:spcPct val="100000"/>
+              </a:lnSpc>
               <a:spcBef>
                 <a:spcPts val="0"/>
               </a:spcBef>
@@ -20027,6 +22288,9 @@
           <a:lstStyle/>
           <a:p>
             <a:pPr indent="0" lvl="0" marL="0" marR="0" rtl="0" algn="l">
+              <a:lnSpc>
+                <a:spcPct val="100000"/>
+              </a:lnSpc>
               <a:spcBef>
                 <a:spcPts val="0"/>
               </a:spcBef>
@@ -20097,19 +22361,35 @@
           </a:bodyPr>
           <a:lstStyle/>
           <a:p>
-            <a:pPr indent="0" lvl="0" marL="0" rtl="0" algn="l">
-              <a:spcBef>
-                <a:spcPts val="0"/>
-              </a:spcBef>
-              <a:spcAft>
-                <a:spcPts val="0"/>
-              </a:spcAft>
+            <a:pPr indent="0" lvl="0" marL="0" marR="0" rtl="0" algn="l">
+              <a:lnSpc>
+                <a:spcPct val="100000"/>
+              </a:lnSpc>
+              <a:spcBef>
+                <a:spcPts val="0"/>
+              </a:spcBef>
+              <a:spcAft>
+                <a:spcPts val="0"/>
+              </a:spcAft>
+              <a:buClr>
+                <a:srgbClr val="000000"/>
+              </a:buClr>
+              <a:buSzPts val="1400"/>
+              <a:buFont typeface="Arial"/>
               <a:buNone/>
             </a:pPr>
             <a:r>
               <a:t/>
             </a:r>
-            <a:endParaRPr/>
+            <a:endParaRPr b="0" i="0" sz="1400" u="none" cap="none" strike="noStrike">
+              <a:solidFill>
+                <a:srgbClr val="000000"/>
+              </a:solidFill>
+              <a:latin typeface="Arial"/>
+              <a:ea typeface="Arial"/>
+              <a:cs typeface="Arial"/>
+              <a:sym typeface="Arial"/>
+            </a:endParaRPr>
           </a:p>
         </p:txBody>
       </p:sp>
@@ -20139,6 +22419,9 @@
           <a:lstStyle/>
           <a:p>
             <a:pPr indent="0" lvl="0" marL="0" marR="0" rtl="0" algn="l">
+              <a:lnSpc>
+                <a:spcPct val="100000"/>
+              </a:lnSpc>
               <a:spcBef>
                 <a:spcPts val="0"/>
               </a:spcBef>
@@ -20241,19 +22524,35 @@
           </a:bodyPr>
           <a:lstStyle/>
           <a:p>
-            <a:pPr indent="0" lvl="0" marL="0" rtl="0" algn="l">
-              <a:spcBef>
-                <a:spcPts val="0"/>
-              </a:spcBef>
-              <a:spcAft>
-                <a:spcPts val="0"/>
-              </a:spcAft>
+            <a:pPr indent="0" lvl="0" marL="0" marR="0" rtl="0" algn="l">
+              <a:lnSpc>
+                <a:spcPct val="100000"/>
+              </a:lnSpc>
+              <a:spcBef>
+                <a:spcPts val="0"/>
+              </a:spcBef>
+              <a:spcAft>
+                <a:spcPts val="0"/>
+              </a:spcAft>
+              <a:buClr>
+                <a:srgbClr val="000000"/>
+              </a:buClr>
+              <a:buSzPts val="1400"/>
+              <a:buFont typeface="Arial"/>
               <a:buNone/>
             </a:pPr>
             <a:r>
               <a:t/>
             </a:r>
-            <a:endParaRPr/>
+            <a:endParaRPr b="0" i="0" sz="1400" u="none" cap="none" strike="noStrike">
+              <a:solidFill>
+                <a:srgbClr val="000000"/>
+              </a:solidFill>
+              <a:latin typeface="Arial"/>
+              <a:ea typeface="Arial"/>
+              <a:cs typeface="Arial"/>
+              <a:sym typeface="Arial"/>
+            </a:endParaRPr>
           </a:p>
         </p:txBody>
       </p:sp>
@@ -20283,6 +22582,9 @@
           <a:lstStyle/>
           <a:p>
             <a:pPr indent="0" lvl="0" marL="0" marR="0" rtl="0" algn="l">
+              <a:lnSpc>
+                <a:spcPct val="100000"/>
+              </a:lnSpc>
               <a:spcBef>
                 <a:spcPts val="0"/>
               </a:spcBef>
@@ -20346,6 +22648,9 @@
           <a:lstStyle/>
           <a:p>
             <a:pPr indent="0" lvl="0" marL="0" marR="0" rtl="0" algn="l">
+              <a:lnSpc>
+                <a:spcPct val="100000"/>
+              </a:lnSpc>
               <a:spcBef>
                 <a:spcPts val="0"/>
               </a:spcBef>
@@ -20409,6 +22714,9 @@
           <a:lstStyle/>
           <a:p>
             <a:pPr indent="0" lvl="0" marL="0" marR="0" rtl="0" algn="l">
+              <a:lnSpc>
+                <a:spcPct val="100000"/>
+              </a:lnSpc>
               <a:spcBef>
                 <a:spcPts val="0"/>
               </a:spcBef>
@@ -20486,19 +22794,35 @@
           </a:bodyPr>
           <a:lstStyle/>
           <a:p>
-            <a:pPr indent="0" lvl="0" marL="0" rtl="0" algn="l">
-              <a:spcBef>
-                <a:spcPts val="0"/>
-              </a:spcBef>
-              <a:spcAft>
-                <a:spcPts val="0"/>
-              </a:spcAft>
+            <a:pPr indent="0" lvl="0" marL="0" marR="0" rtl="0" algn="l">
+              <a:lnSpc>
+                <a:spcPct val="100000"/>
+              </a:lnSpc>
+              <a:spcBef>
+                <a:spcPts val="0"/>
+              </a:spcBef>
+              <a:spcAft>
+                <a:spcPts val="0"/>
+              </a:spcAft>
+              <a:buClr>
+                <a:srgbClr val="000000"/>
+              </a:buClr>
+              <a:buSzPts val="1400"/>
+              <a:buFont typeface="Arial"/>
               <a:buNone/>
             </a:pPr>
             <a:r>
               <a:t/>
             </a:r>
-            <a:endParaRPr/>
+            <a:endParaRPr b="0" i="0" sz="1400" u="none" cap="none" strike="noStrike">
+              <a:solidFill>
+                <a:srgbClr val="000000"/>
+              </a:solidFill>
+              <a:latin typeface="Arial"/>
+              <a:ea typeface="Arial"/>
+              <a:cs typeface="Arial"/>
+              <a:sym typeface="Arial"/>
+            </a:endParaRPr>
           </a:p>
         </p:txBody>
       </p:sp>
@@ -20535,19 +22859,35 @@
           </a:bodyPr>
           <a:lstStyle/>
           <a:p>
-            <a:pPr indent="0" lvl="0" marL="0" rtl="0" algn="l">
-              <a:spcBef>
-                <a:spcPts val="0"/>
-              </a:spcBef>
-              <a:spcAft>
-                <a:spcPts val="0"/>
-              </a:spcAft>
+            <a:pPr indent="0" lvl="0" marL="0" marR="0" rtl="0" algn="l">
+              <a:lnSpc>
+                <a:spcPct val="100000"/>
+              </a:lnSpc>
+              <a:spcBef>
+                <a:spcPts val="0"/>
+              </a:spcBef>
+              <a:spcAft>
+                <a:spcPts val="0"/>
+              </a:spcAft>
+              <a:buClr>
+                <a:srgbClr val="000000"/>
+              </a:buClr>
+              <a:buSzPts val="1400"/>
+              <a:buFont typeface="Arial"/>
               <a:buNone/>
             </a:pPr>
             <a:r>
               <a:t/>
             </a:r>
-            <a:endParaRPr/>
+            <a:endParaRPr b="0" i="0" sz="1400" u="none" cap="none" strike="noStrike">
+              <a:solidFill>
+                <a:srgbClr val="000000"/>
+              </a:solidFill>
+              <a:latin typeface="Arial"/>
+              <a:ea typeface="Arial"/>
+              <a:cs typeface="Arial"/>
+              <a:sym typeface="Arial"/>
+            </a:endParaRPr>
           </a:p>
         </p:txBody>
       </p:sp>
@@ -20577,6 +22917,9 @@
           <a:lstStyle/>
           <a:p>
             <a:pPr indent="0" lvl="0" marL="0" marR="0" rtl="0" algn="ctr">
+              <a:lnSpc>
+                <a:spcPct val="100000"/>
+              </a:lnSpc>
               <a:spcBef>
                 <a:spcPts val="0"/>
               </a:spcBef>
@@ -20640,6 +22983,9 @@
           <a:lstStyle/>
           <a:p>
             <a:pPr indent="0" lvl="0" marL="0" marR="0" rtl="0" algn="l">
+              <a:lnSpc>
+                <a:spcPct val="100000"/>
+              </a:lnSpc>
               <a:spcBef>
                 <a:spcPts val="0"/>
               </a:spcBef>
@@ -20703,6 +23049,9 @@
           <a:lstStyle/>
           <a:p>
             <a:pPr indent="0" lvl="0" marL="0" marR="0" rtl="0" algn="l">
+              <a:lnSpc>
+                <a:spcPct val="100000"/>
+              </a:lnSpc>
               <a:spcBef>
                 <a:spcPts val="0"/>
               </a:spcBef>
@@ -20780,19 +23129,35 @@
           </a:bodyPr>
           <a:lstStyle/>
           <a:p>
-            <a:pPr indent="0" lvl="0" marL="0" rtl="0" algn="l">
-              <a:spcBef>
-                <a:spcPts val="0"/>
-              </a:spcBef>
-              <a:spcAft>
-                <a:spcPts val="0"/>
-              </a:spcAft>
+            <a:pPr indent="0" lvl="0" marL="0" marR="0" rtl="0" algn="l">
+              <a:lnSpc>
+                <a:spcPct val="100000"/>
+              </a:lnSpc>
+              <a:spcBef>
+                <a:spcPts val="0"/>
+              </a:spcBef>
+              <a:spcAft>
+                <a:spcPts val="0"/>
+              </a:spcAft>
+              <a:buClr>
+                <a:srgbClr val="000000"/>
+              </a:buClr>
+              <a:buSzPts val="1400"/>
+              <a:buFont typeface="Arial"/>
               <a:buNone/>
             </a:pPr>
             <a:r>
               <a:t/>
             </a:r>
-            <a:endParaRPr/>
+            <a:endParaRPr b="0" i="0" sz="1400" u="none" cap="none" strike="noStrike">
+              <a:solidFill>
+                <a:srgbClr val="000000"/>
+              </a:solidFill>
+              <a:latin typeface="Arial"/>
+              <a:ea typeface="Arial"/>
+              <a:cs typeface="Arial"/>
+              <a:sym typeface="Arial"/>
+            </a:endParaRPr>
           </a:p>
         </p:txBody>
       </p:sp>
@@ -20829,19 +23194,35 @@
           </a:bodyPr>
           <a:lstStyle/>
           <a:p>
-            <a:pPr indent="0" lvl="0" marL="0" rtl="0" algn="l">
-              <a:spcBef>
-                <a:spcPts val="0"/>
-              </a:spcBef>
-              <a:spcAft>
-                <a:spcPts val="0"/>
-              </a:spcAft>
+            <a:pPr indent="0" lvl="0" marL="0" marR="0" rtl="0" algn="l">
+              <a:lnSpc>
+                <a:spcPct val="100000"/>
+              </a:lnSpc>
+              <a:spcBef>
+                <a:spcPts val="0"/>
+              </a:spcBef>
+              <a:spcAft>
+                <a:spcPts val="0"/>
+              </a:spcAft>
+              <a:buClr>
+                <a:srgbClr val="000000"/>
+              </a:buClr>
+              <a:buSzPts val="1400"/>
+              <a:buFont typeface="Arial"/>
               <a:buNone/>
             </a:pPr>
             <a:r>
               <a:t/>
             </a:r>
-            <a:endParaRPr/>
+            <a:endParaRPr b="0" i="0" sz="1400" u="none" cap="none" strike="noStrike">
+              <a:solidFill>
+                <a:srgbClr val="000000"/>
+              </a:solidFill>
+              <a:latin typeface="Arial"/>
+              <a:ea typeface="Arial"/>
+              <a:cs typeface="Arial"/>
+              <a:sym typeface="Arial"/>
+            </a:endParaRPr>
           </a:p>
         </p:txBody>
       </p:sp>
@@ -20871,6 +23252,9 @@
           <a:lstStyle/>
           <a:p>
             <a:pPr indent="0" lvl="0" marL="0" marR="0" rtl="0" algn="ctr">
+              <a:lnSpc>
+                <a:spcPct val="100000"/>
+              </a:lnSpc>
               <a:spcBef>
                 <a:spcPts val="0"/>
               </a:spcBef>
@@ -20934,6 +23318,9 @@
           <a:lstStyle/>
           <a:p>
             <a:pPr indent="0" lvl="0" marL="0" marR="0" rtl="0" algn="l">
+              <a:lnSpc>
+                <a:spcPct val="100000"/>
+              </a:lnSpc>
               <a:spcBef>
                 <a:spcPts val="0"/>
               </a:spcBef>
@@ -20997,6 +23384,9 @@
           <a:lstStyle/>
           <a:p>
             <a:pPr indent="0" lvl="0" marL="0" marR="0" rtl="0" algn="l">
+              <a:lnSpc>
+                <a:spcPct val="100000"/>
+              </a:lnSpc>
               <a:spcBef>
                 <a:spcPts val="0"/>
               </a:spcBef>
@@ -21074,19 +23464,35 @@
           </a:bodyPr>
           <a:lstStyle/>
           <a:p>
-            <a:pPr indent="0" lvl="0" marL="0" rtl="0" algn="l">
-              <a:spcBef>
-                <a:spcPts val="0"/>
-              </a:spcBef>
-              <a:spcAft>
-                <a:spcPts val="0"/>
-              </a:spcAft>
+            <a:pPr indent="0" lvl="0" marL="0" marR="0" rtl="0" algn="l">
+              <a:lnSpc>
+                <a:spcPct val="100000"/>
+              </a:lnSpc>
+              <a:spcBef>
+                <a:spcPts val="0"/>
+              </a:spcBef>
+              <a:spcAft>
+                <a:spcPts val="0"/>
+              </a:spcAft>
+              <a:buClr>
+                <a:srgbClr val="000000"/>
+              </a:buClr>
+              <a:buSzPts val="1400"/>
+              <a:buFont typeface="Arial"/>
               <a:buNone/>
             </a:pPr>
             <a:r>
               <a:t/>
             </a:r>
-            <a:endParaRPr/>
+            <a:endParaRPr b="0" i="0" sz="1400" u="none" cap="none" strike="noStrike">
+              <a:solidFill>
+                <a:srgbClr val="000000"/>
+              </a:solidFill>
+              <a:latin typeface="Arial"/>
+              <a:ea typeface="Arial"/>
+              <a:cs typeface="Arial"/>
+              <a:sym typeface="Arial"/>
+            </a:endParaRPr>
           </a:p>
         </p:txBody>
       </p:sp>
@@ -21123,19 +23529,35 @@
           </a:bodyPr>
           <a:lstStyle/>
           <a:p>
-            <a:pPr indent="0" lvl="0" marL="0" rtl="0" algn="l">
-              <a:spcBef>
-                <a:spcPts val="0"/>
-              </a:spcBef>
-              <a:spcAft>
-                <a:spcPts val="0"/>
-              </a:spcAft>
+            <a:pPr indent="0" lvl="0" marL="0" marR="0" rtl="0" algn="l">
+              <a:lnSpc>
+                <a:spcPct val="100000"/>
+              </a:lnSpc>
+              <a:spcBef>
+                <a:spcPts val="0"/>
+              </a:spcBef>
+              <a:spcAft>
+                <a:spcPts val="0"/>
+              </a:spcAft>
+              <a:buClr>
+                <a:srgbClr val="000000"/>
+              </a:buClr>
+              <a:buSzPts val="1400"/>
+              <a:buFont typeface="Arial"/>
               <a:buNone/>
             </a:pPr>
             <a:r>
               <a:t/>
             </a:r>
-            <a:endParaRPr/>
+            <a:endParaRPr b="0" i="0" sz="1400" u="none" cap="none" strike="noStrike">
+              <a:solidFill>
+                <a:srgbClr val="000000"/>
+              </a:solidFill>
+              <a:latin typeface="Arial"/>
+              <a:ea typeface="Arial"/>
+              <a:cs typeface="Arial"/>
+              <a:sym typeface="Arial"/>
+            </a:endParaRPr>
           </a:p>
         </p:txBody>
       </p:sp>
@@ -21165,6 +23587,9 @@
           <a:lstStyle/>
           <a:p>
             <a:pPr indent="0" lvl="0" marL="0" marR="0" rtl="0" algn="ctr">
+              <a:lnSpc>
+                <a:spcPct val="100000"/>
+              </a:lnSpc>
               <a:spcBef>
                 <a:spcPts val="0"/>
               </a:spcBef>
@@ -21228,6 +23653,9 @@
           <a:lstStyle/>
           <a:p>
             <a:pPr indent="0" lvl="0" marL="0" marR="0" rtl="0" algn="l">
+              <a:lnSpc>
+                <a:spcPct val="100000"/>
+              </a:lnSpc>
               <a:spcBef>
                 <a:spcPts val="0"/>
               </a:spcBef>
@@ -21291,6 +23719,9 @@
           <a:lstStyle/>
           <a:p>
             <a:pPr indent="0" lvl="0" marL="0" marR="0" rtl="0" algn="l">
+              <a:lnSpc>
+                <a:spcPct val="100000"/>
+              </a:lnSpc>
               <a:spcBef>
                 <a:spcPts val="0"/>
               </a:spcBef>
@@ -21368,19 +23799,35 @@
           </a:bodyPr>
           <a:lstStyle/>
           <a:p>
-            <a:pPr indent="0" lvl="0" marL="0" rtl="0" algn="l">
-              <a:spcBef>
-                <a:spcPts val="0"/>
-              </a:spcBef>
-              <a:spcAft>
-                <a:spcPts val="0"/>
-              </a:spcAft>
+            <a:pPr indent="0" lvl="0" marL="0" marR="0" rtl="0" algn="l">
+              <a:lnSpc>
+                <a:spcPct val="100000"/>
+              </a:lnSpc>
+              <a:spcBef>
+                <a:spcPts val="0"/>
+              </a:spcBef>
+              <a:spcAft>
+                <a:spcPts val="0"/>
+              </a:spcAft>
+              <a:buClr>
+                <a:srgbClr val="000000"/>
+              </a:buClr>
+              <a:buSzPts val="1400"/>
+              <a:buFont typeface="Arial"/>
               <a:buNone/>
             </a:pPr>
             <a:r>
               <a:t/>
             </a:r>
-            <a:endParaRPr/>
+            <a:endParaRPr b="0" i="0" sz="1400" u="none" cap="none" strike="noStrike">
+              <a:solidFill>
+                <a:srgbClr val="000000"/>
+              </a:solidFill>
+              <a:latin typeface="Arial"/>
+              <a:ea typeface="Arial"/>
+              <a:cs typeface="Arial"/>
+              <a:sym typeface="Arial"/>
+            </a:endParaRPr>
           </a:p>
         </p:txBody>
       </p:sp>
@@ -21417,19 +23864,35 @@
           </a:bodyPr>
           <a:lstStyle/>
           <a:p>
-            <a:pPr indent="0" lvl="0" marL="0" rtl="0" algn="l">
-              <a:spcBef>
-                <a:spcPts val="0"/>
-              </a:spcBef>
-              <a:spcAft>
-                <a:spcPts val="0"/>
-              </a:spcAft>
+            <a:pPr indent="0" lvl="0" marL="0" marR="0" rtl="0" algn="l">
+              <a:lnSpc>
+                <a:spcPct val="100000"/>
+              </a:lnSpc>
+              <a:spcBef>
+                <a:spcPts val="0"/>
+              </a:spcBef>
+              <a:spcAft>
+                <a:spcPts val="0"/>
+              </a:spcAft>
+              <a:buClr>
+                <a:srgbClr val="000000"/>
+              </a:buClr>
+              <a:buSzPts val="1400"/>
+              <a:buFont typeface="Arial"/>
               <a:buNone/>
             </a:pPr>
             <a:r>
               <a:t/>
             </a:r>
-            <a:endParaRPr/>
+            <a:endParaRPr b="0" i="0" sz="1400" u="none" cap="none" strike="noStrike">
+              <a:solidFill>
+                <a:srgbClr val="000000"/>
+              </a:solidFill>
+              <a:latin typeface="Arial"/>
+              <a:ea typeface="Arial"/>
+              <a:cs typeface="Arial"/>
+              <a:sym typeface="Arial"/>
+            </a:endParaRPr>
           </a:p>
         </p:txBody>
       </p:sp>
@@ -21459,6 +23922,9 @@
           <a:lstStyle/>
           <a:p>
             <a:pPr indent="0" lvl="0" marL="0" marR="0" rtl="0" algn="ctr">
+              <a:lnSpc>
+                <a:spcPct val="100000"/>
+              </a:lnSpc>
               <a:spcBef>
                 <a:spcPts val="0"/>
               </a:spcBef>
@@ -21522,6 +23988,9 @@
           <a:lstStyle/>
           <a:p>
             <a:pPr indent="0" lvl="0" marL="0" marR="0" rtl="0" algn="l">
+              <a:lnSpc>
+                <a:spcPct val="100000"/>
+              </a:lnSpc>
               <a:spcBef>
                 <a:spcPts val="0"/>
               </a:spcBef>
@@ -21585,6 +24054,9 @@
           <a:lstStyle/>
           <a:p>
             <a:pPr indent="0" lvl="0" marL="0" marR="0" rtl="0" algn="l">
+              <a:lnSpc>
+                <a:spcPct val="100000"/>
+              </a:lnSpc>
               <a:spcBef>
                 <a:spcPts val="0"/>
               </a:spcBef>
@@ -21662,19 +24134,35 @@
           </a:bodyPr>
           <a:lstStyle/>
           <a:p>
-            <a:pPr indent="0" lvl="0" marL="0" rtl="0" algn="l">
-              <a:spcBef>
-                <a:spcPts val="0"/>
-              </a:spcBef>
-              <a:spcAft>
-                <a:spcPts val="0"/>
-              </a:spcAft>
+            <a:pPr indent="0" lvl="0" marL="0" marR="0" rtl="0" algn="l">
+              <a:lnSpc>
+                <a:spcPct val="100000"/>
+              </a:lnSpc>
+              <a:spcBef>
+                <a:spcPts val="0"/>
+              </a:spcBef>
+              <a:spcAft>
+                <a:spcPts val="0"/>
+              </a:spcAft>
+              <a:buClr>
+                <a:srgbClr val="000000"/>
+              </a:buClr>
+              <a:buSzPts val="1400"/>
+              <a:buFont typeface="Arial"/>
               <a:buNone/>
             </a:pPr>
             <a:r>
               <a:t/>
             </a:r>
-            <a:endParaRPr/>
+            <a:endParaRPr b="0" i="0" sz="1400" u="none" cap="none" strike="noStrike">
+              <a:solidFill>
+                <a:srgbClr val="000000"/>
+              </a:solidFill>
+              <a:latin typeface="Arial"/>
+              <a:ea typeface="Arial"/>
+              <a:cs typeface="Arial"/>
+              <a:sym typeface="Arial"/>
+            </a:endParaRPr>
           </a:p>
         </p:txBody>
       </p:sp>
@@ -21711,19 +24199,35 @@
           </a:bodyPr>
           <a:lstStyle/>
           <a:p>
-            <a:pPr indent="0" lvl="0" marL="0" rtl="0" algn="l">
-              <a:spcBef>
-                <a:spcPts val="0"/>
-              </a:spcBef>
-              <a:spcAft>
-                <a:spcPts val="0"/>
-              </a:spcAft>
+            <a:pPr indent="0" lvl="0" marL="0" marR="0" rtl="0" algn="l">
+              <a:lnSpc>
+                <a:spcPct val="100000"/>
+              </a:lnSpc>
+              <a:spcBef>
+                <a:spcPts val="0"/>
+              </a:spcBef>
+              <a:spcAft>
+                <a:spcPts val="0"/>
+              </a:spcAft>
+              <a:buClr>
+                <a:srgbClr val="000000"/>
+              </a:buClr>
+              <a:buSzPts val="1400"/>
+              <a:buFont typeface="Arial"/>
               <a:buNone/>
             </a:pPr>
             <a:r>
               <a:t/>
             </a:r>
-            <a:endParaRPr/>
+            <a:endParaRPr b="0" i="0" sz="1400" u="none" cap="none" strike="noStrike">
+              <a:solidFill>
+                <a:srgbClr val="000000"/>
+              </a:solidFill>
+              <a:latin typeface="Arial"/>
+              <a:ea typeface="Arial"/>
+              <a:cs typeface="Arial"/>
+              <a:sym typeface="Arial"/>
+            </a:endParaRPr>
           </a:p>
         </p:txBody>
       </p:sp>
@@ -21753,6 +24257,9 @@
           <a:lstStyle/>
           <a:p>
             <a:pPr indent="0" lvl="0" marL="0" marR="0" rtl="0" algn="ctr">
+              <a:lnSpc>
+                <a:spcPct val="100000"/>
+              </a:lnSpc>
               <a:spcBef>
                 <a:spcPts val="0"/>
               </a:spcBef>
@@ -21816,6 +24323,9 @@
           <a:lstStyle/>
           <a:p>
             <a:pPr indent="0" lvl="0" marL="0" marR="0" rtl="0" algn="l">
+              <a:lnSpc>
+                <a:spcPct val="100000"/>
+              </a:lnSpc>
               <a:spcBef>
                 <a:spcPts val="0"/>
               </a:spcBef>
@@ -21879,6 +24389,9 @@
           <a:lstStyle/>
           <a:p>
             <a:pPr indent="0" lvl="0" marL="0" marR="0" rtl="0" algn="l">
+              <a:lnSpc>
+                <a:spcPct val="100000"/>
+              </a:lnSpc>
               <a:spcBef>
                 <a:spcPts val="0"/>
               </a:spcBef>
@@ -21981,19 +24494,35 @@
           </a:bodyPr>
           <a:lstStyle/>
           <a:p>
-            <a:pPr indent="0" lvl="0" marL="0" rtl="0" algn="l">
-              <a:spcBef>
-                <a:spcPts val="0"/>
-              </a:spcBef>
-              <a:spcAft>
-                <a:spcPts val="0"/>
-              </a:spcAft>
+            <a:pPr indent="0" lvl="0" marL="0" marR="0" rtl="0" algn="l">
+              <a:lnSpc>
+                <a:spcPct val="100000"/>
+              </a:lnSpc>
+              <a:spcBef>
+                <a:spcPts val="0"/>
+              </a:spcBef>
+              <a:spcAft>
+                <a:spcPts val="0"/>
+              </a:spcAft>
+              <a:buClr>
+                <a:srgbClr val="000000"/>
+              </a:buClr>
+              <a:buSzPts val="1400"/>
+              <a:buFont typeface="Arial"/>
               <a:buNone/>
             </a:pPr>
             <a:r>
               <a:t/>
             </a:r>
-            <a:endParaRPr/>
+            <a:endParaRPr b="0" i="0" sz="1400" u="none" cap="none" strike="noStrike">
+              <a:solidFill>
+                <a:srgbClr val="000000"/>
+              </a:solidFill>
+              <a:latin typeface="Arial"/>
+              <a:ea typeface="Arial"/>
+              <a:cs typeface="Arial"/>
+              <a:sym typeface="Arial"/>
+            </a:endParaRPr>
           </a:p>
         </p:txBody>
       </p:sp>
@@ -22023,6 +24552,9 @@
           <a:lstStyle/>
           <a:p>
             <a:pPr indent="0" lvl="0" marL="0" marR="0" rtl="0" algn="l">
+              <a:lnSpc>
+                <a:spcPct val="100000"/>
+              </a:lnSpc>
               <a:spcBef>
                 <a:spcPts val="0"/>
               </a:spcBef>
@@ -22068,8 +24600,8 @@
         </p:nvSpPr>
         <p:spPr>
           <a:xfrm>
-            <a:off x="274320" y="475488"/>
-            <a:ext cx="8595360" cy="594360"/>
+            <a:off x="274320" y="384038"/>
+            <a:ext cx="8595300" cy="594300"/>
           </a:xfrm>
           <a:prstGeom prst="rect">
             <a:avLst/>
@@ -22086,6 +24618,9 @@
           <a:lstStyle/>
           <a:p>
             <a:pPr indent="0" lvl="0" marL="0" marR="0" rtl="0" algn="l">
+              <a:lnSpc>
+                <a:spcPct val="100000"/>
+              </a:lnSpc>
               <a:spcBef>
                 <a:spcPts val="0"/>
               </a:spcBef>
@@ -22131,8 +24666,8 @@
         </p:nvSpPr>
         <p:spPr>
           <a:xfrm>
-            <a:off x="274320" y="1097280"/>
-            <a:ext cx="8595360" cy="274320"/>
+            <a:off x="274345" y="946468"/>
+            <a:ext cx="8595300" cy="274200"/>
           </a:xfrm>
           <a:prstGeom prst="rect">
             <a:avLst/>
@@ -22149,6 +24684,9 @@
           <a:lstStyle/>
           <a:p>
             <a:pPr indent="0" lvl="0" marL="0" marR="0" rtl="0" algn="l">
+              <a:lnSpc>
+                <a:spcPct val="100000"/>
+              </a:lnSpc>
               <a:spcBef>
                 <a:spcPts val="0"/>
               </a:spcBef>
@@ -22201,7 +24739,7 @@
         </p:blipFill>
         <p:spPr>
           <a:xfrm>
-            <a:off x="256032" y="1188720"/>
+            <a:off x="164594" y="1280145"/>
             <a:ext cx="5577840" cy="3749040"/>
           </a:xfrm>
           <a:prstGeom prst="rect">
@@ -22253,19 +24791,35 @@
           </a:bodyPr>
           <a:lstStyle/>
           <a:p>
-            <a:pPr indent="0" lvl="0" marL="0" rtl="0" algn="l">
-              <a:spcBef>
-                <a:spcPts val="0"/>
-              </a:spcBef>
-              <a:spcAft>
-                <a:spcPts val="0"/>
-              </a:spcAft>
+            <a:pPr indent="0" lvl="0" marL="0" marR="0" rtl="0" algn="l">
+              <a:lnSpc>
+                <a:spcPct val="100000"/>
+              </a:lnSpc>
+              <a:spcBef>
+                <a:spcPts val="0"/>
+              </a:spcBef>
+              <a:spcAft>
+                <a:spcPts val="0"/>
+              </a:spcAft>
+              <a:buClr>
+                <a:srgbClr val="000000"/>
+              </a:buClr>
+              <a:buSzPts val="1400"/>
+              <a:buFont typeface="Arial"/>
               <a:buNone/>
             </a:pPr>
             <a:r>
               <a:t/>
             </a:r>
-            <a:endParaRPr/>
+            <a:endParaRPr b="0" i="0" sz="1400" u="none" cap="none" strike="noStrike">
+              <a:solidFill>
+                <a:srgbClr val="000000"/>
+              </a:solidFill>
+              <a:latin typeface="Arial"/>
+              <a:ea typeface="Arial"/>
+              <a:cs typeface="Arial"/>
+              <a:sym typeface="Arial"/>
+            </a:endParaRPr>
           </a:p>
         </p:txBody>
       </p:sp>
@@ -22295,6 +24849,9 @@
           <a:lstStyle/>
           <a:p>
             <a:pPr indent="0" lvl="0" marL="0" marR="0" rtl="0" algn="l">
+              <a:lnSpc>
+                <a:spcPct val="100000"/>
+              </a:lnSpc>
               <a:spcBef>
                 <a:spcPts val="0"/>
               </a:spcBef>
@@ -22385,6 +24942,9 @@
           <a:lstStyle/>
           <a:p>
             <a:pPr indent="0" lvl="0" marL="0" marR="0" rtl="0" algn="l">
+              <a:lnSpc>
+                <a:spcPct val="100000"/>
+              </a:lnSpc>
               <a:spcBef>
                 <a:spcPts val="0"/>
               </a:spcBef>
@@ -22448,6 +25008,9 @@
           <a:lstStyle/>
           <a:p>
             <a:pPr indent="0" lvl="0" marL="0" marR="0" rtl="0" algn="l">
+              <a:lnSpc>
+                <a:spcPct val="100000"/>
+              </a:lnSpc>
               <a:spcBef>
                 <a:spcPts val="0"/>
               </a:spcBef>
@@ -22538,6 +25101,9 @@
           <a:lstStyle/>
           <a:p>
             <a:pPr indent="0" lvl="0" marL="0" marR="0" rtl="0" algn="l">
+              <a:lnSpc>
+                <a:spcPct val="100000"/>
+              </a:lnSpc>
               <a:spcBef>
                 <a:spcPts val="0"/>
               </a:spcBef>
@@ -22601,6 +25167,9 @@
           <a:lstStyle/>
           <a:p>
             <a:pPr indent="0" lvl="0" marL="0" marR="0" rtl="0" algn="l">
+              <a:lnSpc>
+                <a:spcPct val="100000"/>
+              </a:lnSpc>
               <a:spcBef>
                 <a:spcPts val="0"/>
               </a:spcBef>
@@ -22691,6 +25260,9 @@
           <a:lstStyle/>
           <a:p>
             <a:pPr indent="0" lvl="0" marL="0" marR="0" rtl="0" algn="l">
+              <a:lnSpc>
+                <a:spcPct val="100000"/>
+              </a:lnSpc>
               <a:spcBef>
                 <a:spcPts val="0"/>
               </a:spcBef>
@@ -22754,6 +25326,9 @@
           <a:lstStyle/>
           <a:p>
             <a:pPr indent="0" lvl="0" marL="0" marR="0" rtl="0" algn="l">
+              <a:lnSpc>
+                <a:spcPct val="100000"/>
+              </a:lnSpc>
               <a:spcBef>
                 <a:spcPts val="0"/>
               </a:spcBef>
@@ -22844,6 +25419,9 @@
           <a:lstStyle/>
           <a:p>
             <a:pPr indent="0" lvl="0" marL="0" marR="0" rtl="0" algn="l">
+              <a:lnSpc>
+                <a:spcPct val="100000"/>
+              </a:lnSpc>
               <a:spcBef>
                 <a:spcPts val="0"/>
               </a:spcBef>
@@ -22907,6 +25485,9 @@
           <a:lstStyle/>
           <a:p>
             <a:pPr indent="0" lvl="0" marL="0" marR="0" rtl="0" algn="l">
+              <a:lnSpc>
+                <a:spcPct val="100000"/>
+              </a:lnSpc>
               <a:spcBef>
                 <a:spcPts val="0"/>
               </a:spcBef>
@@ -23009,19 +25590,35 @@
           </a:bodyPr>
           <a:lstStyle/>
           <a:p>
-            <a:pPr indent="0" lvl="0" marL="0" rtl="0" algn="l">
-              <a:spcBef>
-                <a:spcPts val="0"/>
-              </a:spcBef>
-              <a:spcAft>
-                <a:spcPts val="0"/>
-              </a:spcAft>
+            <a:pPr indent="0" lvl="0" marL="0" marR="0" rtl="0" algn="l">
+              <a:lnSpc>
+                <a:spcPct val="100000"/>
+              </a:lnSpc>
+              <a:spcBef>
+                <a:spcPts val="0"/>
+              </a:spcBef>
+              <a:spcAft>
+                <a:spcPts val="0"/>
+              </a:spcAft>
+              <a:buClr>
+                <a:srgbClr val="000000"/>
+              </a:buClr>
+              <a:buSzPts val="1400"/>
+              <a:buFont typeface="Arial"/>
               <a:buNone/>
             </a:pPr>
             <a:r>
               <a:t/>
             </a:r>
-            <a:endParaRPr/>
+            <a:endParaRPr b="0" i="0" sz="1400" u="none" cap="none" strike="noStrike">
+              <a:solidFill>
+                <a:srgbClr val="000000"/>
+              </a:solidFill>
+              <a:latin typeface="Arial"/>
+              <a:ea typeface="Arial"/>
+              <a:cs typeface="Arial"/>
+              <a:sym typeface="Arial"/>
+            </a:endParaRPr>
           </a:p>
         </p:txBody>
       </p:sp>
@@ -23051,6 +25648,9 @@
           <a:lstStyle/>
           <a:p>
             <a:pPr indent="0" lvl="0" marL="0" marR="0" rtl="0" algn="l">
+              <a:lnSpc>
+                <a:spcPct val="100000"/>
+              </a:lnSpc>
               <a:spcBef>
                 <a:spcPts val="0"/>
               </a:spcBef>
@@ -23114,6 +25714,9 @@
           <a:lstStyle/>
           <a:p>
             <a:pPr indent="0" lvl="0" marL="0" marR="0" rtl="0" algn="l">
+              <a:lnSpc>
+                <a:spcPct val="100000"/>
+              </a:lnSpc>
               <a:spcBef>
                 <a:spcPts val="0"/>
               </a:spcBef>
@@ -23177,6 +25780,9 @@
           <a:lstStyle/>
           <a:p>
             <a:pPr indent="0" lvl="0" marL="0" marR="0" rtl="0" algn="l">
+              <a:lnSpc>
+                <a:spcPct val="100000"/>
+              </a:lnSpc>
               <a:spcBef>
                 <a:spcPts val="0"/>
               </a:spcBef>
@@ -23281,19 +25887,35 @@
           </a:bodyPr>
           <a:lstStyle/>
           <a:p>
-            <a:pPr indent="0" lvl="0" marL="0" rtl="0" algn="l">
-              <a:spcBef>
-                <a:spcPts val="0"/>
-              </a:spcBef>
-              <a:spcAft>
-                <a:spcPts val="0"/>
-              </a:spcAft>
+            <a:pPr indent="0" lvl="0" marL="0" marR="0" rtl="0" algn="l">
+              <a:lnSpc>
+                <a:spcPct val="100000"/>
+              </a:lnSpc>
+              <a:spcBef>
+                <a:spcPts val="0"/>
+              </a:spcBef>
+              <a:spcAft>
+                <a:spcPts val="0"/>
+              </a:spcAft>
+              <a:buClr>
+                <a:srgbClr val="000000"/>
+              </a:buClr>
+              <a:buSzPts val="1400"/>
+              <a:buFont typeface="Arial"/>
               <a:buNone/>
             </a:pPr>
             <a:r>
               <a:t/>
             </a:r>
-            <a:endParaRPr/>
+            <a:endParaRPr b="0" i="0" sz="1400" u="none" cap="none" strike="noStrike">
+              <a:solidFill>
+                <a:srgbClr val="000000"/>
+              </a:solidFill>
+              <a:latin typeface="Arial"/>
+              <a:ea typeface="Arial"/>
+              <a:cs typeface="Arial"/>
+              <a:sym typeface="Arial"/>
+            </a:endParaRPr>
           </a:p>
         </p:txBody>
       </p:sp>
@@ -23323,6 +25945,9 @@
           <a:lstStyle/>
           <a:p>
             <a:pPr indent="0" lvl="0" marL="0" marR="0" rtl="0" algn="l">
+              <a:lnSpc>
+                <a:spcPct val="100000"/>
+              </a:lnSpc>
               <a:spcBef>
                 <a:spcPts val="0"/>
               </a:spcBef>
@@ -23386,6 +26011,9 @@
           <a:lstStyle/>
           <a:p>
             <a:pPr indent="0" lvl="0" marL="0" marR="0" rtl="0" algn="l">
+              <a:lnSpc>
+                <a:spcPct val="100000"/>
+              </a:lnSpc>
               <a:spcBef>
                 <a:spcPts val="0"/>
               </a:spcBef>
@@ -23463,19 +26091,35 @@
           </a:bodyPr>
           <a:lstStyle/>
           <a:p>
-            <a:pPr indent="0" lvl="0" marL="0" rtl="0" algn="l">
-              <a:spcBef>
-                <a:spcPts val="0"/>
-              </a:spcBef>
-              <a:spcAft>
-                <a:spcPts val="0"/>
-              </a:spcAft>
+            <a:pPr indent="0" lvl="0" marL="0" marR="0" rtl="0" algn="l">
+              <a:lnSpc>
+                <a:spcPct val="100000"/>
+              </a:lnSpc>
+              <a:spcBef>
+                <a:spcPts val="0"/>
+              </a:spcBef>
+              <a:spcAft>
+                <a:spcPts val="0"/>
+              </a:spcAft>
+              <a:buClr>
+                <a:srgbClr val="000000"/>
+              </a:buClr>
+              <a:buSzPts val="1400"/>
+              <a:buFont typeface="Arial"/>
               <a:buNone/>
             </a:pPr>
             <a:r>
               <a:t/>
             </a:r>
-            <a:endParaRPr/>
+            <a:endParaRPr b="0" i="0" sz="1400" u="none" cap="none" strike="noStrike">
+              <a:solidFill>
+                <a:srgbClr val="000000"/>
+              </a:solidFill>
+              <a:latin typeface="Arial"/>
+              <a:ea typeface="Arial"/>
+              <a:cs typeface="Arial"/>
+              <a:sym typeface="Arial"/>
+            </a:endParaRPr>
           </a:p>
         </p:txBody>
       </p:sp>
@@ -23505,6 +26149,9 @@
           <a:lstStyle/>
           <a:p>
             <a:pPr indent="0" lvl="0" marL="0" marR="0" rtl="0" algn="l">
+              <a:lnSpc>
+                <a:spcPct val="100000"/>
+              </a:lnSpc>
               <a:spcBef>
                 <a:spcPts val="0"/>
               </a:spcBef>
@@ -23568,6 +26215,9 @@
           <a:lstStyle/>
           <a:p>
             <a:pPr indent="0" lvl="0" marL="0" marR="0" rtl="0" algn="l">
+              <a:lnSpc>
+                <a:spcPct val="100000"/>
+              </a:lnSpc>
               <a:spcBef>
                 <a:spcPts val="0"/>
               </a:spcBef>
@@ -23645,19 +26295,35 @@
           </a:bodyPr>
           <a:lstStyle/>
           <a:p>
-            <a:pPr indent="0" lvl="0" marL="0" rtl="0" algn="l">
-              <a:spcBef>
-                <a:spcPts val="0"/>
-              </a:spcBef>
-              <a:spcAft>
-                <a:spcPts val="0"/>
-              </a:spcAft>
+            <a:pPr indent="0" lvl="0" marL="0" marR="0" rtl="0" algn="l">
+              <a:lnSpc>
+                <a:spcPct val="100000"/>
+              </a:lnSpc>
+              <a:spcBef>
+                <a:spcPts val="0"/>
+              </a:spcBef>
+              <a:spcAft>
+                <a:spcPts val="0"/>
+              </a:spcAft>
+              <a:buClr>
+                <a:srgbClr val="000000"/>
+              </a:buClr>
+              <a:buSzPts val="1400"/>
+              <a:buFont typeface="Arial"/>
               <a:buNone/>
             </a:pPr>
             <a:r>
               <a:t/>
             </a:r>
-            <a:endParaRPr/>
+            <a:endParaRPr b="0" i="0" sz="1400" u="none" cap="none" strike="noStrike">
+              <a:solidFill>
+                <a:srgbClr val="000000"/>
+              </a:solidFill>
+              <a:latin typeface="Arial"/>
+              <a:ea typeface="Arial"/>
+              <a:cs typeface="Arial"/>
+              <a:sym typeface="Arial"/>
+            </a:endParaRPr>
           </a:p>
         </p:txBody>
       </p:sp>
@@ -23687,6 +26353,9 @@
           <a:lstStyle/>
           <a:p>
             <a:pPr indent="0" lvl="0" marL="0" marR="0" rtl="0" algn="l">
+              <a:lnSpc>
+                <a:spcPct val="100000"/>
+              </a:lnSpc>
               <a:spcBef>
                 <a:spcPts val="0"/>
               </a:spcBef>
@@ -23750,6 +26419,9 @@
           <a:lstStyle/>
           <a:p>
             <a:pPr indent="0" lvl="0" marL="0" marR="0" rtl="0" algn="l">
+              <a:lnSpc>
+                <a:spcPct val="100000"/>
+              </a:lnSpc>
               <a:spcBef>
                 <a:spcPts val="0"/>
               </a:spcBef>
@@ -23852,19 +26524,35 @@
           </a:bodyPr>
           <a:lstStyle/>
           <a:p>
-            <a:pPr indent="0" lvl="0" marL="0" rtl="0" algn="l">
-              <a:spcBef>
-                <a:spcPts val="0"/>
-              </a:spcBef>
-              <a:spcAft>
-                <a:spcPts val="0"/>
-              </a:spcAft>
+            <a:pPr indent="0" lvl="0" marL="0" marR="0" rtl="0" algn="l">
+              <a:lnSpc>
+                <a:spcPct val="100000"/>
+              </a:lnSpc>
+              <a:spcBef>
+                <a:spcPts val="0"/>
+              </a:spcBef>
+              <a:spcAft>
+                <a:spcPts val="0"/>
+              </a:spcAft>
+              <a:buClr>
+                <a:srgbClr val="000000"/>
+              </a:buClr>
+              <a:buSzPts val="1400"/>
+              <a:buFont typeface="Arial"/>
               <a:buNone/>
             </a:pPr>
             <a:r>
               <a:t/>
             </a:r>
-            <a:endParaRPr/>
+            <a:endParaRPr b="0" i="0" sz="1400" u="none" cap="none" strike="noStrike">
+              <a:solidFill>
+                <a:srgbClr val="000000"/>
+              </a:solidFill>
+              <a:latin typeface="Arial"/>
+              <a:ea typeface="Arial"/>
+              <a:cs typeface="Arial"/>
+              <a:sym typeface="Arial"/>
+            </a:endParaRPr>
           </a:p>
         </p:txBody>
       </p:sp>
@@ -23894,6 +26582,9 @@
           <a:lstStyle/>
           <a:p>
             <a:pPr indent="0" lvl="0" marL="0" marR="0" rtl="0" algn="l">
+              <a:lnSpc>
+                <a:spcPct val="100000"/>
+              </a:lnSpc>
               <a:spcBef>
                 <a:spcPts val="0"/>
               </a:spcBef>
@@ -23957,6 +26648,9 @@
           <a:lstStyle/>
           <a:p>
             <a:pPr indent="0" lvl="0" marL="0" marR="0" rtl="0" algn="l">
+              <a:lnSpc>
+                <a:spcPct val="100000"/>
+              </a:lnSpc>
               <a:spcBef>
                 <a:spcPts val="0"/>
               </a:spcBef>
@@ -24020,6 +26714,9 @@
           <a:lstStyle/>
           <a:p>
             <a:pPr indent="0" lvl="0" marL="0" marR="0" rtl="0" algn="l">
+              <a:lnSpc>
+                <a:spcPct val="100000"/>
+              </a:lnSpc>
               <a:spcBef>
                 <a:spcPts val="0"/>
               </a:spcBef>
@@ -24072,8 +26769,8 @@
         </p:blipFill>
         <p:spPr>
           <a:xfrm>
-            <a:off x="256032" y="1188720"/>
-            <a:ext cx="5577840" cy="3749040"/>
+            <a:off x="288044" y="1069845"/>
+            <a:ext cx="5577840" cy="3749041"/>
           </a:xfrm>
           <a:prstGeom prst="rect">
             <a:avLst/>
@@ -24124,19 +26821,35 @@
           </a:bodyPr>
           <a:lstStyle/>
           <a:p>
-            <a:pPr indent="0" lvl="0" marL="0" rtl="0" algn="l">
-              <a:spcBef>
-                <a:spcPts val="0"/>
-              </a:spcBef>
-              <a:spcAft>
-                <a:spcPts val="0"/>
-              </a:spcAft>
+            <a:pPr indent="0" lvl="0" marL="0" marR="0" rtl="0" algn="l">
+              <a:lnSpc>
+                <a:spcPct val="100000"/>
+              </a:lnSpc>
+              <a:spcBef>
+                <a:spcPts val="0"/>
+              </a:spcBef>
+              <a:spcAft>
+                <a:spcPts val="0"/>
+              </a:spcAft>
+              <a:buClr>
+                <a:srgbClr val="000000"/>
+              </a:buClr>
+              <a:buSzPts val="1400"/>
+              <a:buFont typeface="Arial"/>
               <a:buNone/>
             </a:pPr>
             <a:r>
               <a:t/>
             </a:r>
-            <a:endParaRPr/>
+            <a:endParaRPr b="0" i="0" sz="1400" u="none" cap="none" strike="noStrike">
+              <a:solidFill>
+                <a:srgbClr val="000000"/>
+              </a:solidFill>
+              <a:latin typeface="Arial"/>
+              <a:ea typeface="Arial"/>
+              <a:cs typeface="Arial"/>
+              <a:sym typeface="Arial"/>
+            </a:endParaRPr>
           </a:p>
         </p:txBody>
       </p:sp>
@@ -24166,6 +26879,9 @@
           <a:lstStyle/>
           <a:p>
             <a:pPr indent="0" lvl="0" marL="0" marR="0" rtl="0" algn="ctr">
+              <a:lnSpc>
+                <a:spcPct val="100000"/>
+              </a:lnSpc>
               <a:spcBef>
                 <a:spcPts val="0"/>
               </a:spcBef>
@@ -24229,6 +26945,9 @@
           <a:lstStyle/>
           <a:p>
             <a:pPr indent="0" lvl="0" marL="0" marR="0" rtl="0" algn="ctr">
+              <a:lnSpc>
+                <a:spcPct val="100000"/>
+              </a:lnSpc>
               <a:spcBef>
                 <a:spcPts val="0"/>
               </a:spcBef>
@@ -24306,19 +27025,35 @@
           </a:bodyPr>
           <a:lstStyle/>
           <a:p>
-            <a:pPr indent="0" lvl="0" marL="0" rtl="0" algn="l">
-              <a:spcBef>
-                <a:spcPts val="0"/>
-              </a:spcBef>
-              <a:spcAft>
-                <a:spcPts val="0"/>
-              </a:spcAft>
+            <a:pPr indent="0" lvl="0" marL="0" marR="0" rtl="0" algn="l">
+              <a:lnSpc>
+                <a:spcPct val="100000"/>
+              </a:lnSpc>
+              <a:spcBef>
+                <a:spcPts val="0"/>
+              </a:spcBef>
+              <a:spcAft>
+                <a:spcPts val="0"/>
+              </a:spcAft>
+              <a:buClr>
+                <a:srgbClr val="000000"/>
+              </a:buClr>
+              <a:buSzPts val="1400"/>
+              <a:buFont typeface="Arial"/>
               <a:buNone/>
             </a:pPr>
             <a:r>
               <a:t/>
             </a:r>
-            <a:endParaRPr/>
+            <a:endParaRPr b="0" i="0" sz="1400" u="none" cap="none" strike="noStrike">
+              <a:solidFill>
+                <a:srgbClr val="000000"/>
+              </a:solidFill>
+              <a:latin typeface="Arial"/>
+              <a:ea typeface="Arial"/>
+              <a:cs typeface="Arial"/>
+              <a:sym typeface="Arial"/>
+            </a:endParaRPr>
           </a:p>
         </p:txBody>
       </p:sp>
@@ -24348,6 +27083,9 @@
           <a:lstStyle/>
           <a:p>
             <a:pPr indent="0" lvl="0" marL="0" marR="0" rtl="0" algn="ctr">
+              <a:lnSpc>
+                <a:spcPct val="100000"/>
+              </a:lnSpc>
               <a:spcBef>
                 <a:spcPts val="0"/>
               </a:spcBef>
@@ -24411,6 +27149,9 @@
           <a:lstStyle/>
           <a:p>
             <a:pPr indent="0" lvl="0" marL="0" marR="0" rtl="0" algn="ctr">
+              <a:lnSpc>
+                <a:spcPct val="100000"/>
+              </a:lnSpc>
               <a:spcBef>
                 <a:spcPts val="0"/>
               </a:spcBef>
@@ -24488,19 +27229,35 @@
           </a:bodyPr>
           <a:lstStyle/>
           <a:p>
-            <a:pPr indent="0" lvl="0" marL="0" rtl="0" algn="l">
-              <a:spcBef>
-                <a:spcPts val="0"/>
-              </a:spcBef>
-              <a:spcAft>
-                <a:spcPts val="0"/>
-              </a:spcAft>
+            <a:pPr indent="0" lvl="0" marL="0" marR="0" rtl="0" algn="l">
+              <a:lnSpc>
+                <a:spcPct val="100000"/>
+              </a:lnSpc>
+              <a:spcBef>
+                <a:spcPts val="0"/>
+              </a:spcBef>
+              <a:spcAft>
+                <a:spcPts val="0"/>
+              </a:spcAft>
+              <a:buClr>
+                <a:srgbClr val="000000"/>
+              </a:buClr>
+              <a:buSzPts val="1400"/>
+              <a:buFont typeface="Arial"/>
               <a:buNone/>
             </a:pPr>
             <a:r>
               <a:t/>
             </a:r>
-            <a:endParaRPr/>
+            <a:endParaRPr b="0" i="0" sz="1400" u="none" cap="none" strike="noStrike">
+              <a:solidFill>
+                <a:srgbClr val="000000"/>
+              </a:solidFill>
+              <a:latin typeface="Arial"/>
+              <a:ea typeface="Arial"/>
+              <a:cs typeface="Arial"/>
+              <a:sym typeface="Arial"/>
+            </a:endParaRPr>
           </a:p>
         </p:txBody>
       </p:sp>
@@ -24530,6 +27287,9 @@
           <a:lstStyle/>
           <a:p>
             <a:pPr indent="0" lvl="0" marL="0" marR="0" rtl="0" algn="ctr">
+              <a:lnSpc>
+                <a:spcPct val="100000"/>
+              </a:lnSpc>
               <a:spcBef>
                 <a:spcPts val="0"/>
               </a:spcBef>
@@ -24593,6 +27353,9 @@
           <a:lstStyle/>
           <a:p>
             <a:pPr indent="0" lvl="0" marL="0" marR="0" rtl="0" algn="ctr">
+              <a:lnSpc>
+                <a:spcPct val="100000"/>
+              </a:lnSpc>
               <a:spcBef>
                 <a:spcPts val="0"/>
               </a:spcBef>
@@ -24663,19 +27426,35 @@
           </a:bodyPr>
           <a:lstStyle/>
           <a:p>
-            <a:pPr indent="0" lvl="0" marL="0" rtl="0" algn="l">
-              <a:spcBef>
-                <a:spcPts val="0"/>
-              </a:spcBef>
-              <a:spcAft>
-                <a:spcPts val="0"/>
-              </a:spcAft>
+            <a:pPr indent="0" lvl="0" marL="0" marR="0" rtl="0" algn="l">
+              <a:lnSpc>
+                <a:spcPct val="100000"/>
+              </a:lnSpc>
+              <a:spcBef>
+                <a:spcPts val="0"/>
+              </a:spcBef>
+              <a:spcAft>
+                <a:spcPts val="0"/>
+              </a:spcAft>
+              <a:buClr>
+                <a:srgbClr val="000000"/>
+              </a:buClr>
+              <a:buSzPts val="1400"/>
+              <a:buFont typeface="Arial"/>
               <a:buNone/>
             </a:pPr>
             <a:r>
               <a:t/>
             </a:r>
-            <a:endParaRPr/>
+            <a:endParaRPr b="0" i="0" sz="1400" u="none" cap="none" strike="noStrike">
+              <a:solidFill>
+                <a:srgbClr val="000000"/>
+              </a:solidFill>
+              <a:latin typeface="Arial"/>
+              <a:ea typeface="Arial"/>
+              <a:cs typeface="Arial"/>
+              <a:sym typeface="Arial"/>
+            </a:endParaRPr>
           </a:p>
         </p:txBody>
       </p:sp>
@@ -24705,6 +27484,9 @@
           <a:lstStyle/>
           <a:p>
             <a:pPr indent="0" lvl="0" marL="0" marR="0" rtl="0" algn="l">
+              <a:lnSpc>
+                <a:spcPct val="100000"/>
+              </a:lnSpc>
               <a:spcBef>
                 <a:spcPts val="0"/>
               </a:spcBef>
